--- a/Teaching/Compile Time Errrors/sessions/problem_session_3_state_machine.pptx
+++ b/Teaching/Compile Time Errrors/sessions/problem_session_3_state_machine.pptx
@@ -4,6 +4,9 @@
   <p:sldMasterIdLst>
     <p:sldMasterId id="2147483648" r:id="rId1"/>
   </p:sldMasterIdLst>
+  <p:notesMasterIdLst>
+    <p:notesMasterId r:id="rId32"/>
+  </p:notesMasterIdLst>
   <p:sldIdLst>
     <p:sldId id="256" r:id="rId2"/>
     <p:sldId id="257" r:id="rId3"/>
@@ -36,10 +39,7 @@
     <p:sldId id="284" r:id="rId30"/>
     <p:sldId id="285" r:id="rId31"/>
   </p:sldIdLst>
-  <p:notesMasterIdLst>
-    <p:notesMasterId r:id="rId32"/>
-  </p:notesMasterIdLst>
-  <p:sldSz cx="9144000" cy="5143500"/>
+  <p:sldSz cx="9144000" cy="5143500" type="screen16x9"/>
   <p:notesSz cx="5143500" cy="9144000"/>
   <p:defaultTextStyle>
     <a:lvl1pPr marL="0" algn="l" defTabSz="914400" rtl="0" eaLnBrk="1" latinLnBrk="0" hangingPunct="1">
@@ -133,6 +133,11 @@
       </a:defRPr>
     </a:lvl9pPr>
   </p:defaultTextStyle>
+  <p:extLst>
+    <p:ext uri="{EFAFB233-063F-42B5-8137-9DF3F51BA10A}">
+      <p15:sldGuideLst xmlns:p15="http://schemas.microsoft.com/office/powerpoint/2012/main"/>
+    </p:ext>
+  </p:extLst>
 </p:presentation>
 </file>
 
@@ -158,234 +163,10 @@
           <a:chExt cx="0" cy="0"/>
         </a:xfrm>
       </p:grpSpPr>
-      <p:sp>
-        <p:nvSpPr>
-          <p:cNvPr id="2" name="Header Placeholder 1"/>
-          <p:cNvSpPr>
-            <a:spLocks noGrp="1"/>
-          </p:cNvSpPr>
-          <p:nvPr>
-            <p:ph type="hdr" sz="quarter"/>
-          </p:nvPr>
-        </p:nvSpPr>
-        <p:spPr>
-          <a:xfrm>
-            <a:off x="0" y="0"/>
-            <a:ext cx="2971800" cy="458788"/>
-          </a:xfrm>
-          <a:prstGeom prst="rect">
-            <a:avLst/>
-          </a:prstGeom>
-        </p:spPr>
-        <p:txBody>
-          <a:bodyPr vert="horz" lIns="91440" tIns="45720" rIns="91440" bIns="45720" rtlCol="0"/>
-          <a:lstStyle>
-            <a:lvl1pPr algn="l">
-              <a:defRPr sz="1200"/>
-            </a:lvl1pPr>
-          </a:lstStyle>
-          <a:p>
-            <a:endParaRPr lang="en-US"/>
-          </a:p>
-        </p:txBody>
-      </p:sp>
-      <p:sp>
-        <p:nvSpPr>
-          <p:cNvPr id="3" name="Date Placeholder 2"/>
-          <p:cNvSpPr>
-            <a:spLocks noGrp="1"/>
-          </p:cNvSpPr>
-          <p:nvPr>
-            <p:ph type="dt" idx="1"/>
-          </p:nvPr>
-        </p:nvSpPr>
-        <p:spPr>
-          <a:xfrm>
-            <a:off x="3884613" y="0"/>
-            <a:ext cx="2971800" cy="458788"/>
-          </a:xfrm>
-          <a:prstGeom prst="rect">
-            <a:avLst/>
-          </a:prstGeom>
-        </p:spPr>
-        <p:txBody>
-          <a:bodyPr vert="horz" lIns="91440" tIns="45720" rIns="91440" bIns="45720" rtlCol="0"/>
-          <a:lstStyle>
-            <a:lvl1pPr algn="r">
-              <a:defRPr sz="1200"/>
-            </a:lvl1pPr>
-          </a:lstStyle>
-          <a:p>
-            <a:fld id="{5282F153-3F37-0F45-9E97-73ACFA13230C}" type="datetimeFigureOut">
-              <a:rPr lang="en-US"/>
-              <a:t>7/23/19</a:t>
-            </a:fld>
-            <a:endParaRPr lang="en-US"/>
-          </a:p>
-        </p:txBody>
-      </p:sp>
-      <p:sp>
-        <p:nvSpPr>
-          <p:cNvPr id="4" name="Slide Image Placeholder 3"/>
-          <p:cNvSpPr>
-            <a:spLocks noGrp="1" noRot="1" noChangeAspect="1"/>
-          </p:cNvSpPr>
-          <p:nvPr>
-            <p:ph type="sldImg" idx="2"/>
-          </p:nvPr>
-        </p:nvSpPr>
-        <p:spPr>
-          <a:xfrm>
-            <a:off x="685800" y="1143000"/>
-            <a:ext cx="5486400" cy="3086100"/>
-          </a:xfrm>
-          <a:prstGeom prst="rect">
-            <a:avLst/>
-          </a:prstGeom>
-          <a:noFill/>
-          <a:ln w="12700">
-            <a:solidFill>
-              <a:prstClr val="black"/>
-            </a:solidFill>
-          </a:ln>
-        </p:spPr>
-        <p:txBody>
-          <a:bodyPr vert="horz" lIns="91440" tIns="45720" rIns="91440" bIns="45720" rtlCol="0" anchor="ctr"/>
-          <a:lstStyle/>
-          <a:p>
-            <a:endParaRPr lang="en-US"/>
-          </a:p>
-        </p:txBody>
-      </p:sp>
-      <p:sp>
-        <p:nvSpPr>
-          <p:cNvPr id="5" name="Notes Placeholder 4"/>
-          <p:cNvSpPr>
-            <a:spLocks noGrp="1"/>
-          </p:cNvSpPr>
-          <p:nvPr>
-            <p:ph type="body" sz="quarter" idx="3"/>
-          </p:nvPr>
-        </p:nvSpPr>
-        <p:spPr>
-          <a:xfrm>
-            <a:off x="685800" y="4400550"/>
-            <a:ext cx="5486400" cy="3600450"/>
-          </a:xfrm>
-          <a:prstGeom prst="rect">
-            <a:avLst/>
-          </a:prstGeom>
-        </p:spPr>
-        <p:txBody>
-          <a:bodyPr vert="horz" lIns="91440" tIns="45720" rIns="91440" bIns="45720" rtlCol="0"/>
-          <a:lstStyle/>
-          <a:p>
-            <a:pPr lvl="0"/>
-            <a:r>
-              <a:rPr lang="en-US"/>
-              <a:t>Click to edit Master text styles</a:t>
-            </a:r>
-          </a:p>
-          <a:p>
-            <a:pPr lvl="1"/>
-            <a:r>
-              <a:rPr lang="en-US"/>
-              <a:t>Second level</a:t>
-            </a:r>
-          </a:p>
-          <a:p>
-            <a:pPr lvl="2"/>
-            <a:r>
-              <a:rPr lang="en-US"/>
-              <a:t>Third level</a:t>
-            </a:r>
-          </a:p>
-          <a:p>
-            <a:pPr lvl="3"/>
-            <a:r>
-              <a:rPr lang="en-US"/>
-              <a:t>Fourth level</a:t>
-            </a:r>
-          </a:p>
-          <a:p>
-            <a:pPr lvl="4"/>
-            <a:r>
-              <a:rPr lang="en-US"/>
-              <a:t>Fifth level</a:t>
-            </a:r>
-          </a:p>
-        </p:txBody>
-      </p:sp>
-      <p:sp>
-        <p:nvSpPr>
-          <p:cNvPr id="6" name="Footer Placeholder 5"/>
-          <p:cNvSpPr>
-            <a:spLocks noGrp="1"/>
-          </p:cNvSpPr>
-          <p:nvPr>
-            <p:ph type="ftr" sz="quarter" idx="4"/>
-          </p:nvPr>
-        </p:nvSpPr>
-        <p:spPr>
-          <a:xfrm>
-            <a:off x="0" y="8685213"/>
-            <a:ext cx="2971800" cy="458787"/>
-          </a:xfrm>
-          <a:prstGeom prst="rect">
-            <a:avLst/>
-          </a:prstGeom>
-        </p:spPr>
-        <p:txBody>
-          <a:bodyPr vert="horz" lIns="91440" tIns="45720" rIns="91440" bIns="45720" rtlCol="0" anchor="b"/>
-          <a:lstStyle>
-            <a:lvl1pPr algn="l">
-              <a:defRPr sz="1200"/>
-            </a:lvl1pPr>
-          </a:lstStyle>
-          <a:p>
-            <a:endParaRPr lang="en-US"/>
-          </a:p>
-        </p:txBody>
-      </p:sp>
-      <p:sp>
-        <p:nvSpPr>
-          <p:cNvPr id="7" name="Slide Number Placeholder 6"/>
-          <p:cNvSpPr>
-            <a:spLocks noGrp="1"/>
-          </p:cNvSpPr>
-          <p:nvPr>
-            <p:ph type="sldNum" sz="quarter" idx="5"/>
-          </p:nvPr>
-        </p:nvSpPr>
-        <p:spPr>
-          <a:xfrm>
-            <a:off x="3884613" y="8685213"/>
-            <a:ext cx="2971800" cy="458787"/>
-          </a:xfrm>
-          <a:prstGeom prst="rect">
-            <a:avLst/>
-          </a:prstGeom>
-        </p:spPr>
-        <p:txBody>
-          <a:bodyPr vert="horz" lIns="91440" tIns="45720" rIns="91440" bIns="45720" rtlCol="0" anchor="b"/>
-          <a:lstStyle>
-            <a:lvl1pPr algn="r">
-              <a:defRPr sz="1200"/>
-            </a:lvl1pPr>
-          </a:lstStyle>
-          <a:p>
-            <a:fld id="{CE5E9CC1-C706-0F49-92D6-E571CC5EEA8F}" type="slidenum">
-              <a:rPr lang="en-US"/>
-              <a:t>‹#›</a:t>
-            </a:fld>
-            <a:endParaRPr lang="en-US"/>
-          </a:p>
-        </p:txBody>
-      </p:sp>
     </p:spTree>
     <p:extLst>
       <p:ext uri="{BB962C8B-B14F-4D97-AF65-F5344CB8AC3E}">
-        <p14:creationId xmlns:p14="http://schemas.microsoft.com/office/powerpoint/2010/main" val="1024086991"/>
+        <p14:creationId xmlns:p14="http://schemas.microsoft.com/office/powerpoint/2010/main" val="3772439623"/>
       </p:ext>
     </p:extLst>
   </p:cSld>
@@ -529,10 +310,6 @@
           <a:bodyPr/>
           <a:lstStyle/>
           <a:p>
-            <a:r>
-              <a:rPr lang="en-US" dirty="0"/>
-              <a:t/>
-            </a:r>
             <a:endParaRPr lang="en-US" dirty="0"/>
           </a:p>
         </p:txBody>
@@ -617,10 +394,6 @@
           <a:bodyPr/>
           <a:lstStyle/>
           <a:p>
-            <a:r>
-              <a:rPr lang="en-US" dirty="0"/>
-              <a:t/>
-            </a:r>
             <a:endParaRPr lang="en-US" dirty="0"/>
           </a:p>
         </p:txBody>
@@ -705,10 +478,6 @@
           <a:bodyPr/>
           <a:lstStyle/>
           <a:p>
-            <a:r>
-              <a:rPr lang="en-US" dirty="0"/>
-              <a:t/>
-            </a:r>
             <a:endParaRPr lang="en-US" dirty="0"/>
           </a:p>
         </p:txBody>
@@ -793,10 +562,6 @@
           <a:bodyPr/>
           <a:lstStyle/>
           <a:p>
-            <a:r>
-              <a:rPr lang="en-US" dirty="0"/>
-              <a:t/>
-            </a:r>
             <a:endParaRPr lang="en-US" dirty="0"/>
           </a:p>
         </p:txBody>
@@ -881,10 +646,6 @@
           <a:bodyPr/>
           <a:lstStyle/>
           <a:p>
-            <a:r>
-              <a:rPr lang="en-US" dirty="0"/>
-              <a:t/>
-            </a:r>
             <a:endParaRPr lang="en-US" dirty="0"/>
           </a:p>
         </p:txBody>
@@ -969,10 +730,6 @@
           <a:bodyPr/>
           <a:lstStyle/>
           <a:p>
-            <a:r>
-              <a:rPr lang="en-US" dirty="0"/>
-              <a:t/>
-            </a:r>
             <a:endParaRPr lang="en-US" dirty="0"/>
           </a:p>
         </p:txBody>
@@ -1057,10 +814,6 @@
           <a:bodyPr/>
           <a:lstStyle/>
           <a:p>
-            <a:r>
-              <a:rPr lang="en-US" dirty="0"/>
-              <a:t/>
-            </a:r>
             <a:endParaRPr lang="en-US" dirty="0"/>
           </a:p>
         </p:txBody>
@@ -1145,10 +898,6 @@
           <a:bodyPr/>
           <a:lstStyle/>
           <a:p>
-            <a:r>
-              <a:rPr lang="en-US" dirty="0"/>
-              <a:t/>
-            </a:r>
             <a:endParaRPr lang="en-US" dirty="0"/>
           </a:p>
         </p:txBody>
@@ -1233,10 +982,6 @@
           <a:bodyPr/>
           <a:lstStyle/>
           <a:p>
-            <a:r>
-              <a:rPr lang="en-US" dirty="0"/>
-              <a:t/>
-            </a:r>
             <a:endParaRPr lang="en-US" dirty="0"/>
           </a:p>
         </p:txBody>
@@ -1321,10 +1066,6 @@
           <a:bodyPr/>
           <a:lstStyle/>
           <a:p>
-            <a:r>
-              <a:rPr lang="en-US" dirty="0"/>
-              <a:t/>
-            </a:r>
             <a:endParaRPr lang="en-US" dirty="0"/>
           </a:p>
         </p:txBody>
@@ -1409,10 +1150,6 @@
           <a:bodyPr/>
           <a:lstStyle/>
           <a:p>
-            <a:r>
-              <a:rPr lang="en-US" dirty="0"/>
-              <a:t/>
-            </a:r>
             <a:endParaRPr lang="en-US" dirty="0"/>
           </a:p>
         </p:txBody>
@@ -1497,10 +1234,6 @@
           <a:bodyPr/>
           <a:lstStyle/>
           <a:p>
-            <a:r>
-              <a:rPr lang="en-US" dirty="0"/>
-              <a:t/>
-            </a:r>
             <a:endParaRPr lang="en-US" dirty="0"/>
           </a:p>
         </p:txBody>
@@ -1585,10 +1318,6 @@
           <a:bodyPr/>
           <a:lstStyle/>
           <a:p>
-            <a:r>
-              <a:rPr lang="en-US" dirty="0"/>
-              <a:t/>
-            </a:r>
             <a:endParaRPr lang="en-US" dirty="0"/>
           </a:p>
         </p:txBody>
@@ -1673,10 +1402,6 @@
           <a:bodyPr/>
           <a:lstStyle/>
           <a:p>
-            <a:r>
-              <a:rPr lang="en-US" dirty="0"/>
-              <a:t/>
-            </a:r>
             <a:endParaRPr lang="en-US" dirty="0"/>
           </a:p>
         </p:txBody>
@@ -1761,10 +1486,6 @@
           <a:bodyPr/>
           <a:lstStyle/>
           <a:p>
-            <a:r>
-              <a:rPr lang="en-US" dirty="0"/>
-              <a:t/>
-            </a:r>
             <a:endParaRPr lang="en-US" dirty="0"/>
           </a:p>
         </p:txBody>
@@ -1849,10 +1570,6 @@
           <a:bodyPr/>
           <a:lstStyle/>
           <a:p>
-            <a:r>
-              <a:rPr lang="en-US" dirty="0"/>
-              <a:t/>
-            </a:r>
             <a:endParaRPr lang="en-US" dirty="0"/>
           </a:p>
         </p:txBody>
@@ -1937,10 +1654,6 @@
           <a:bodyPr/>
           <a:lstStyle/>
           <a:p>
-            <a:r>
-              <a:rPr lang="en-US" dirty="0"/>
-              <a:t/>
-            </a:r>
             <a:endParaRPr lang="en-US" dirty="0"/>
           </a:p>
         </p:txBody>
@@ -2025,10 +1738,6 @@
           <a:bodyPr/>
           <a:lstStyle/>
           <a:p>
-            <a:r>
-              <a:rPr lang="en-US" dirty="0"/>
-              <a:t/>
-            </a:r>
             <a:endParaRPr lang="en-US" dirty="0"/>
           </a:p>
         </p:txBody>
@@ -2113,10 +1822,6 @@
           <a:bodyPr/>
           <a:lstStyle/>
           <a:p>
-            <a:r>
-              <a:rPr lang="en-US" dirty="0"/>
-              <a:t/>
-            </a:r>
             <a:endParaRPr lang="en-US" dirty="0"/>
           </a:p>
         </p:txBody>
@@ -2201,10 +1906,6 @@
           <a:bodyPr/>
           <a:lstStyle/>
           <a:p>
-            <a:r>
-              <a:rPr lang="en-US" dirty="0"/>
-              <a:t/>
-            </a:r>
             <a:endParaRPr lang="en-US" dirty="0"/>
           </a:p>
         </p:txBody>
@@ -2289,10 +1990,6 @@
           <a:bodyPr/>
           <a:lstStyle/>
           <a:p>
-            <a:r>
-              <a:rPr lang="en-US" dirty="0"/>
-              <a:t/>
-            </a:r>
             <a:endParaRPr lang="en-US" dirty="0"/>
           </a:p>
         </p:txBody>
@@ -2377,10 +2074,6 @@
           <a:bodyPr/>
           <a:lstStyle/>
           <a:p>
-            <a:r>
-              <a:rPr lang="en-US" dirty="0"/>
-              <a:t/>
-            </a:r>
             <a:endParaRPr lang="en-US" dirty="0"/>
           </a:p>
         </p:txBody>
@@ -2465,10 +2158,6 @@
           <a:bodyPr/>
           <a:lstStyle/>
           <a:p>
-            <a:r>
-              <a:rPr lang="en-US" dirty="0"/>
-              <a:t/>
-            </a:r>
             <a:endParaRPr lang="en-US" dirty="0"/>
           </a:p>
         </p:txBody>
@@ -2553,10 +2242,6 @@
           <a:bodyPr/>
           <a:lstStyle/>
           <a:p>
-            <a:r>
-              <a:rPr lang="en-US" dirty="0"/>
-              <a:t/>
-            </a:r>
             <a:endParaRPr lang="en-US" dirty="0"/>
           </a:p>
         </p:txBody>
@@ -2641,10 +2326,6 @@
           <a:bodyPr/>
           <a:lstStyle/>
           <a:p>
-            <a:r>
-              <a:rPr lang="en-US" dirty="0"/>
-              <a:t/>
-            </a:r>
             <a:endParaRPr lang="en-US" dirty="0"/>
           </a:p>
         </p:txBody>
@@ -2729,10 +2410,6 @@
           <a:bodyPr/>
           <a:lstStyle/>
           <a:p>
-            <a:r>
-              <a:rPr lang="en-US" dirty="0"/>
-              <a:t/>
-            </a:r>
             <a:endParaRPr lang="en-US" dirty="0"/>
           </a:p>
         </p:txBody>
@@ -2817,10 +2494,6 @@
           <a:bodyPr/>
           <a:lstStyle/>
           <a:p>
-            <a:r>
-              <a:rPr lang="en-US" dirty="0"/>
-              <a:t/>
-            </a:r>
             <a:endParaRPr lang="en-US" dirty="0"/>
           </a:p>
         </p:txBody>
@@ -2905,10 +2578,6 @@
           <a:bodyPr/>
           <a:lstStyle/>
           <a:p>
-            <a:r>
-              <a:rPr lang="en-US" dirty="0"/>
-              <a:t/>
-            </a:r>
             <a:endParaRPr lang="en-US" dirty="0"/>
           </a:p>
         </p:txBody>
@@ -2993,10 +2662,6 @@
           <a:bodyPr/>
           <a:lstStyle/>
           <a:p>
-            <a:r>
-              <a:rPr lang="en-US" dirty="0"/>
-              <a:t/>
-            </a:r>
             <a:endParaRPr lang="en-US" dirty="0"/>
           </a:p>
         </p:txBody>
@@ -3081,10 +2746,6 @@
           <a:bodyPr/>
           <a:lstStyle/>
           <a:p>
-            <a:r>
-              <a:rPr lang="en-US" dirty="0"/>
-              <a:t/>
-            </a:r>
             <a:endParaRPr lang="en-US" dirty="0"/>
           </a:p>
         </p:txBody>
@@ -3158,6 +2819,11 @@
 <file path=ppt/slideMasters/slideMaster1.xml><?xml version="1.0" encoding="utf-8"?>
 <p:sldMaster xmlns:a="http://schemas.openxmlformats.org/drawingml/2006/main" xmlns:r="http://schemas.openxmlformats.org/officeDocument/2006/relationships" xmlns:p="http://schemas.openxmlformats.org/presentationml/2006/main">
   <p:cSld>
+    <p:bg>
+      <p:bgRef idx="1001">
+        <a:schemeClr val="bg1"/>
+      </p:bgRef>
+    </p:bg>
     <p:spTree>
       <p:nvGrpSpPr>
         <p:cNvPr id="1" name=""/>
@@ -3440,6 +3106,7 @@
         <a:solidFill>
           <a:srgbClr val="1E1E1E"/>
         </a:solidFill>
+        <a:effectLst/>
       </p:bgPr>
     </p:bg>
     <p:spTree>
@@ -3477,7 +3144,7 @@
           <a:bodyPr wrap="square" rtlCol="0" anchor="ctr"/>
           <a:lstStyle/>
           <a:p>
-            <a:pPr indent="0" marL="0">
+            <a:pPr marL="0" indent="0">
               <a:buNone/>
             </a:pPr>
             <a:r>
@@ -3516,7 +3183,7 @@
           <a:bodyPr wrap="square" rtlCol="0" anchor="ctr"/>
           <a:lstStyle/>
           <a:p>
-            <a:pPr indent="0" marL="0">
+            <a:pPr marL="0" indent="0">
               <a:buNone/>
             </a:pPr>
             <a:r>
@@ -3553,6 +3220,13 @@
           </a:solidFill>
           <a:ln/>
         </p:spPr>
+        <p:txBody>
+          <a:bodyPr/>
+          <a:lstStyle/>
+          <a:p>
+            <a:endParaRPr lang="en-US"/>
+          </a:p>
+        </p:txBody>
       </p:sp>
       <p:sp>
         <p:nvSpPr>
@@ -3575,7 +3249,7 @@
           <a:bodyPr wrap="square" rtlCol="0" anchor="ctr"/>
           <a:lstStyle/>
           <a:p>
-            <a:pPr indent="0" marL="0">
+            <a:pPr marL="0" indent="0">
               <a:buNone/>
             </a:pPr>
             <a:r>
@@ -3609,6 +3283,7 @@
         <a:solidFill>
           <a:srgbClr val="F5F5F5"/>
         </a:solidFill>
+        <a:effectLst/>
       </p:bgPr>
     </p:bg>
     <p:spTree>
@@ -3646,7 +3321,7 @@
           <a:bodyPr wrap="square" lIns="0" tIns="0" rIns="0" bIns="0" rtlCol="0" anchor="ctr"/>
           <a:lstStyle/>
           <a:p>
-            <a:pPr indent="0" marL="0">
+            <a:pPr marL="0" indent="0">
               <a:buNone/>
             </a:pPr>
             <a:r>
@@ -3683,6 +3358,13 @@
           </a:solidFill>
           <a:ln/>
         </p:spPr>
+        <p:txBody>
+          <a:bodyPr/>
+          <a:lstStyle/>
+          <a:p>
+            <a:endParaRPr lang="en-US"/>
+          </a:p>
+        </p:txBody>
       </p:sp>
       <p:graphicFrame>
         <p:nvGraphicFramePr>
@@ -3700,19 +3382,55 @@
         </p:nvGraphicFramePr>
         <p:xfrm>
           <a:off x="274320" y="868680"/>
-          <a:ext cx="8595360" cy="2377440"/>
+          <a:ext cx="7680960" cy="2377440"/>
         </p:xfrm>
         <a:graphic>
           <a:graphicData uri="http://schemas.openxmlformats.org/drawingml/2006/table">
             <a:tbl>
               <a:tblPr/>
               <a:tblGrid>
-                <a:gridCol w="1280160"/>
-                <a:gridCol w="1371600"/>
-                <a:gridCol w="1463040"/>
-                <a:gridCol w="1097280"/>
-                <a:gridCol w="1371600"/>
-                <a:gridCol w="1097280"/>
+                <a:gridCol w="1280160">
+                  <a:extLst>
+                    <a:ext uri="{9D8B030D-6E8A-4147-A177-3AD203B41FA5}">
+                      <a16:colId xmlns:a16="http://schemas.microsoft.com/office/drawing/2014/main" val="20000"/>
+                    </a:ext>
+                  </a:extLst>
+                </a:gridCol>
+                <a:gridCol w="1371600">
+                  <a:extLst>
+                    <a:ext uri="{9D8B030D-6E8A-4147-A177-3AD203B41FA5}">
+                      <a16:colId xmlns:a16="http://schemas.microsoft.com/office/drawing/2014/main" val="20001"/>
+                    </a:ext>
+                  </a:extLst>
+                </a:gridCol>
+                <a:gridCol w="1463040">
+                  <a:extLst>
+                    <a:ext uri="{9D8B030D-6E8A-4147-A177-3AD203B41FA5}">
+                      <a16:colId xmlns:a16="http://schemas.microsoft.com/office/drawing/2014/main" val="20002"/>
+                    </a:ext>
+                  </a:extLst>
+                </a:gridCol>
+                <a:gridCol w="1097280">
+                  <a:extLst>
+                    <a:ext uri="{9D8B030D-6E8A-4147-A177-3AD203B41FA5}">
+                      <a16:colId xmlns:a16="http://schemas.microsoft.com/office/drawing/2014/main" val="20003"/>
+                    </a:ext>
+                  </a:extLst>
+                </a:gridCol>
+                <a:gridCol w="1371600">
+                  <a:extLst>
+                    <a:ext uri="{9D8B030D-6E8A-4147-A177-3AD203B41FA5}">
+                      <a16:colId xmlns:a16="http://schemas.microsoft.com/office/drawing/2014/main" val="20004"/>
+                    </a:ext>
+                  </a:extLst>
+                </a:gridCol>
+                <a:gridCol w="1097280">
+                  <a:extLst>
+                    <a:ext uri="{9D8B030D-6E8A-4147-A177-3AD203B41FA5}">
+                      <a16:colId xmlns:a16="http://schemas.microsoft.com/office/drawing/2014/main" val="20005"/>
+                    </a:ext>
+                  </a:extLst>
+                </a:gridCol>
               </a:tblGrid>
               <a:tr h="396240">
                 <a:tc>
@@ -3720,7 +3438,7 @@
                     <a:bodyPr/>
                     <a:lstStyle/>
                     <a:p>
-                      <a:pPr algn="ctr" indent="0" marL="0">
+                      <a:pPr marL="0" indent="0" algn="ctr">
                         <a:buNone/>
                       </a:pPr>
                       <a:r>
@@ -3741,7 +3459,7 @@
                       </a:endParaRPr>
                     </a:p>
                   </a:txBody>
-                  <a:tcPr marL="91440" marR="91440" marT="45720" marB="45720" anchor="ctr">
+                  <a:tcPr anchor="ctr">
                     <a:lnL w="6350" cap="flat" cmpd="sng" algn="ctr">
                       <a:solidFill>
                         <a:srgbClr val="D1D5DB"/>
@@ -3788,7 +3506,7 @@
                     <a:bodyPr/>
                     <a:lstStyle/>
                     <a:p>
-                      <a:pPr algn="ctr" indent="0" marL="0">
+                      <a:pPr marL="0" indent="0" algn="ctr">
                         <a:buNone/>
                       </a:pPr>
                       <a:r>
@@ -3809,7 +3527,7 @@
                       </a:endParaRPr>
                     </a:p>
                   </a:txBody>
-                  <a:tcPr marL="91440" marR="91440" marT="45720" marB="45720" anchor="ctr">
+                  <a:tcPr anchor="ctr">
                     <a:lnL w="6350" cap="flat" cmpd="sng" algn="ctr">
                       <a:solidFill>
                         <a:srgbClr val="D1D5DB"/>
@@ -3856,7 +3574,7 @@
                     <a:bodyPr/>
                     <a:lstStyle/>
                     <a:p>
-                      <a:pPr algn="ctr" indent="0" marL="0">
+                      <a:pPr marL="0" indent="0" algn="ctr">
                         <a:buNone/>
                       </a:pPr>
                       <a:r>
@@ -3877,7 +3595,7 @@
                       </a:endParaRPr>
                     </a:p>
                   </a:txBody>
-                  <a:tcPr marL="91440" marR="91440" marT="45720" marB="45720" anchor="ctr">
+                  <a:tcPr anchor="ctr">
                     <a:lnL w="6350" cap="flat" cmpd="sng" algn="ctr">
                       <a:solidFill>
                         <a:srgbClr val="D1D5DB"/>
@@ -3924,7 +3642,7 @@
                     <a:bodyPr/>
                     <a:lstStyle/>
                     <a:p>
-                      <a:pPr algn="ctr" indent="0" marL="0">
+                      <a:pPr marL="0" indent="0" algn="ctr">
                         <a:buNone/>
                       </a:pPr>
                       <a:r>
@@ -3945,7 +3663,7 @@
                       </a:endParaRPr>
                     </a:p>
                   </a:txBody>
-                  <a:tcPr marL="91440" marR="91440" marT="45720" marB="45720" anchor="ctr">
+                  <a:tcPr anchor="ctr">
                     <a:lnL w="6350" cap="flat" cmpd="sng" algn="ctr">
                       <a:solidFill>
                         <a:srgbClr val="D1D5DB"/>
@@ -3992,7 +3710,7 @@
                     <a:bodyPr/>
                     <a:lstStyle/>
                     <a:p>
-                      <a:pPr algn="ctr" indent="0" marL="0">
+                      <a:pPr marL="0" indent="0" algn="ctr">
                         <a:buNone/>
                       </a:pPr>
                       <a:r>
@@ -4013,7 +3731,7 @@
                       </a:endParaRPr>
                     </a:p>
                   </a:txBody>
-                  <a:tcPr marL="91440" marR="91440" marT="45720" marB="45720" anchor="ctr">
+                  <a:tcPr anchor="ctr">
                     <a:lnL w="6350" cap="flat" cmpd="sng" algn="ctr">
                       <a:solidFill>
                         <a:srgbClr val="D1D5DB"/>
@@ -4060,7 +3778,7 @@
                     <a:bodyPr/>
                     <a:lstStyle/>
                     <a:p>
-                      <a:pPr algn="ctr" indent="0" marL="0">
+                      <a:pPr marL="0" indent="0" algn="ctr">
                         <a:buNone/>
                       </a:pPr>
                       <a:r>
@@ -4081,7 +3799,7 @@
                       </a:endParaRPr>
                     </a:p>
                   </a:txBody>
-                  <a:tcPr marL="91440" marR="91440" marT="45720" marB="45720" anchor="ctr">
+                  <a:tcPr anchor="ctr">
                     <a:lnL w="6350" cap="flat" cmpd="sng" algn="ctr">
                       <a:solidFill>
                         <a:srgbClr val="D1D5DB"/>
@@ -4123,6 +3841,11 @@
                     </a:solidFill>
                   </a:tcPr>
                 </a:tc>
+                <a:extLst>
+                  <a:ext uri="{0D108BD9-81ED-4DB2-BD59-A6C34878D82A}">
+                    <a16:rowId xmlns:a16="http://schemas.microsoft.com/office/drawing/2014/main" val="10000"/>
+                  </a:ext>
+                </a:extLst>
               </a:tr>
               <a:tr h="396240">
                 <a:tc>
@@ -4130,7 +3853,7 @@
                     <a:bodyPr/>
                     <a:lstStyle/>
                     <a:p>
-                      <a:pPr algn="ctr" indent="0" marL="0">
+                      <a:pPr marL="0" indent="0" algn="ctr">
                         <a:buNone/>
                       </a:pPr>
                       <a:r>
@@ -4151,7 +3874,7 @@
                       </a:endParaRPr>
                     </a:p>
                   </a:txBody>
-                  <a:tcPr marL="91440" marR="91440" marT="45720" marB="45720" anchor="ctr">
+                  <a:tcPr anchor="ctr">
                     <a:lnL w="6350" cap="flat" cmpd="sng" algn="ctr">
                       <a:solidFill>
                         <a:srgbClr val="D1D5DB"/>
@@ -4198,7 +3921,7 @@
                     <a:bodyPr/>
                     <a:lstStyle/>
                     <a:p>
-                      <a:pPr algn="ctr" indent="0" marL="0">
+                      <a:pPr marL="0" indent="0" algn="ctr">
                         <a:buNone/>
                       </a:pPr>
                       <a:r>
@@ -4219,7 +3942,7 @@
                       </a:endParaRPr>
                     </a:p>
                   </a:txBody>
-                  <a:tcPr marL="91440" marR="91440" marT="45720" marB="45720" anchor="ctr">
+                  <a:tcPr anchor="ctr">
                     <a:lnL w="6350" cap="flat" cmpd="sng" algn="ctr">
                       <a:solidFill>
                         <a:srgbClr val="D1D5DB"/>
@@ -4266,7 +3989,7 @@
                     <a:bodyPr/>
                     <a:lstStyle/>
                     <a:p>
-                      <a:pPr algn="ctr" indent="0" marL="0">
+                      <a:pPr marL="0" indent="0" algn="ctr">
                         <a:buNone/>
                       </a:pPr>
                       <a:r>
@@ -4287,7 +4010,7 @@
                       </a:endParaRPr>
                     </a:p>
                   </a:txBody>
-                  <a:tcPr marL="91440" marR="91440" marT="45720" marB="45720" anchor="ctr">
+                  <a:tcPr anchor="ctr">
                     <a:lnL w="6350" cap="flat" cmpd="sng" algn="ctr">
                       <a:solidFill>
                         <a:srgbClr val="D1D5DB"/>
@@ -4334,7 +4057,7 @@
                     <a:bodyPr/>
                     <a:lstStyle/>
                     <a:p>
-                      <a:pPr algn="ctr" indent="0" marL="0">
+                      <a:pPr marL="0" indent="0" algn="ctr">
                         <a:buNone/>
                       </a:pPr>
                       <a:r>
@@ -4355,7 +4078,7 @@
                       </a:endParaRPr>
                     </a:p>
                   </a:txBody>
-                  <a:tcPr marL="91440" marR="91440" marT="45720" marB="45720" anchor="ctr">
+                  <a:tcPr anchor="ctr">
                     <a:lnL w="6350" cap="flat" cmpd="sng" algn="ctr">
                       <a:solidFill>
                         <a:srgbClr val="D1D5DB"/>
@@ -4402,7 +4125,7 @@
                     <a:bodyPr/>
                     <a:lstStyle/>
                     <a:p>
-                      <a:pPr algn="ctr" indent="0" marL="0">
+                      <a:pPr marL="0" indent="0" algn="ctr">
                         <a:buNone/>
                       </a:pPr>
                       <a:r>
@@ -4423,7 +4146,7 @@
                       </a:endParaRPr>
                     </a:p>
                   </a:txBody>
-                  <a:tcPr marL="91440" marR="91440" marT="45720" marB="45720" anchor="ctr">
+                  <a:tcPr anchor="ctr">
                     <a:lnL w="6350" cap="flat" cmpd="sng" algn="ctr">
                       <a:solidFill>
                         <a:srgbClr val="D1D5DB"/>
@@ -4470,7 +4193,7 @@
                     <a:bodyPr/>
                     <a:lstStyle/>
                     <a:p>
-                      <a:pPr algn="ctr" indent="0" marL="0">
+                      <a:pPr marL="0" indent="0" algn="ctr">
                         <a:buNone/>
                       </a:pPr>
                       <a:r>
@@ -4491,7 +4214,7 @@
                       </a:endParaRPr>
                     </a:p>
                   </a:txBody>
-                  <a:tcPr marL="91440" marR="91440" marT="45720" marB="45720" anchor="ctr">
+                  <a:tcPr anchor="ctr">
                     <a:lnL w="6350" cap="flat" cmpd="sng" algn="ctr">
                       <a:solidFill>
                         <a:srgbClr val="D1D5DB"/>
@@ -4533,6 +4256,11 @@
                     </a:solidFill>
                   </a:tcPr>
                 </a:tc>
+                <a:extLst>
+                  <a:ext uri="{0D108BD9-81ED-4DB2-BD59-A6C34878D82A}">
+                    <a16:rowId xmlns:a16="http://schemas.microsoft.com/office/drawing/2014/main" val="10001"/>
+                  </a:ext>
+                </a:extLst>
               </a:tr>
               <a:tr h="396240">
                 <a:tc>
@@ -4540,7 +4268,7 @@
                     <a:bodyPr/>
                     <a:lstStyle/>
                     <a:p>
-                      <a:pPr algn="ctr" indent="0" marL="0">
+                      <a:pPr marL="0" indent="0" algn="ctr">
                         <a:buNone/>
                       </a:pPr>
                       <a:r>
@@ -4561,7 +4289,7 @@
                       </a:endParaRPr>
                     </a:p>
                   </a:txBody>
-                  <a:tcPr marL="91440" marR="91440" marT="45720" marB="45720" anchor="ctr">
+                  <a:tcPr anchor="ctr">
                     <a:lnL w="6350" cap="flat" cmpd="sng" algn="ctr">
                       <a:solidFill>
                         <a:srgbClr val="D1D5DB"/>
@@ -4608,7 +4336,7 @@
                     <a:bodyPr/>
                     <a:lstStyle/>
                     <a:p>
-                      <a:pPr algn="ctr" indent="0" marL="0">
+                      <a:pPr marL="0" indent="0" algn="ctr">
                         <a:buNone/>
                       </a:pPr>
                       <a:r>
@@ -4629,7 +4357,7 @@
                       </a:endParaRPr>
                     </a:p>
                   </a:txBody>
-                  <a:tcPr marL="91440" marR="91440" marT="45720" marB="45720" anchor="ctr">
+                  <a:tcPr anchor="ctr">
                     <a:lnL w="6350" cap="flat" cmpd="sng" algn="ctr">
                       <a:solidFill>
                         <a:srgbClr val="D1D5DB"/>
@@ -4676,7 +4404,7 @@
                     <a:bodyPr/>
                     <a:lstStyle/>
                     <a:p>
-                      <a:pPr algn="ctr" indent="0" marL="0">
+                      <a:pPr marL="0" indent="0" algn="ctr">
                         <a:buNone/>
                       </a:pPr>
                       <a:r>
@@ -4697,7 +4425,7 @@
                       </a:endParaRPr>
                     </a:p>
                   </a:txBody>
-                  <a:tcPr marL="91440" marR="91440" marT="45720" marB="45720" anchor="ctr">
+                  <a:tcPr anchor="ctr">
                     <a:lnL w="6350" cap="flat" cmpd="sng" algn="ctr">
                       <a:solidFill>
                         <a:srgbClr val="D1D5DB"/>
@@ -4744,7 +4472,7 @@
                     <a:bodyPr/>
                     <a:lstStyle/>
                     <a:p>
-                      <a:pPr algn="ctr" indent="0" marL="0">
+                      <a:pPr marL="0" indent="0" algn="ctr">
                         <a:buNone/>
                       </a:pPr>
                       <a:r>
@@ -4765,7 +4493,7 @@
                       </a:endParaRPr>
                     </a:p>
                   </a:txBody>
-                  <a:tcPr marL="91440" marR="91440" marT="45720" marB="45720" anchor="ctr">
+                  <a:tcPr anchor="ctr">
                     <a:lnL w="6350" cap="flat" cmpd="sng" algn="ctr">
                       <a:solidFill>
                         <a:srgbClr val="D1D5DB"/>
@@ -4812,7 +4540,7 @@
                     <a:bodyPr/>
                     <a:lstStyle/>
                     <a:p>
-                      <a:pPr algn="ctr" indent="0" marL="0">
+                      <a:pPr marL="0" indent="0" algn="ctr">
                         <a:buNone/>
                       </a:pPr>
                       <a:r>
@@ -4833,7 +4561,7 @@
                       </a:endParaRPr>
                     </a:p>
                   </a:txBody>
-                  <a:tcPr marL="91440" marR="91440" marT="45720" marB="45720" anchor="ctr">
+                  <a:tcPr anchor="ctr">
                     <a:lnL w="6350" cap="flat" cmpd="sng" algn="ctr">
                       <a:solidFill>
                         <a:srgbClr val="D1D5DB"/>
@@ -4880,7 +4608,7 @@
                     <a:bodyPr/>
                     <a:lstStyle/>
                     <a:p>
-                      <a:pPr algn="ctr" indent="0" marL="0">
+                      <a:pPr marL="0" indent="0" algn="ctr">
                         <a:buNone/>
                       </a:pPr>
                       <a:r>
@@ -4901,7 +4629,7 @@
                       </a:endParaRPr>
                     </a:p>
                   </a:txBody>
-                  <a:tcPr marL="91440" marR="91440" marT="45720" marB="45720" anchor="ctr">
+                  <a:tcPr anchor="ctr">
                     <a:lnL w="6350" cap="flat" cmpd="sng" algn="ctr">
                       <a:solidFill>
                         <a:srgbClr val="D1D5DB"/>
@@ -4943,6 +4671,11 @@
                     </a:solidFill>
                   </a:tcPr>
                 </a:tc>
+                <a:extLst>
+                  <a:ext uri="{0D108BD9-81ED-4DB2-BD59-A6C34878D82A}">
+                    <a16:rowId xmlns:a16="http://schemas.microsoft.com/office/drawing/2014/main" val="10002"/>
+                  </a:ext>
+                </a:extLst>
               </a:tr>
               <a:tr h="396240">
                 <a:tc>
@@ -4950,7 +4683,7 @@
                     <a:bodyPr/>
                     <a:lstStyle/>
                     <a:p>
-                      <a:pPr algn="ctr" indent="0" marL="0">
+                      <a:pPr marL="0" indent="0" algn="ctr">
                         <a:buNone/>
                       </a:pPr>
                       <a:r>
@@ -4971,7 +4704,7 @@
                       </a:endParaRPr>
                     </a:p>
                   </a:txBody>
-                  <a:tcPr marL="91440" marR="91440" marT="45720" marB="45720" anchor="ctr">
+                  <a:tcPr anchor="ctr">
                     <a:lnL w="6350" cap="flat" cmpd="sng" algn="ctr">
                       <a:solidFill>
                         <a:srgbClr val="D1D5DB"/>
@@ -5018,7 +4751,7 @@
                     <a:bodyPr/>
                     <a:lstStyle/>
                     <a:p>
-                      <a:pPr algn="ctr" indent="0" marL="0">
+                      <a:pPr marL="0" indent="0" algn="ctr">
                         <a:buNone/>
                       </a:pPr>
                       <a:r>
@@ -5039,7 +4772,7 @@
                       </a:endParaRPr>
                     </a:p>
                   </a:txBody>
-                  <a:tcPr marL="91440" marR="91440" marT="45720" marB="45720" anchor="ctr">
+                  <a:tcPr anchor="ctr">
                     <a:lnL w="6350" cap="flat" cmpd="sng" algn="ctr">
                       <a:solidFill>
                         <a:srgbClr val="D1D5DB"/>
@@ -5086,7 +4819,7 @@
                     <a:bodyPr/>
                     <a:lstStyle/>
                     <a:p>
-                      <a:pPr algn="ctr" indent="0" marL="0">
+                      <a:pPr marL="0" indent="0" algn="ctr">
                         <a:buNone/>
                       </a:pPr>
                       <a:r>
@@ -5107,7 +4840,7 @@
                       </a:endParaRPr>
                     </a:p>
                   </a:txBody>
-                  <a:tcPr marL="91440" marR="91440" marT="45720" marB="45720" anchor="ctr">
+                  <a:tcPr anchor="ctr">
                     <a:lnL w="6350" cap="flat" cmpd="sng" algn="ctr">
                       <a:solidFill>
                         <a:srgbClr val="D1D5DB"/>
@@ -5154,7 +4887,7 @@
                     <a:bodyPr/>
                     <a:lstStyle/>
                     <a:p>
-                      <a:pPr algn="ctr" indent="0" marL="0">
+                      <a:pPr marL="0" indent="0" algn="ctr">
                         <a:buNone/>
                       </a:pPr>
                       <a:r>
@@ -5175,7 +4908,7 @@
                       </a:endParaRPr>
                     </a:p>
                   </a:txBody>
-                  <a:tcPr marL="91440" marR="91440" marT="45720" marB="45720" anchor="ctr">
+                  <a:tcPr anchor="ctr">
                     <a:lnL w="6350" cap="flat" cmpd="sng" algn="ctr">
                       <a:solidFill>
                         <a:srgbClr val="D1D5DB"/>
@@ -5222,7 +4955,7 @@
                     <a:bodyPr/>
                     <a:lstStyle/>
                     <a:p>
-                      <a:pPr algn="ctr" indent="0" marL="0">
+                      <a:pPr marL="0" indent="0" algn="ctr">
                         <a:buNone/>
                       </a:pPr>
                       <a:r>
@@ -5243,7 +4976,7 @@
                       </a:endParaRPr>
                     </a:p>
                   </a:txBody>
-                  <a:tcPr marL="91440" marR="91440" marT="45720" marB="45720" anchor="ctr">
+                  <a:tcPr anchor="ctr">
                     <a:lnL w="6350" cap="flat" cmpd="sng" algn="ctr">
                       <a:solidFill>
                         <a:srgbClr val="D1D5DB"/>
@@ -5290,7 +5023,7 @@
                     <a:bodyPr/>
                     <a:lstStyle/>
                     <a:p>
-                      <a:pPr algn="ctr" indent="0" marL="0">
+                      <a:pPr marL="0" indent="0" algn="ctr">
                         <a:buNone/>
                       </a:pPr>
                       <a:r>
@@ -5311,7 +5044,7 @@
                       </a:endParaRPr>
                     </a:p>
                   </a:txBody>
-                  <a:tcPr marL="91440" marR="91440" marT="45720" marB="45720" anchor="ctr">
+                  <a:tcPr anchor="ctr">
                     <a:lnL w="6350" cap="flat" cmpd="sng" algn="ctr">
                       <a:solidFill>
                         <a:srgbClr val="D1D5DB"/>
@@ -5353,6 +5086,11 @@
                     </a:solidFill>
                   </a:tcPr>
                 </a:tc>
+                <a:extLst>
+                  <a:ext uri="{0D108BD9-81ED-4DB2-BD59-A6C34878D82A}">
+                    <a16:rowId xmlns:a16="http://schemas.microsoft.com/office/drawing/2014/main" val="10003"/>
+                  </a:ext>
+                </a:extLst>
               </a:tr>
               <a:tr h="396240">
                 <a:tc>
@@ -5360,7 +5098,7 @@
                     <a:bodyPr/>
                     <a:lstStyle/>
                     <a:p>
-                      <a:pPr algn="ctr" indent="0" marL="0">
+                      <a:pPr marL="0" indent="0" algn="ctr">
                         <a:buNone/>
                       </a:pPr>
                       <a:r>
@@ -5381,7 +5119,7 @@
                       </a:endParaRPr>
                     </a:p>
                   </a:txBody>
-                  <a:tcPr marL="91440" marR="91440" marT="45720" marB="45720" anchor="ctr">
+                  <a:tcPr anchor="ctr">
                     <a:lnL w="6350" cap="flat" cmpd="sng" algn="ctr">
                       <a:solidFill>
                         <a:srgbClr val="D1D5DB"/>
@@ -5428,7 +5166,7 @@
                     <a:bodyPr/>
                     <a:lstStyle/>
                     <a:p>
-                      <a:pPr algn="ctr" indent="0" marL="0">
+                      <a:pPr marL="0" indent="0" algn="ctr">
                         <a:buNone/>
                       </a:pPr>
                       <a:r>
@@ -5449,7 +5187,7 @@
                       </a:endParaRPr>
                     </a:p>
                   </a:txBody>
-                  <a:tcPr marL="91440" marR="91440" marT="45720" marB="45720" anchor="ctr">
+                  <a:tcPr anchor="ctr">
                     <a:lnL w="6350" cap="flat" cmpd="sng" algn="ctr">
                       <a:solidFill>
                         <a:srgbClr val="D1D5DB"/>
@@ -5496,7 +5234,7 @@
                     <a:bodyPr/>
                     <a:lstStyle/>
                     <a:p>
-                      <a:pPr algn="ctr" indent="0" marL="0">
+                      <a:pPr marL="0" indent="0" algn="ctr">
                         <a:buNone/>
                       </a:pPr>
                       <a:r>
@@ -5517,7 +5255,7 @@
                       </a:endParaRPr>
                     </a:p>
                   </a:txBody>
-                  <a:tcPr marL="91440" marR="91440" marT="45720" marB="45720" anchor="ctr">
+                  <a:tcPr anchor="ctr">
                     <a:lnL w="6350" cap="flat" cmpd="sng" algn="ctr">
                       <a:solidFill>
                         <a:srgbClr val="D1D5DB"/>
@@ -5564,7 +5302,7 @@
                     <a:bodyPr/>
                     <a:lstStyle/>
                     <a:p>
-                      <a:pPr algn="ctr" indent="0" marL="0">
+                      <a:pPr marL="0" indent="0" algn="ctr">
                         <a:buNone/>
                       </a:pPr>
                       <a:r>
@@ -5585,7 +5323,7 @@
                       </a:endParaRPr>
                     </a:p>
                   </a:txBody>
-                  <a:tcPr marL="91440" marR="91440" marT="45720" marB="45720" anchor="ctr">
+                  <a:tcPr anchor="ctr">
                     <a:lnL w="6350" cap="flat" cmpd="sng" algn="ctr">
                       <a:solidFill>
                         <a:srgbClr val="D1D5DB"/>
@@ -5632,7 +5370,7 @@
                     <a:bodyPr/>
                     <a:lstStyle/>
                     <a:p>
-                      <a:pPr algn="ctr" indent="0" marL="0">
+                      <a:pPr marL="0" indent="0" algn="ctr">
                         <a:buNone/>
                       </a:pPr>
                       <a:r>
@@ -5653,7 +5391,7 @@
                       </a:endParaRPr>
                     </a:p>
                   </a:txBody>
-                  <a:tcPr marL="91440" marR="91440" marT="45720" marB="45720" anchor="ctr">
+                  <a:tcPr anchor="ctr">
                     <a:lnL w="6350" cap="flat" cmpd="sng" algn="ctr">
                       <a:solidFill>
                         <a:srgbClr val="D1D5DB"/>
@@ -5700,7 +5438,7 @@
                     <a:bodyPr/>
                     <a:lstStyle/>
                     <a:p>
-                      <a:pPr algn="ctr" indent="0" marL="0">
+                      <a:pPr marL="0" indent="0" algn="ctr">
                         <a:buNone/>
                       </a:pPr>
                       <a:r>
@@ -5721,7 +5459,7 @@
                       </a:endParaRPr>
                     </a:p>
                   </a:txBody>
-                  <a:tcPr marL="91440" marR="91440" marT="45720" marB="45720" anchor="ctr">
+                  <a:tcPr anchor="ctr">
                     <a:lnL w="6350" cap="flat" cmpd="sng" algn="ctr">
                       <a:solidFill>
                         <a:srgbClr val="D1D5DB"/>
@@ -5763,6 +5501,11 @@
                     </a:solidFill>
                   </a:tcPr>
                 </a:tc>
+                <a:extLst>
+                  <a:ext uri="{0D108BD9-81ED-4DB2-BD59-A6C34878D82A}">
+                    <a16:rowId xmlns:a16="http://schemas.microsoft.com/office/drawing/2014/main" val="10004"/>
+                  </a:ext>
+                </a:extLst>
               </a:tr>
               <a:tr h="396240">
                 <a:tc>
@@ -5770,7 +5513,7 @@
                     <a:bodyPr/>
                     <a:lstStyle/>
                     <a:p>
-                      <a:pPr algn="ctr" indent="0" marL="0">
+                      <a:pPr marL="0" indent="0" algn="ctr">
                         <a:buNone/>
                       </a:pPr>
                       <a:r>
@@ -5791,7 +5534,7 @@
                       </a:endParaRPr>
                     </a:p>
                   </a:txBody>
-                  <a:tcPr marL="91440" marR="91440" marT="45720" marB="45720" anchor="ctr">
+                  <a:tcPr anchor="ctr">
                     <a:lnL w="6350" cap="flat" cmpd="sng" algn="ctr">
                       <a:solidFill>
                         <a:srgbClr val="D1D5DB"/>
@@ -5838,7 +5581,7 @@
                     <a:bodyPr/>
                     <a:lstStyle/>
                     <a:p>
-                      <a:pPr algn="ctr" indent="0" marL="0">
+                      <a:pPr marL="0" indent="0" algn="ctr">
                         <a:buNone/>
                       </a:pPr>
                       <a:r>
@@ -5859,7 +5602,7 @@
                       </a:endParaRPr>
                     </a:p>
                   </a:txBody>
-                  <a:tcPr marL="91440" marR="91440" marT="45720" marB="45720" anchor="ctr">
+                  <a:tcPr anchor="ctr">
                     <a:lnL w="6350" cap="flat" cmpd="sng" algn="ctr">
                       <a:solidFill>
                         <a:srgbClr val="D1D5DB"/>
@@ -5906,7 +5649,7 @@
                     <a:bodyPr/>
                     <a:lstStyle/>
                     <a:p>
-                      <a:pPr algn="ctr" indent="0" marL="0">
+                      <a:pPr marL="0" indent="0" algn="ctr">
                         <a:buNone/>
                       </a:pPr>
                       <a:r>
@@ -5927,7 +5670,7 @@
                       </a:endParaRPr>
                     </a:p>
                   </a:txBody>
-                  <a:tcPr marL="91440" marR="91440" marT="45720" marB="45720" anchor="ctr">
+                  <a:tcPr anchor="ctr">
                     <a:lnL w="6350" cap="flat" cmpd="sng" algn="ctr">
                       <a:solidFill>
                         <a:srgbClr val="D1D5DB"/>
@@ -5974,7 +5717,7 @@
                     <a:bodyPr/>
                     <a:lstStyle/>
                     <a:p>
-                      <a:pPr algn="ctr" indent="0" marL="0">
+                      <a:pPr marL="0" indent="0" algn="ctr">
                         <a:buNone/>
                       </a:pPr>
                       <a:r>
@@ -5995,7 +5738,7 @@
                       </a:endParaRPr>
                     </a:p>
                   </a:txBody>
-                  <a:tcPr marL="91440" marR="91440" marT="45720" marB="45720" anchor="ctr">
+                  <a:tcPr anchor="ctr">
                     <a:lnL w="6350" cap="flat" cmpd="sng" algn="ctr">
                       <a:solidFill>
                         <a:srgbClr val="D1D5DB"/>
@@ -6042,7 +5785,7 @@
                     <a:bodyPr/>
                     <a:lstStyle/>
                     <a:p>
-                      <a:pPr algn="ctr" indent="0" marL="0">
+                      <a:pPr marL="0" indent="0" algn="ctr">
                         <a:buNone/>
                       </a:pPr>
                       <a:r>
@@ -6063,7 +5806,7 @@
                       </a:endParaRPr>
                     </a:p>
                   </a:txBody>
-                  <a:tcPr marL="91440" marR="91440" marT="45720" marB="45720" anchor="ctr">
+                  <a:tcPr anchor="ctr">
                     <a:lnL w="6350" cap="flat" cmpd="sng" algn="ctr">
                       <a:solidFill>
                         <a:srgbClr val="D1D5DB"/>
@@ -6110,7 +5853,7 @@
                     <a:bodyPr/>
                     <a:lstStyle/>
                     <a:p>
-                      <a:pPr algn="ctr" indent="0" marL="0">
+                      <a:pPr marL="0" indent="0" algn="ctr">
                         <a:buNone/>
                       </a:pPr>
                       <a:r>
@@ -6131,7 +5874,7 @@
                       </a:endParaRPr>
                     </a:p>
                   </a:txBody>
-                  <a:tcPr marL="91440" marR="91440" marT="45720" marB="45720" anchor="ctr">
+                  <a:tcPr anchor="ctr">
                     <a:lnL w="6350" cap="flat" cmpd="sng" algn="ctr">
                       <a:solidFill>
                         <a:srgbClr val="D1D5DB"/>
@@ -6173,6 +5916,11 @@
                     </a:solidFill>
                   </a:tcPr>
                 </a:tc>
+                <a:extLst>
+                  <a:ext uri="{0D108BD9-81ED-4DB2-BD59-A6C34878D82A}">
+                    <a16:rowId xmlns:a16="http://schemas.microsoft.com/office/drawing/2014/main" val="10005"/>
+                  </a:ext>
+                </a:extLst>
               </a:tr>
             </a:tbl>
           </a:graphicData>
@@ -6199,7 +5947,7 @@
           <a:bodyPr wrap="square" rtlCol="0" anchor="ctr"/>
           <a:lstStyle/>
           <a:p>
-            <a:pPr indent="0" marL="0">
+            <a:pPr marL="0" indent="0">
               <a:buNone/>
             </a:pPr>
             <a:r>
@@ -6213,9 +5961,6 @@
               </a:rPr>
               <a:t>5 states × 5 events = </a:t>
             </a:r>
-            <a:pPr indent="0" marL="0">
-              <a:buNone/>
-            </a:pPr>
             <a:r>
               <a:rPr lang="en-US" sz="2600" b="1" dirty="0">
                 <a:solidFill>
@@ -6227,9 +5972,6 @@
               </a:rPr>
               <a:t>25 test cases</a:t>
             </a:r>
-            <a:pPr indent="0" marL="0">
-              <a:buNone/>
-            </a:pPr>
             <a:r>
               <a:rPr lang="en-US" sz="2000" dirty="0">
                 <a:solidFill>
@@ -6266,7 +6008,7 @@
           <a:bodyPr wrap="square" rtlCol="0" anchor="ctr"/>
           <a:lstStyle/>
           <a:p>
-            <a:pPr indent="0" marL="0">
+            <a:pPr marL="0" indent="0">
               <a:buNone/>
             </a:pPr>
             <a:r>
@@ -6308,6 +6050,13 @@
             <a:prstDash val="solid"/>
           </a:ln>
         </p:spPr>
+        <p:txBody>
+          <a:bodyPr/>
+          <a:lstStyle/>
+          <a:p>
+            <a:endParaRPr lang="en-US"/>
+          </a:p>
+        </p:txBody>
       </p:sp>
       <p:sp>
         <p:nvSpPr>
@@ -6330,7 +6079,7 @@
           <a:bodyPr wrap="square" rtlCol="0" anchor="ctr"/>
           <a:lstStyle/>
           <a:p>
-            <a:pPr indent="0" marL="0">
+            <a:pPr marL="0" indent="0">
               <a:buNone/>
             </a:pPr>
             <a:r>
@@ -6344,9 +6093,6 @@
               </a:rPr>
               <a:t>Testing burden grows </a:t>
             </a:r>
-            <a:pPr indent="0" marL="0">
-              <a:buNone/>
-            </a:pPr>
             <a:r>
               <a:rPr lang="en-US" sz="1600" b="1" dirty="0">
                 <a:solidFill>
@@ -6358,9 +6104,6 @@
               </a:rPr>
               <a:t>quadratically</a:t>
             </a:r>
-            <a:pPr indent="0" marL="0">
-              <a:buNone/>
-            </a:pPr>
             <a:r>
               <a:rPr lang="en-US" sz="1600" dirty="0">
                 <a:solidFill>
@@ -6372,9 +6115,6 @@
               </a:rPr>
               <a:t>. And you're testing </a:t>
             </a:r>
-            <a:pPr indent="0" marL="0">
-              <a:buNone/>
-            </a:pPr>
             <a:r>
               <a:rPr lang="en-US" sz="1600" i="1" dirty="0">
                 <a:solidFill>
@@ -6386,9 +6126,6 @@
               </a:rPr>
               <a:t>behavior</a:t>
             </a:r>
-            <a:pPr indent="0" marL="0">
-              <a:buNone/>
-            </a:pPr>
             <a:r>
               <a:rPr lang="en-US" sz="1600" dirty="0">
                 <a:solidFill>
@@ -6400,9 +6137,6 @@
               </a:rPr>
               <a:t>, not </a:t>
             </a:r>
-            <a:pPr indent="0" marL="0">
-              <a:buNone/>
-            </a:pPr>
             <a:r>
               <a:rPr lang="en-US" sz="1600" i="1" dirty="0">
                 <a:solidFill>
@@ -6414,9 +6148,6 @@
               </a:rPr>
               <a:t>correctness</a:t>
             </a:r>
-            <a:pPr indent="0" marL="0">
-              <a:buNone/>
-            </a:pPr>
             <a:r>
               <a:rPr lang="en-US" sz="1600" dirty="0">
                 <a:solidFill>
@@ -6448,6 +6179,7 @@
         <a:solidFill>
           <a:srgbClr val="1E1E1E"/>
         </a:solidFill>
+        <a:effectLst/>
       </p:bgPr>
     </p:bg>
     <p:spTree>
@@ -6485,7 +6217,7 @@
           <a:bodyPr wrap="square" rtlCol="0" anchor="ctr"/>
           <a:lstStyle/>
           <a:p>
-            <a:pPr indent="0" marL="0">
+            <a:pPr marL="0" indent="0">
               <a:buNone/>
             </a:pPr>
             <a:r>
@@ -6522,6 +6254,13 @@
           </a:solidFill>
           <a:ln/>
         </p:spPr>
+        <p:txBody>
+          <a:bodyPr/>
+          <a:lstStyle/>
+          <a:p>
+            <a:endParaRPr lang="en-US"/>
+          </a:p>
+        </p:txBody>
       </p:sp>
       <p:sp>
         <p:nvSpPr>
@@ -6544,7 +6283,7 @@
           <a:bodyPr wrap="square" rtlCol="0" anchor="ctr"/>
           <a:lstStyle/>
           <a:p>
-            <a:pPr indent="0" marL="0">
+            <a:pPr marL="0" indent="0">
               <a:buNone/>
             </a:pPr>
             <a:r>
@@ -6583,7 +6322,7 @@
           <a:bodyPr wrap="square" rtlCol="0" anchor="ctr"/>
           <a:lstStyle/>
           <a:p>
-            <a:pPr indent="0" marL="0">
+            <a:pPr marL="0" indent="0">
               <a:buNone/>
             </a:pPr>
             <a:r>
@@ -6620,6 +6359,13 @@
           </a:solidFill>
           <a:ln/>
         </p:spPr>
+        <p:txBody>
+          <a:bodyPr/>
+          <a:lstStyle/>
+          <a:p>
+            <a:endParaRPr lang="en-US"/>
+          </a:p>
+        </p:txBody>
       </p:sp>
       <p:sp>
         <p:nvSpPr>
@@ -6642,7 +6388,7 @@
           <a:bodyPr wrap="square" rtlCol="0" anchor="ctr"/>
           <a:lstStyle/>
           <a:p>
-            <a:pPr algn="ctr" indent="0" marL="0">
+            <a:pPr marL="0" indent="0" algn="ctr">
               <a:buNone/>
             </a:pPr>
             <a:r>
@@ -6681,7 +6427,7 @@
           <a:bodyPr wrap="square" rtlCol="0" anchor="ctr"/>
           <a:lstStyle/>
           <a:p>
-            <a:pPr algn="ctr" indent="0" marL="0">
+            <a:pPr marL="0" indent="0" algn="ctr">
               <a:buNone/>
             </a:pPr>
             <a:r>
@@ -6715,6 +6461,7 @@
         <a:solidFill>
           <a:srgbClr val="1E1E1E"/>
         </a:solidFill>
+        <a:effectLst/>
       </p:bgPr>
     </p:bg>
     <p:spTree>
@@ -6752,7 +6499,7 @@
           <a:bodyPr wrap="square" rtlCol="0" anchor="ctr"/>
           <a:lstStyle/>
           <a:p>
-            <a:pPr indent="0" marL="0">
+            <a:pPr marL="0" indent="0">
               <a:buNone/>
             </a:pPr>
             <a:r>
@@ -6789,6 +6536,13 @@
           </a:solidFill>
           <a:ln/>
         </p:spPr>
+        <p:txBody>
+          <a:bodyPr/>
+          <a:lstStyle/>
+          <a:p>
+            <a:endParaRPr lang="en-US"/>
+          </a:p>
+        </p:txBody>
       </p:sp>
       <p:sp>
         <p:nvSpPr>
@@ -6811,7 +6565,7 @@
           <a:bodyPr wrap="square" rtlCol="0" anchor="ctr"/>
           <a:lstStyle/>
           <a:p>
-            <a:pPr indent="0" marL="0">
+            <a:pPr marL="0" indent="0">
               <a:buNone/>
             </a:pPr>
             <a:r>
@@ -6845,6 +6599,7 @@
         <a:solidFill>
           <a:srgbClr val="F5F5F5"/>
         </a:solidFill>
+        <a:effectLst/>
       </p:bgPr>
     </p:bg>
     <p:spTree>
@@ -6882,7 +6637,7 @@
           <a:bodyPr wrap="square" lIns="0" tIns="0" rIns="0" bIns="0" rtlCol="0" anchor="ctr"/>
           <a:lstStyle/>
           <a:p>
-            <a:pPr indent="0" marL="0">
+            <a:pPr marL="0" indent="0">
               <a:buNone/>
             </a:pPr>
             <a:r>
@@ -6919,6 +6674,13 @@
           </a:solidFill>
           <a:ln/>
         </p:spPr>
+        <p:txBody>
+          <a:bodyPr/>
+          <a:lstStyle/>
+          <a:p>
+            <a:endParaRPr lang="en-US"/>
+          </a:p>
+        </p:txBody>
       </p:sp>
       <p:sp>
         <p:nvSpPr>
@@ -6941,7 +6703,7 @@
           <a:bodyPr wrap="square" rtlCol="0" anchor="ctr"/>
           <a:lstStyle/>
           <a:p>
-            <a:pPr indent="0" marL="0">
+            <a:pPr marL="0" indent="0">
               <a:buNone/>
             </a:pPr>
             <a:r>
@@ -6985,6 +6747,13 @@
             <a:prstDash val="solid"/>
           </a:ln>
         </p:spPr>
+        <p:txBody>
+          <a:bodyPr/>
+          <a:lstStyle/>
+          <a:p>
+            <a:endParaRPr lang="en-US"/>
+          </a:p>
+        </p:txBody>
       </p:sp>
       <p:sp>
         <p:nvSpPr>
@@ -7009,7 +6778,7 @@
           <a:bodyPr wrap="square" rtlCol="0" anchor="ctr"/>
           <a:lstStyle/>
           <a:p>
-            <a:pPr algn="ctr" indent="0" marL="0">
+            <a:pPr marL="0" indent="0" algn="ctr">
               <a:buNone/>
             </a:pPr>
             <a:r>
@@ -7048,7 +6817,7 @@
           <a:bodyPr wrap="square" rtlCol="0" anchor="ctr"/>
           <a:lstStyle/>
           <a:p>
-            <a:pPr indent="0" marL="0">
+            <a:pPr marL="0" indent="0">
               <a:buNone/>
             </a:pPr>
             <a:r>
@@ -7087,7 +6856,7 @@
           <a:bodyPr wrap="square" rtlCol="0" anchor="ctr"/>
           <a:lstStyle/>
           <a:p>
-            <a:pPr indent="0" marL="0">
+            <a:pPr marL="0" indent="0">
               <a:buNone/>
             </a:pPr>
             <a:r>
@@ -7131,6 +6900,13 @@
             <a:prstDash val="solid"/>
           </a:ln>
         </p:spPr>
+        <p:txBody>
+          <a:bodyPr/>
+          <a:lstStyle/>
+          <a:p>
+            <a:endParaRPr lang="en-US"/>
+          </a:p>
+        </p:txBody>
       </p:sp>
       <p:sp>
         <p:nvSpPr>
@@ -7155,7 +6931,7 @@
           <a:bodyPr wrap="square" rtlCol="0" anchor="ctr"/>
           <a:lstStyle/>
           <a:p>
-            <a:pPr algn="ctr" indent="0" marL="0">
+            <a:pPr marL="0" indent="0" algn="ctr">
               <a:buNone/>
             </a:pPr>
             <a:r>
@@ -7194,7 +6970,7 @@
           <a:bodyPr wrap="square" rtlCol="0" anchor="ctr"/>
           <a:lstStyle/>
           <a:p>
-            <a:pPr indent="0" marL="0">
+            <a:pPr marL="0" indent="0">
               <a:buNone/>
             </a:pPr>
             <a:r>
@@ -7233,7 +7009,7 @@
           <a:bodyPr wrap="square" rtlCol="0" anchor="ctr"/>
           <a:lstStyle/>
           <a:p>
-            <a:pPr indent="0" marL="0">
+            <a:pPr marL="0" indent="0">
               <a:buNone/>
             </a:pPr>
             <a:r>
@@ -7277,6 +7053,13 @@
             <a:prstDash val="solid"/>
           </a:ln>
         </p:spPr>
+        <p:txBody>
+          <a:bodyPr/>
+          <a:lstStyle/>
+          <a:p>
+            <a:endParaRPr lang="en-US"/>
+          </a:p>
+        </p:txBody>
       </p:sp>
       <p:sp>
         <p:nvSpPr>
@@ -7301,7 +7084,7 @@
           <a:bodyPr wrap="square" rtlCol="0" anchor="ctr"/>
           <a:lstStyle/>
           <a:p>
-            <a:pPr algn="ctr" indent="0" marL="0">
+            <a:pPr marL="0" indent="0" algn="ctr">
               <a:buNone/>
             </a:pPr>
             <a:r>
@@ -7340,7 +7123,7 @@
           <a:bodyPr wrap="square" rtlCol="0" anchor="ctr"/>
           <a:lstStyle/>
           <a:p>
-            <a:pPr indent="0" marL="0">
+            <a:pPr marL="0" indent="0">
               <a:buNone/>
             </a:pPr>
             <a:r>
@@ -7379,7 +7162,7 @@
           <a:bodyPr wrap="square" rtlCol="0" anchor="ctr"/>
           <a:lstStyle/>
           <a:p>
-            <a:pPr indent="0" marL="0">
+            <a:pPr marL="0" indent="0">
               <a:buNone/>
             </a:pPr>
             <a:r>
@@ -7416,6 +7199,13 @@
           </a:solidFill>
           <a:ln/>
         </p:spPr>
+        <p:txBody>
+          <a:bodyPr/>
+          <a:lstStyle/>
+          <a:p>
+            <a:endParaRPr lang="en-US"/>
+          </a:p>
+        </p:txBody>
       </p:sp>
       <p:sp>
         <p:nvSpPr>
@@ -7438,7 +7228,7 @@
           <a:bodyPr wrap="square" rtlCol="0" anchor="t"/>
           <a:lstStyle/>
           <a:p>
-            <a:pPr indent="0" marL="0">
+            <a:pPr marL="0" indent="0">
               <a:buNone/>
             </a:pPr>
             <a:r>
@@ -7455,7 +7245,7 @@
             <a:endParaRPr lang="en-US" sz="1100" dirty="0"/>
           </a:p>
           <a:p>
-            <a:pPr indent="0" marL="0">
+            <a:pPr marL="0" indent="0">
               <a:buNone/>
             </a:pPr>
             <a:r>
@@ -7472,13 +7262,13 @@
             <a:endParaRPr lang="en-US" sz="1100" dirty="0"/>
           </a:p>
           <a:p>
-            <a:pPr indent="0" marL="0">
+            <a:pPr marL="0" indent="0">
               <a:buNone/>
             </a:pPr>
             <a:endParaRPr lang="en-US" sz="1100" dirty="0"/>
           </a:p>
           <a:p>
-            <a:pPr indent="0" marL="0">
+            <a:pPr marL="0" indent="0">
               <a:buNone/>
             </a:pPr>
             <a:r>
@@ -7495,7 +7285,7 @@
             <a:endParaRPr lang="en-US" sz="1100" dirty="0"/>
           </a:p>
           <a:p>
-            <a:pPr indent="0" marL="0">
+            <a:pPr marL="0" indent="0">
               <a:buNone/>
             </a:pPr>
             <a:r>
@@ -7512,7 +7302,7 @@
             <a:endParaRPr lang="en-US" sz="1100" dirty="0"/>
           </a:p>
           <a:p>
-            <a:pPr indent="0" marL="0">
+            <a:pPr marL="0" indent="0">
               <a:buNone/>
             </a:pPr>
             <a:r>
@@ -7529,7 +7319,7 @@
             <a:endParaRPr lang="en-US" sz="1100" dirty="0"/>
           </a:p>
           <a:p>
-            <a:pPr indent="0" marL="0">
+            <a:pPr marL="0" indent="0">
               <a:buNone/>
             </a:pPr>
             <a:r>
@@ -7546,7 +7336,7 @@
             <a:endParaRPr lang="en-US" sz="1100" dirty="0"/>
           </a:p>
           <a:p>
-            <a:pPr indent="0" marL="0">
+            <a:pPr marL="0" indent="0">
               <a:buNone/>
             </a:pPr>
             <a:r>
@@ -7563,13 +7353,13 @@
             <a:endParaRPr lang="en-US" sz="1100" dirty="0"/>
           </a:p>
           <a:p>
-            <a:pPr indent="0" marL="0">
+            <a:pPr marL="0" indent="0">
               <a:buNone/>
             </a:pPr>
             <a:endParaRPr lang="en-US" sz="1100" dirty="0"/>
           </a:p>
           <a:p>
-            <a:pPr indent="0" marL="0">
+            <a:pPr marL="0" indent="0">
               <a:buNone/>
             </a:pPr>
             <a:r>
@@ -7586,7 +7376,7 @@
             <a:endParaRPr lang="en-US" sz="1100" dirty="0"/>
           </a:p>
           <a:p>
-            <a:pPr indent="0" marL="0">
+            <a:pPr marL="0" indent="0">
               <a:buNone/>
             </a:pPr>
             <a:r>
@@ -7620,6 +7410,7 @@
         <a:solidFill>
           <a:srgbClr val="F5F5F5"/>
         </a:solidFill>
+        <a:effectLst/>
       </p:bgPr>
     </p:bg>
     <p:spTree>
@@ -7657,7 +7448,7 @@
           <a:bodyPr wrap="square" lIns="0" tIns="0" rIns="0" bIns="0" rtlCol="0" anchor="ctr"/>
           <a:lstStyle/>
           <a:p>
-            <a:pPr indent="0" marL="0">
+            <a:pPr marL="0" indent="0">
               <a:buNone/>
             </a:pPr>
             <a:r>
@@ -7694,6 +7485,13 @@
           </a:solidFill>
           <a:ln/>
         </p:spPr>
+        <p:txBody>
+          <a:bodyPr/>
+          <a:lstStyle/>
+          <a:p>
+            <a:endParaRPr lang="en-US"/>
+          </a:p>
+        </p:txBody>
       </p:sp>
       <p:sp>
         <p:nvSpPr>
@@ -7714,6 +7512,13 @@
           </a:solidFill>
           <a:ln/>
         </p:spPr>
+        <p:txBody>
+          <a:bodyPr/>
+          <a:lstStyle/>
+          <a:p>
+            <a:endParaRPr lang="en-US"/>
+          </a:p>
+        </p:txBody>
       </p:sp>
       <p:sp>
         <p:nvSpPr>
@@ -7736,7 +7541,7 @@
           <a:bodyPr wrap="square" rtlCol="0" anchor="t"/>
           <a:lstStyle/>
           <a:p>
-            <a:pPr indent="0" marL="0">
+            <a:pPr marL="0" indent="0">
               <a:buNone/>
             </a:pPr>
             <a:r>
@@ -7753,7 +7558,7 @@
             <a:endParaRPr lang="en-US" sz="1200" dirty="0"/>
           </a:p>
           <a:p>
-            <a:pPr indent="0" marL="0">
+            <a:pPr marL="0" indent="0">
               <a:buNone/>
             </a:pPr>
             <a:r>
@@ -7770,7 +7575,7 @@
             <a:endParaRPr lang="en-US" sz="1200" dirty="0"/>
           </a:p>
           <a:p>
-            <a:pPr indent="0" marL="0">
+            <a:pPr marL="0" indent="0">
               <a:buNone/>
             </a:pPr>
             <a:r>
@@ -7787,7 +7592,7 @@
             <a:endParaRPr lang="en-US" sz="1200" dirty="0"/>
           </a:p>
           <a:p>
-            <a:pPr indent="0" marL="0">
+            <a:pPr marL="0" indent="0">
               <a:buNone/>
             </a:pPr>
             <a:r>
@@ -7801,9 +7606,6 @@
               </a:rPr>
               <a:t>    std::pair&lt;Connecting, Disconnecting&gt;,  </a:t>
             </a:r>
-            <a:pPr indent="0" marL="0">
-              <a:buNone/>
-            </a:pPr>
             <a:r>
               <a:rPr lang="en-US" sz="1200" dirty="0">
                 <a:solidFill>
@@ -7818,7 +7620,7 @@
             <a:endParaRPr lang="en-US" sz="1200" dirty="0"/>
           </a:p>
           <a:p>
-            <a:pPr indent="0" marL="0">
+            <a:pPr marL="0" indent="0">
               <a:buNone/>
             </a:pPr>
             <a:r>
@@ -7835,7 +7637,7 @@
             <a:endParaRPr lang="en-US" sz="1200" dirty="0"/>
           </a:p>
           <a:p>
-            <a:pPr indent="0" marL="0">
+            <a:pPr marL="0" indent="0">
               <a:buNone/>
             </a:pPr>
             <a:r>
@@ -7852,7 +7654,7 @@
             <a:endParaRPr lang="en-US" sz="1200" dirty="0"/>
           </a:p>
           <a:p>
-            <a:pPr indent="0" marL="0">
+            <a:pPr marL="0" indent="0">
               <a:buNone/>
             </a:pPr>
             <a:r>
@@ -7869,7 +7671,7 @@
             <a:endParaRPr lang="en-US" sz="1200" dirty="0"/>
           </a:p>
           <a:p>
-            <a:pPr indent="0" marL="0">
+            <a:pPr marL="0" indent="0">
               <a:buNone/>
             </a:pPr>
             <a:r>
@@ -7886,7 +7688,7 @@
             <a:endParaRPr lang="en-US" sz="1200" dirty="0"/>
           </a:p>
           <a:p>
-            <a:pPr indent="0" marL="0">
+            <a:pPr marL="0" indent="0">
               <a:buNone/>
             </a:pPr>
             <a:r>
@@ -7903,7 +7705,7 @@
             <a:endParaRPr lang="en-US" sz="1200" dirty="0"/>
           </a:p>
           <a:p>
-            <a:pPr indent="0" marL="0">
+            <a:pPr marL="0" indent="0">
               <a:buNone/>
             </a:pPr>
             <a:r>
@@ -7920,7 +7722,7 @@
             <a:endParaRPr lang="en-US" sz="1200" dirty="0"/>
           </a:p>
           <a:p>
-            <a:pPr indent="0" marL="0">
+            <a:pPr marL="0" indent="0">
               <a:buNone/>
             </a:pPr>
             <a:r>
@@ -7964,6 +7766,13 @@
             <a:prstDash val="solid"/>
           </a:ln>
         </p:spPr>
+        <p:txBody>
+          <a:bodyPr/>
+          <a:lstStyle/>
+          <a:p>
+            <a:endParaRPr lang="en-US"/>
+          </a:p>
+        </p:txBody>
       </p:sp>
       <p:sp>
         <p:nvSpPr>
@@ -7986,7 +7795,7 @@
           <a:bodyPr wrap="square" rtlCol="0" anchor="ctr"/>
           <a:lstStyle/>
           <a:p>
-            <a:pPr indent="0" marL="0">
+            <a:pPr marL="0" indent="0">
               <a:buNone/>
             </a:pPr>
             <a:r>
@@ -8000,9 +7809,6 @@
               </a:rPr>
               <a:t>This tuple </a:t>
             </a:r>
-            <a:pPr indent="0" marL="0">
-              <a:buNone/>
-            </a:pPr>
             <a:r>
               <a:rPr lang="en-US" sz="1800" b="1" dirty="0">
                 <a:solidFill>
@@ -8014,9 +7820,6 @@
               </a:rPr>
               <a:t>IS</a:t>
             </a:r>
-            <a:pPr indent="0" marL="0">
-              <a:buNone/>
-            </a:pPr>
             <a:r>
               <a:rPr lang="en-US" sz="1800" b="1" dirty="0">
                 <a:solidFill>
@@ -8031,7 +7834,7 @@
             <a:endParaRPr lang="en-US" sz="1800" dirty="0"/>
           </a:p>
           <a:p>
-            <a:pPr indent="0" marL="0">
+            <a:pPr marL="0" indent="0">
               <a:buNone/>
             </a:pPr>
             <a:r>
@@ -8070,7 +7873,7 @@
           <a:bodyPr wrap="square" rtlCol="0" anchor="ctr"/>
           <a:lstStyle/>
           <a:p>
-            <a:pPr indent="0" marL="0">
+            <a:pPr marL="0" indent="0">
               <a:buNone/>
             </a:pPr>
             <a:r>
@@ -8104,6 +7907,7 @@
         <a:solidFill>
           <a:srgbClr val="F5F5F5"/>
         </a:solidFill>
+        <a:effectLst/>
       </p:bgPr>
     </p:bg>
     <p:spTree>
@@ -8141,7 +7945,7 @@
           <a:bodyPr wrap="square" lIns="0" tIns="0" rIns="0" bIns="0" rtlCol="0" anchor="ctr"/>
           <a:lstStyle/>
           <a:p>
-            <a:pPr indent="0" marL="0">
+            <a:pPr marL="0" indent="0">
               <a:buNone/>
             </a:pPr>
             <a:r>
@@ -8178,6 +7982,13 @@
           </a:solidFill>
           <a:ln/>
         </p:spPr>
+        <p:txBody>
+          <a:bodyPr/>
+          <a:lstStyle/>
+          <a:p>
+            <a:endParaRPr lang="en-US"/>
+          </a:p>
+        </p:txBody>
       </p:sp>
       <p:graphicFrame>
         <p:nvGraphicFramePr>
@@ -8202,9 +8013,27 @@
             <a:tbl>
               <a:tblPr/>
               <a:tblGrid>
-                <a:gridCol w="2560320"/>
-                <a:gridCol w="2560320"/>
-                <a:gridCol w="3474720"/>
+                <a:gridCol w="2560320">
+                  <a:extLst>
+                    <a:ext uri="{9D8B030D-6E8A-4147-A177-3AD203B41FA5}">
+                      <a16:colId xmlns:a16="http://schemas.microsoft.com/office/drawing/2014/main" val="20000"/>
+                    </a:ext>
+                  </a:extLst>
+                </a:gridCol>
+                <a:gridCol w="2560320">
+                  <a:extLst>
+                    <a:ext uri="{9D8B030D-6E8A-4147-A177-3AD203B41FA5}">
+                      <a16:colId xmlns:a16="http://schemas.microsoft.com/office/drawing/2014/main" val="20001"/>
+                    </a:ext>
+                  </a:extLst>
+                </a:gridCol>
+                <a:gridCol w="3474720">
+                  <a:extLst>
+                    <a:ext uri="{9D8B030D-6E8A-4147-A177-3AD203B41FA5}">
+                      <a16:colId xmlns:a16="http://schemas.microsoft.com/office/drawing/2014/main" val="20002"/>
+                    </a:ext>
+                  </a:extLst>
+                </a:gridCol>
               </a:tblGrid>
               <a:tr h="426720">
                 <a:tc>
@@ -8212,7 +8041,7 @@
                     <a:bodyPr/>
                     <a:lstStyle/>
                     <a:p>
-                      <a:pPr algn="l" indent="0" marL="0">
+                      <a:pPr marL="0" indent="0" algn="l">
                         <a:buNone/>
                       </a:pPr>
                       <a:r>
@@ -8233,7 +8062,7 @@
                       </a:endParaRPr>
                     </a:p>
                   </a:txBody>
-                  <a:tcPr marL="91440" marR="91440" marT="45720" marB="45720" anchor="ctr">
+                  <a:tcPr anchor="ctr">
                     <a:lnL w="6350" cap="flat" cmpd="sng" algn="ctr">
                       <a:solidFill>
                         <a:srgbClr val="D1D5DB"/>
@@ -8280,7 +8109,7 @@
                     <a:bodyPr/>
                     <a:lstStyle/>
                     <a:p>
-                      <a:pPr algn="l" indent="0" marL="0">
+                      <a:pPr marL="0" indent="0" algn="l">
                         <a:buNone/>
                       </a:pPr>
                       <a:r>
@@ -8301,7 +8130,7 @@
                       </a:endParaRPr>
                     </a:p>
                   </a:txBody>
-                  <a:tcPr marL="91440" marR="91440" marT="45720" marB="45720" anchor="ctr">
+                  <a:tcPr anchor="ctr">
                     <a:lnL w="6350" cap="flat" cmpd="sng" algn="ctr">
                       <a:solidFill>
                         <a:srgbClr val="D1D5DB"/>
@@ -8348,7 +8177,7 @@
                     <a:bodyPr/>
                     <a:lstStyle/>
                     <a:p>
-                      <a:pPr algn="l" indent="0" marL="0">
+                      <a:pPr marL="0" indent="0" algn="l">
                         <a:buNone/>
                       </a:pPr>
                       <a:r>
@@ -8369,7 +8198,7 @@
                       </a:endParaRPr>
                     </a:p>
                   </a:txBody>
-                  <a:tcPr marL="91440" marR="91440" marT="45720" marB="45720" anchor="ctr">
+                  <a:tcPr anchor="ctr">
                     <a:lnL w="6350" cap="flat" cmpd="sng" algn="ctr">
                       <a:solidFill>
                         <a:srgbClr val="D1D5DB"/>
@@ -8411,6 +8240,11 @@
                     </a:solidFill>
                   </a:tcPr>
                 </a:tc>
+                <a:extLst>
+                  <a:ext uri="{0D108BD9-81ED-4DB2-BD59-A6C34878D82A}">
+                    <a16:rowId xmlns:a16="http://schemas.microsoft.com/office/drawing/2014/main" val="10000"/>
+                  </a:ext>
+                </a:extLst>
               </a:tr>
               <a:tr h="426720">
                 <a:tc>
@@ -8418,7 +8252,7 @@
                     <a:bodyPr/>
                     <a:lstStyle/>
                     <a:p>
-                      <a:pPr algn="l" indent="0" marL="0">
+                      <a:pPr marL="0" indent="0" algn="l">
                         <a:buNone/>
                       </a:pPr>
                       <a:r>
@@ -8439,7 +8273,7 @@
                       </a:endParaRPr>
                     </a:p>
                   </a:txBody>
-                  <a:tcPr marL="91440" marR="91440" marT="45720" marB="45720" anchor="ctr">
+                  <a:tcPr anchor="ctr">
                     <a:lnL w="6350" cap="flat" cmpd="sng" algn="ctr">
                       <a:solidFill>
                         <a:srgbClr val="D1D5DB"/>
@@ -8486,7 +8320,7 @@
                     <a:bodyPr/>
                     <a:lstStyle/>
                     <a:p>
-                      <a:pPr algn="l" indent="0" marL="0">
+                      <a:pPr marL="0" indent="0" algn="l">
                         <a:buNone/>
                       </a:pPr>
                       <a:r>
@@ -8507,7 +8341,7 @@
                       </a:endParaRPr>
                     </a:p>
                   </a:txBody>
-                  <a:tcPr marL="91440" marR="91440" marT="45720" marB="45720" anchor="ctr">
+                  <a:tcPr anchor="ctr">
                     <a:lnL w="6350" cap="flat" cmpd="sng" algn="ctr">
                       <a:solidFill>
                         <a:srgbClr val="D1D5DB"/>
@@ -8554,7 +8388,7 @@
                     <a:bodyPr/>
                     <a:lstStyle/>
                     <a:p>
-                      <a:pPr algn="l" indent="0" marL="0">
+                      <a:pPr marL="0" indent="0" algn="l">
                         <a:buNone/>
                       </a:pPr>
                       <a:r>
@@ -8575,7 +8409,7 @@
                       </a:endParaRPr>
                     </a:p>
                   </a:txBody>
-                  <a:tcPr marL="91440" marR="91440" marT="45720" marB="45720" anchor="ctr">
+                  <a:tcPr anchor="ctr">
                     <a:lnL w="6350" cap="flat" cmpd="sng" algn="ctr">
                       <a:solidFill>
                         <a:srgbClr val="D1D5DB"/>
@@ -8617,6 +8451,11 @@
                     </a:solidFill>
                   </a:tcPr>
                 </a:tc>
+                <a:extLst>
+                  <a:ext uri="{0D108BD9-81ED-4DB2-BD59-A6C34878D82A}">
+                    <a16:rowId xmlns:a16="http://schemas.microsoft.com/office/drawing/2014/main" val="10001"/>
+                  </a:ext>
+                </a:extLst>
               </a:tr>
               <a:tr h="426720">
                 <a:tc>
@@ -8624,7 +8463,7 @@
                     <a:bodyPr/>
                     <a:lstStyle/>
                     <a:p>
-                      <a:pPr algn="l" indent="0" marL="0">
+                      <a:pPr marL="0" indent="0" algn="l">
                         <a:buNone/>
                       </a:pPr>
                       <a:r>
@@ -8645,7 +8484,7 @@
                       </a:endParaRPr>
                     </a:p>
                   </a:txBody>
-                  <a:tcPr marL="91440" marR="91440" marT="45720" marB="45720" anchor="ctr">
+                  <a:tcPr anchor="ctr">
                     <a:lnL w="6350" cap="flat" cmpd="sng" algn="ctr">
                       <a:solidFill>
                         <a:srgbClr val="D1D5DB"/>
@@ -8692,7 +8531,7 @@
                     <a:bodyPr/>
                     <a:lstStyle/>
                     <a:p>
-                      <a:pPr algn="l" indent="0" marL="0">
+                      <a:pPr marL="0" indent="0" algn="l">
                         <a:buNone/>
                       </a:pPr>
                       <a:r>
@@ -8713,7 +8552,7 @@
                       </a:endParaRPr>
                     </a:p>
                   </a:txBody>
-                  <a:tcPr marL="91440" marR="91440" marT="45720" marB="45720" anchor="ctr">
+                  <a:tcPr anchor="ctr">
                     <a:lnL w="6350" cap="flat" cmpd="sng" algn="ctr">
                       <a:solidFill>
                         <a:srgbClr val="D1D5DB"/>
@@ -8760,7 +8599,7 @@
                     <a:bodyPr/>
                     <a:lstStyle/>
                     <a:p>
-                      <a:pPr algn="l" indent="0" marL="0">
+                      <a:pPr marL="0" indent="0" algn="l">
                         <a:buNone/>
                       </a:pPr>
                       <a:r>
@@ -8781,7 +8620,7 @@
                       </a:endParaRPr>
                     </a:p>
                   </a:txBody>
-                  <a:tcPr marL="91440" marR="91440" marT="45720" marB="45720" anchor="ctr">
+                  <a:tcPr anchor="ctr">
                     <a:lnL w="6350" cap="flat" cmpd="sng" algn="ctr">
                       <a:solidFill>
                         <a:srgbClr val="D1D5DB"/>
@@ -8823,6 +8662,11 @@
                     </a:solidFill>
                   </a:tcPr>
                 </a:tc>
+                <a:extLst>
+                  <a:ext uri="{0D108BD9-81ED-4DB2-BD59-A6C34878D82A}">
+                    <a16:rowId xmlns:a16="http://schemas.microsoft.com/office/drawing/2014/main" val="10002"/>
+                  </a:ext>
+                </a:extLst>
               </a:tr>
               <a:tr h="426720">
                 <a:tc>
@@ -8830,7 +8674,7 @@
                     <a:bodyPr/>
                     <a:lstStyle/>
                     <a:p>
-                      <a:pPr algn="l" indent="0" marL="0">
+                      <a:pPr marL="0" indent="0" algn="l">
                         <a:buNone/>
                       </a:pPr>
                       <a:r>
@@ -8851,7 +8695,7 @@
                       </a:endParaRPr>
                     </a:p>
                   </a:txBody>
-                  <a:tcPr marL="91440" marR="91440" marT="45720" marB="45720" anchor="ctr">
+                  <a:tcPr anchor="ctr">
                     <a:lnL w="6350" cap="flat" cmpd="sng" algn="ctr">
                       <a:solidFill>
                         <a:srgbClr val="D1D5DB"/>
@@ -8898,7 +8742,7 @@
                     <a:bodyPr/>
                     <a:lstStyle/>
                     <a:p>
-                      <a:pPr algn="l" indent="0" marL="0">
+                      <a:pPr marL="0" indent="0" algn="l">
                         <a:buNone/>
                       </a:pPr>
                       <a:r>
@@ -8919,7 +8763,7 @@
                       </a:endParaRPr>
                     </a:p>
                   </a:txBody>
-                  <a:tcPr marL="91440" marR="91440" marT="45720" marB="45720" anchor="ctr">
+                  <a:tcPr anchor="ctr">
                     <a:lnL w="6350" cap="flat" cmpd="sng" algn="ctr">
                       <a:solidFill>
                         <a:srgbClr val="D1D5DB"/>
@@ -8966,7 +8810,7 @@
                     <a:bodyPr/>
                     <a:lstStyle/>
                     <a:p>
-                      <a:pPr algn="l" indent="0" marL="0">
+                      <a:pPr marL="0" indent="0" algn="l">
                         <a:buNone/>
                       </a:pPr>
                       <a:r>
@@ -8987,7 +8831,7 @@
                       </a:endParaRPr>
                     </a:p>
                   </a:txBody>
-                  <a:tcPr marL="91440" marR="91440" marT="45720" marB="45720" anchor="ctr">
+                  <a:tcPr anchor="ctr">
                     <a:lnL w="6350" cap="flat" cmpd="sng" algn="ctr">
                       <a:solidFill>
                         <a:srgbClr val="D1D5DB"/>
@@ -9029,6 +8873,11 @@
                     </a:solidFill>
                   </a:tcPr>
                 </a:tc>
+                <a:extLst>
+                  <a:ext uri="{0D108BD9-81ED-4DB2-BD59-A6C34878D82A}">
+                    <a16:rowId xmlns:a16="http://schemas.microsoft.com/office/drawing/2014/main" val="10003"/>
+                  </a:ext>
+                </a:extLst>
               </a:tr>
               <a:tr h="426720">
                 <a:tc>
@@ -9036,7 +8885,7 @@
                     <a:bodyPr/>
                     <a:lstStyle/>
                     <a:p>
-                      <a:pPr algn="l" indent="0" marL="0">
+                      <a:pPr marL="0" indent="0" algn="l">
                         <a:buNone/>
                       </a:pPr>
                       <a:r>
@@ -9057,7 +8906,7 @@
                       </a:endParaRPr>
                     </a:p>
                   </a:txBody>
-                  <a:tcPr marL="91440" marR="91440" marT="45720" marB="45720" anchor="ctr">
+                  <a:tcPr anchor="ctr">
                     <a:lnL w="6350" cap="flat" cmpd="sng" algn="ctr">
                       <a:solidFill>
                         <a:srgbClr val="D1D5DB"/>
@@ -9104,7 +8953,7 @@
                     <a:bodyPr/>
                     <a:lstStyle/>
                     <a:p>
-                      <a:pPr algn="l" indent="0" marL="0">
+                      <a:pPr marL="0" indent="0" algn="l">
                         <a:buNone/>
                       </a:pPr>
                       <a:r>
@@ -9125,7 +8974,7 @@
                       </a:endParaRPr>
                     </a:p>
                   </a:txBody>
-                  <a:tcPr marL="91440" marR="91440" marT="45720" marB="45720" anchor="ctr">
+                  <a:tcPr anchor="ctr">
                     <a:lnL w="6350" cap="flat" cmpd="sng" algn="ctr">
                       <a:solidFill>
                         <a:srgbClr val="D1D5DB"/>
@@ -9172,7 +9021,7 @@
                     <a:bodyPr/>
                     <a:lstStyle/>
                     <a:p>
-                      <a:pPr algn="l" indent="0" marL="0">
+                      <a:pPr marL="0" indent="0" algn="l">
                         <a:buNone/>
                       </a:pPr>
                       <a:r>
@@ -9193,7 +9042,7 @@
                       </a:endParaRPr>
                     </a:p>
                   </a:txBody>
-                  <a:tcPr marL="91440" marR="91440" marT="45720" marB="45720" anchor="ctr">
+                  <a:tcPr anchor="ctr">
                     <a:lnL w="6350" cap="flat" cmpd="sng" algn="ctr">
                       <a:solidFill>
                         <a:srgbClr val="D1D5DB"/>
@@ -9235,6 +9084,11 @@
                     </a:solidFill>
                   </a:tcPr>
                 </a:tc>
+                <a:extLst>
+                  <a:ext uri="{0D108BD9-81ED-4DB2-BD59-A6C34878D82A}">
+                    <a16:rowId xmlns:a16="http://schemas.microsoft.com/office/drawing/2014/main" val="10004"/>
+                  </a:ext>
+                </a:extLst>
               </a:tr>
               <a:tr h="426720">
                 <a:tc>
@@ -9242,7 +9096,7 @@
                     <a:bodyPr/>
                     <a:lstStyle/>
                     <a:p>
-                      <a:pPr algn="l" indent="0" marL="0">
+                      <a:pPr marL="0" indent="0" algn="l">
                         <a:buNone/>
                       </a:pPr>
                       <a:r>
@@ -9263,7 +9117,7 @@
                       </a:endParaRPr>
                     </a:p>
                   </a:txBody>
-                  <a:tcPr marL="91440" marR="91440" marT="45720" marB="45720" anchor="ctr">
+                  <a:tcPr anchor="ctr">
                     <a:lnL w="6350" cap="flat" cmpd="sng" algn="ctr">
                       <a:solidFill>
                         <a:srgbClr val="D1D5DB"/>
@@ -9310,7 +9164,7 @@
                     <a:bodyPr/>
                     <a:lstStyle/>
                     <a:p>
-                      <a:pPr algn="l" indent="0" marL="0">
+                      <a:pPr marL="0" indent="0" algn="l">
                         <a:buNone/>
                       </a:pPr>
                       <a:r>
@@ -9331,7 +9185,7 @@
                       </a:endParaRPr>
                     </a:p>
                   </a:txBody>
-                  <a:tcPr marL="91440" marR="91440" marT="45720" marB="45720" anchor="ctr">
+                  <a:tcPr anchor="ctr">
                     <a:lnL w="6350" cap="flat" cmpd="sng" algn="ctr">
                       <a:solidFill>
                         <a:srgbClr val="D1D5DB"/>
@@ -9378,7 +9232,7 @@
                     <a:bodyPr/>
                     <a:lstStyle/>
                     <a:p>
-                      <a:pPr algn="l" indent="0" marL="0">
+                      <a:pPr marL="0" indent="0" algn="l">
                         <a:buNone/>
                       </a:pPr>
                       <a:r>
@@ -9399,7 +9253,7 @@
                       </a:endParaRPr>
                     </a:p>
                   </a:txBody>
-                  <a:tcPr marL="91440" marR="91440" marT="45720" marB="45720" anchor="ctr">
+                  <a:tcPr anchor="ctr">
                     <a:lnL w="6350" cap="flat" cmpd="sng" algn="ctr">
                       <a:solidFill>
                         <a:srgbClr val="D1D5DB"/>
@@ -9441,6 +9295,11 @@
                     </a:solidFill>
                   </a:tcPr>
                 </a:tc>
+                <a:extLst>
+                  <a:ext uri="{0D108BD9-81ED-4DB2-BD59-A6C34878D82A}">
+                    <a16:rowId xmlns:a16="http://schemas.microsoft.com/office/drawing/2014/main" val="10005"/>
+                  </a:ext>
+                </a:extLst>
               </a:tr>
             </a:tbl>
           </a:graphicData>
@@ -9462,6 +9321,7 @@
         <a:solidFill>
           <a:srgbClr val="F5F5F5"/>
         </a:solidFill>
+        <a:effectLst/>
       </p:bgPr>
     </p:bg>
     <p:spTree>
@@ -9499,7 +9359,7 @@
           <a:bodyPr wrap="square" lIns="0" tIns="0" rIns="0" bIns="0" rtlCol="0" anchor="ctr"/>
           <a:lstStyle/>
           <a:p>
-            <a:pPr indent="0" marL="0">
+            <a:pPr marL="0" indent="0">
               <a:buNone/>
             </a:pPr>
             <a:r>
@@ -9536,6 +9396,13 @@
           </a:solidFill>
           <a:ln/>
         </p:spPr>
+        <p:txBody>
+          <a:bodyPr/>
+          <a:lstStyle/>
+          <a:p>
+            <a:endParaRPr lang="en-US"/>
+          </a:p>
+        </p:txBody>
       </p:sp>
       <p:sp>
         <p:nvSpPr>
@@ -9558,7 +9425,7 @@
           <a:bodyPr wrap="square" rtlCol="0" anchor="ctr"/>
           <a:lstStyle/>
           <a:p>
-            <a:pPr indent="0" marL="0">
+            <a:pPr marL="0" indent="0">
               <a:buNone/>
             </a:pPr>
             <a:r>
@@ -9595,6 +9462,13 @@
           </a:solidFill>
           <a:ln/>
         </p:spPr>
+        <p:txBody>
+          <a:bodyPr/>
+          <a:lstStyle/>
+          <a:p>
+            <a:endParaRPr lang="en-US"/>
+          </a:p>
+        </p:txBody>
       </p:sp>
       <p:sp>
         <p:nvSpPr>
@@ -9617,7 +9491,7 @@
           <a:bodyPr wrap="square" rtlCol="0" anchor="t"/>
           <a:lstStyle/>
           <a:p>
-            <a:pPr indent="0" marL="0">
+            <a:pPr marL="0" indent="0">
               <a:buNone/>
             </a:pPr>
             <a:r>
@@ -9634,7 +9508,7 @@
             <a:endParaRPr lang="en-US" sz="1100" dirty="0"/>
           </a:p>
           <a:p>
-            <a:pPr indent="0" marL="0">
+            <a:pPr marL="0" indent="0">
               <a:buNone/>
             </a:pPr>
             <a:r>
@@ -9651,7 +9525,7 @@
             <a:endParaRPr lang="en-US" sz="1100" dirty="0"/>
           </a:p>
           <a:p>
-            <a:pPr indent="0" marL="0">
+            <a:pPr marL="0" indent="0">
               <a:buNone/>
             </a:pPr>
             <a:r>
@@ -9668,7 +9542,7 @@
             <a:endParaRPr lang="en-US" sz="1100" dirty="0"/>
           </a:p>
           <a:p>
-            <a:pPr indent="0" marL="0">
+            <a:pPr marL="0" indent="0">
               <a:buNone/>
             </a:pPr>
             <a:r>
@@ -9685,7 +9559,7 @@
             <a:endParaRPr lang="en-US" sz="1100" dirty="0"/>
           </a:p>
           <a:p>
-            <a:pPr indent="0" marL="0">
+            <a:pPr marL="0" indent="0">
               <a:buNone/>
             </a:pPr>
             <a:r>
@@ -9702,7 +9576,7 @@
             <a:endParaRPr lang="en-US" sz="1100" dirty="0"/>
           </a:p>
           <a:p>
-            <a:pPr indent="0" marL="0">
+            <a:pPr marL="0" indent="0">
               <a:buNone/>
             </a:pPr>
             <a:r>
@@ -9719,7 +9593,7 @@
             <a:endParaRPr lang="en-US" sz="1100" dirty="0"/>
           </a:p>
           <a:p>
-            <a:pPr indent="0" marL="0">
+            <a:pPr marL="0" indent="0">
               <a:buNone/>
             </a:pPr>
             <a:r>
@@ -9736,7 +9610,7 @@
             <a:endParaRPr lang="en-US" sz="1100" dirty="0"/>
           </a:p>
           <a:p>
-            <a:pPr indent="0" marL="0">
+            <a:pPr marL="0" indent="0">
               <a:buNone/>
             </a:pPr>
             <a:r>
@@ -9775,7 +9649,7 @@
           <a:bodyPr wrap="square" rtlCol="0" anchor="ctr"/>
           <a:lstStyle/>
           <a:p>
-            <a:pPr indent="0" marL="0">
+            <a:pPr marL="0" indent="0">
               <a:buNone/>
             </a:pPr>
             <a:r>
@@ -9812,6 +9686,13 @@
           </a:solidFill>
           <a:ln/>
         </p:spPr>
+        <p:txBody>
+          <a:bodyPr/>
+          <a:lstStyle/>
+          <a:p>
+            <a:endParaRPr lang="en-US"/>
+          </a:p>
+        </p:txBody>
       </p:sp>
       <p:sp>
         <p:nvSpPr>
@@ -9834,7 +9715,7 @@
           <a:bodyPr wrap="square" rtlCol="0" anchor="ctr"/>
           <a:lstStyle/>
           <a:p>
-            <a:pPr indent="0" marL="0">
+            <a:pPr marL="0" indent="0">
               <a:buNone/>
             </a:pPr>
             <a:r>
@@ -9848,9 +9729,6 @@
               </a:rPr>
               <a:t>sm.transition&lt;Connected&gt;();  </a:t>
             </a:r>
-            <a:pPr indent="0" marL="0">
-              <a:buNone/>
-            </a:pPr>
             <a:r>
               <a:rPr lang="en-US" sz="1200" dirty="0">
                 <a:solidFill>
@@ -9890,6 +9768,13 @@
             <a:prstDash val="solid"/>
           </a:ln>
         </p:spPr>
+        <p:txBody>
+          <a:bodyPr/>
+          <a:lstStyle/>
+          <a:p>
+            <a:endParaRPr lang="en-US"/>
+          </a:p>
+        </p:txBody>
       </p:sp>
       <p:sp>
         <p:nvSpPr>
@@ -9912,7 +9797,7 @@
           <a:bodyPr wrap="square" rtlCol="0" anchor="ctr"/>
           <a:lstStyle/>
           <a:p>
-            <a:pPr indent="0" marL="0">
+            <a:pPr marL="0" indent="0">
               <a:buNone/>
             </a:pPr>
             <a:r>
@@ -9946,6 +9831,7 @@
         <a:solidFill>
           <a:srgbClr val="F5F5F5"/>
         </a:solidFill>
+        <a:effectLst/>
       </p:bgPr>
     </p:bg>
     <p:spTree>
@@ -9983,7 +9869,7 @@
           <a:bodyPr wrap="square" lIns="0" tIns="0" rIns="0" bIns="0" rtlCol="0" anchor="ctr"/>
           <a:lstStyle/>
           <a:p>
-            <a:pPr indent="0" marL="0">
+            <a:pPr marL="0" indent="0">
               <a:buNone/>
             </a:pPr>
             <a:r>
@@ -10020,6 +9906,13 @@
           </a:solidFill>
           <a:ln/>
         </p:spPr>
+        <p:txBody>
+          <a:bodyPr/>
+          <a:lstStyle/>
+          <a:p>
+            <a:endParaRPr lang="en-US"/>
+          </a:p>
+        </p:txBody>
       </p:sp>
       <p:sp>
         <p:nvSpPr>
@@ -10042,7 +9935,7 @@
           <a:bodyPr wrap="square" rtlCol="0" anchor="ctr"/>
           <a:lstStyle/>
           <a:p>
-            <a:pPr indent="0" marL="0">
+            <a:pPr marL="0" indent="0">
               <a:buNone/>
             </a:pPr>
             <a:r>
@@ -10083,12 +9976,48 @@
             <a:tbl>
               <a:tblPr/>
               <a:tblGrid>
-                <a:gridCol w="1280160"/>
-                <a:gridCol w="1280160"/>
-                <a:gridCol w="1280160"/>
-                <a:gridCol w="1280160"/>
-                <a:gridCol w="1280160"/>
-                <a:gridCol w="1280160"/>
+                <a:gridCol w="1280160">
+                  <a:extLst>
+                    <a:ext uri="{9D8B030D-6E8A-4147-A177-3AD203B41FA5}">
+                      <a16:colId xmlns:a16="http://schemas.microsoft.com/office/drawing/2014/main" val="20000"/>
+                    </a:ext>
+                  </a:extLst>
+                </a:gridCol>
+                <a:gridCol w="1280160">
+                  <a:extLst>
+                    <a:ext uri="{9D8B030D-6E8A-4147-A177-3AD203B41FA5}">
+                      <a16:colId xmlns:a16="http://schemas.microsoft.com/office/drawing/2014/main" val="20001"/>
+                    </a:ext>
+                  </a:extLst>
+                </a:gridCol>
+                <a:gridCol w="1280160">
+                  <a:extLst>
+                    <a:ext uri="{9D8B030D-6E8A-4147-A177-3AD203B41FA5}">
+                      <a16:colId xmlns:a16="http://schemas.microsoft.com/office/drawing/2014/main" val="20002"/>
+                    </a:ext>
+                  </a:extLst>
+                </a:gridCol>
+                <a:gridCol w="1280160">
+                  <a:extLst>
+                    <a:ext uri="{9D8B030D-6E8A-4147-A177-3AD203B41FA5}">
+                      <a16:colId xmlns:a16="http://schemas.microsoft.com/office/drawing/2014/main" val="20003"/>
+                    </a:ext>
+                  </a:extLst>
+                </a:gridCol>
+                <a:gridCol w="1280160">
+                  <a:extLst>
+                    <a:ext uri="{9D8B030D-6E8A-4147-A177-3AD203B41FA5}">
+                      <a16:colId xmlns:a16="http://schemas.microsoft.com/office/drawing/2014/main" val="20004"/>
+                    </a:ext>
+                  </a:extLst>
+                </a:gridCol>
+                <a:gridCol w="1280160">
+                  <a:extLst>
+                    <a:ext uri="{9D8B030D-6E8A-4147-A177-3AD203B41FA5}">
+                      <a16:colId xmlns:a16="http://schemas.microsoft.com/office/drawing/2014/main" val="20005"/>
+                    </a:ext>
+                  </a:extLst>
+                </a:gridCol>
               </a:tblGrid>
               <a:tr h="396240">
                 <a:tc>
@@ -10096,7 +10025,7 @@
                     <a:bodyPr/>
                     <a:lstStyle/>
                     <a:p>
-                      <a:pPr algn="ctr" indent="0" marL="0">
+                      <a:pPr marL="0" indent="0" algn="ctr">
                         <a:buNone/>
                       </a:pPr>
                       <a:endParaRPr lang="en-US" sz="1400" dirty="0">
@@ -10106,7 +10035,7 @@
                       </a:endParaRPr>
                     </a:p>
                   </a:txBody>
-                  <a:tcPr marL="91440" marR="91440" marT="45720" marB="45720" anchor="ctr">
+                  <a:tcPr anchor="ctr">
                     <a:lnL w="6350" cap="flat" cmpd="sng" algn="ctr">
                       <a:solidFill>
                         <a:srgbClr val="D1D5DB"/>
@@ -10153,7 +10082,7 @@
                     <a:bodyPr/>
                     <a:lstStyle/>
                     <a:p>
-                      <a:pPr algn="ctr" indent="0" marL="0">
+                      <a:pPr marL="0" indent="0" algn="ctr">
                         <a:buNone/>
                       </a:pPr>
                       <a:r>
@@ -10174,7 +10103,7 @@
                       </a:endParaRPr>
                     </a:p>
                   </a:txBody>
-                  <a:tcPr marL="91440" marR="91440" marT="45720" marB="45720" anchor="ctr">
+                  <a:tcPr anchor="ctr">
                     <a:lnL w="6350" cap="flat" cmpd="sng" algn="ctr">
                       <a:solidFill>
                         <a:srgbClr val="D1D5DB"/>
@@ -10221,7 +10150,7 @@
                     <a:bodyPr/>
                     <a:lstStyle/>
                     <a:p>
-                      <a:pPr algn="ctr" indent="0" marL="0">
+                      <a:pPr marL="0" indent="0" algn="ctr">
                         <a:buNone/>
                       </a:pPr>
                       <a:r>
@@ -10242,7 +10171,7 @@
                       </a:endParaRPr>
                     </a:p>
                   </a:txBody>
-                  <a:tcPr marL="91440" marR="91440" marT="45720" marB="45720" anchor="ctr">
+                  <a:tcPr anchor="ctr">
                     <a:lnL w="6350" cap="flat" cmpd="sng" algn="ctr">
                       <a:solidFill>
                         <a:srgbClr val="D1D5DB"/>
@@ -10289,7 +10218,7 @@
                     <a:bodyPr/>
                     <a:lstStyle/>
                     <a:p>
-                      <a:pPr algn="ctr" indent="0" marL="0">
+                      <a:pPr marL="0" indent="0" algn="ctr">
                         <a:buNone/>
                       </a:pPr>
                       <a:r>
@@ -10310,7 +10239,7 @@
                       </a:endParaRPr>
                     </a:p>
                   </a:txBody>
-                  <a:tcPr marL="91440" marR="91440" marT="45720" marB="45720" anchor="ctr">
+                  <a:tcPr anchor="ctr">
                     <a:lnL w="6350" cap="flat" cmpd="sng" algn="ctr">
                       <a:solidFill>
                         <a:srgbClr val="D1D5DB"/>
@@ -10357,7 +10286,7 @@
                     <a:bodyPr/>
                     <a:lstStyle/>
                     <a:p>
-                      <a:pPr algn="ctr" indent="0" marL="0">
+                      <a:pPr marL="0" indent="0" algn="ctr">
                         <a:buNone/>
                       </a:pPr>
                       <a:r>
@@ -10378,7 +10307,7 @@
                       </a:endParaRPr>
                     </a:p>
                   </a:txBody>
-                  <a:tcPr marL="91440" marR="91440" marT="45720" marB="45720" anchor="ctr">
+                  <a:tcPr anchor="ctr">
                     <a:lnL w="6350" cap="flat" cmpd="sng" algn="ctr">
                       <a:solidFill>
                         <a:srgbClr val="D1D5DB"/>
@@ -10425,7 +10354,7 @@
                     <a:bodyPr/>
                     <a:lstStyle/>
                     <a:p>
-                      <a:pPr algn="ctr" indent="0" marL="0">
+                      <a:pPr marL="0" indent="0" algn="ctr">
                         <a:buNone/>
                       </a:pPr>
                       <a:r>
@@ -10446,7 +10375,7 @@
                       </a:endParaRPr>
                     </a:p>
                   </a:txBody>
-                  <a:tcPr marL="91440" marR="91440" marT="45720" marB="45720" anchor="ctr">
+                  <a:tcPr anchor="ctr">
                     <a:lnL w="6350" cap="flat" cmpd="sng" algn="ctr">
                       <a:solidFill>
                         <a:srgbClr val="D1D5DB"/>
@@ -10488,6 +10417,11 @@
                     </a:solidFill>
                   </a:tcPr>
                 </a:tc>
+                <a:extLst>
+                  <a:ext uri="{0D108BD9-81ED-4DB2-BD59-A6C34878D82A}">
+                    <a16:rowId xmlns:a16="http://schemas.microsoft.com/office/drawing/2014/main" val="10000"/>
+                  </a:ext>
+                </a:extLst>
               </a:tr>
               <a:tr h="396240">
                 <a:tc>
@@ -10495,7 +10429,7 @@
                     <a:bodyPr/>
                     <a:lstStyle/>
                     <a:p>
-                      <a:pPr algn="ctr" indent="0" marL="0">
+                      <a:pPr marL="0" indent="0" algn="ctr">
                         <a:buNone/>
                       </a:pPr>
                       <a:r>
@@ -10516,7 +10450,7 @@
                       </a:endParaRPr>
                     </a:p>
                   </a:txBody>
-                  <a:tcPr marL="91440" marR="91440" marT="45720" marB="45720" anchor="ctr">
+                  <a:tcPr anchor="ctr">
                     <a:lnL w="6350" cap="flat" cmpd="sng" algn="ctr">
                       <a:solidFill>
                         <a:srgbClr val="D1D5DB"/>
@@ -10563,7 +10497,7 @@
                     <a:bodyPr/>
                     <a:lstStyle/>
                     <a:p>
-                      <a:pPr algn="ctr" indent="0" marL="0">
+                      <a:pPr marL="0" indent="0" algn="ctr">
                         <a:buNone/>
                       </a:pPr>
                       <a:r>
@@ -10584,7 +10518,7 @@
                       </a:endParaRPr>
                     </a:p>
                   </a:txBody>
-                  <a:tcPr marL="91440" marR="91440" marT="45720" marB="45720" anchor="ctr">
+                  <a:tcPr anchor="ctr">
                     <a:lnL w="6350" cap="flat" cmpd="sng" algn="ctr">
                       <a:solidFill>
                         <a:srgbClr val="D1D5DB"/>
@@ -10631,7 +10565,7 @@
                     <a:bodyPr/>
                     <a:lstStyle/>
                     <a:p>
-                      <a:pPr algn="ctr" indent="0" marL="0">
+                      <a:pPr marL="0" indent="0" algn="ctr">
                         <a:buNone/>
                       </a:pPr>
                       <a:r>
@@ -10652,7 +10586,7 @@
                       </a:endParaRPr>
                     </a:p>
                   </a:txBody>
-                  <a:tcPr marL="91440" marR="91440" marT="45720" marB="45720" anchor="ctr">
+                  <a:tcPr anchor="ctr">
                     <a:lnL w="6350" cap="flat" cmpd="sng" algn="ctr">
                       <a:solidFill>
                         <a:srgbClr val="D1D5DB"/>
@@ -10699,7 +10633,7 @@
                     <a:bodyPr/>
                     <a:lstStyle/>
                     <a:p>
-                      <a:pPr algn="ctr" indent="0" marL="0">
+                      <a:pPr marL="0" indent="0" algn="ctr">
                         <a:buNone/>
                       </a:pPr>
                       <a:r>
@@ -10720,7 +10654,7 @@
                       </a:endParaRPr>
                     </a:p>
                   </a:txBody>
-                  <a:tcPr marL="91440" marR="91440" marT="45720" marB="45720" anchor="ctr">
+                  <a:tcPr anchor="ctr">
                     <a:lnL w="6350" cap="flat" cmpd="sng" algn="ctr">
                       <a:solidFill>
                         <a:srgbClr val="D1D5DB"/>
@@ -10767,7 +10701,7 @@
                     <a:bodyPr/>
                     <a:lstStyle/>
                     <a:p>
-                      <a:pPr algn="ctr" indent="0" marL="0">
+                      <a:pPr marL="0" indent="0" algn="ctr">
                         <a:buNone/>
                       </a:pPr>
                       <a:r>
@@ -10788,7 +10722,7 @@
                       </a:endParaRPr>
                     </a:p>
                   </a:txBody>
-                  <a:tcPr marL="91440" marR="91440" marT="45720" marB="45720" anchor="ctr">
+                  <a:tcPr anchor="ctr">
                     <a:lnL w="6350" cap="flat" cmpd="sng" algn="ctr">
                       <a:solidFill>
                         <a:srgbClr val="D1D5DB"/>
@@ -10835,7 +10769,7 @@
                     <a:bodyPr/>
                     <a:lstStyle/>
                     <a:p>
-                      <a:pPr algn="ctr" indent="0" marL="0">
+                      <a:pPr marL="0" indent="0" algn="ctr">
                         <a:buNone/>
                       </a:pPr>
                       <a:r>
@@ -10856,7 +10790,7 @@
                       </a:endParaRPr>
                     </a:p>
                   </a:txBody>
-                  <a:tcPr marL="91440" marR="91440" marT="45720" marB="45720" anchor="ctr">
+                  <a:tcPr anchor="ctr">
                     <a:lnL w="6350" cap="flat" cmpd="sng" algn="ctr">
                       <a:solidFill>
                         <a:srgbClr val="D1D5DB"/>
@@ -10898,6 +10832,11 @@
                     </a:solidFill>
                   </a:tcPr>
                 </a:tc>
+                <a:extLst>
+                  <a:ext uri="{0D108BD9-81ED-4DB2-BD59-A6C34878D82A}">
+                    <a16:rowId xmlns:a16="http://schemas.microsoft.com/office/drawing/2014/main" val="10001"/>
+                  </a:ext>
+                </a:extLst>
               </a:tr>
               <a:tr h="396240">
                 <a:tc>
@@ -10905,7 +10844,7 @@
                     <a:bodyPr/>
                     <a:lstStyle/>
                     <a:p>
-                      <a:pPr algn="ctr" indent="0" marL="0">
+                      <a:pPr marL="0" indent="0" algn="ctr">
                         <a:buNone/>
                       </a:pPr>
                       <a:r>
@@ -10926,7 +10865,7 @@
                       </a:endParaRPr>
                     </a:p>
                   </a:txBody>
-                  <a:tcPr marL="91440" marR="91440" marT="45720" marB="45720" anchor="ctr">
+                  <a:tcPr anchor="ctr">
                     <a:lnL w="6350" cap="flat" cmpd="sng" algn="ctr">
                       <a:solidFill>
                         <a:srgbClr val="D1D5DB"/>
@@ -10973,7 +10912,7 @@
                     <a:bodyPr/>
                     <a:lstStyle/>
                     <a:p>
-                      <a:pPr algn="ctr" indent="0" marL="0">
+                      <a:pPr marL="0" indent="0" algn="ctr">
                         <a:buNone/>
                       </a:pPr>
                       <a:r>
@@ -10994,7 +10933,7 @@
                       </a:endParaRPr>
                     </a:p>
                   </a:txBody>
-                  <a:tcPr marL="91440" marR="91440" marT="45720" marB="45720" anchor="ctr">
+                  <a:tcPr anchor="ctr">
                     <a:lnL w="6350" cap="flat" cmpd="sng" algn="ctr">
                       <a:solidFill>
                         <a:srgbClr val="D1D5DB"/>
@@ -11041,7 +10980,7 @@
                     <a:bodyPr/>
                     <a:lstStyle/>
                     <a:p>
-                      <a:pPr algn="ctr" indent="0" marL="0">
+                      <a:pPr marL="0" indent="0" algn="ctr">
                         <a:buNone/>
                       </a:pPr>
                       <a:r>
@@ -11062,7 +11001,7 @@
                       </a:endParaRPr>
                     </a:p>
                   </a:txBody>
-                  <a:tcPr marL="91440" marR="91440" marT="45720" marB="45720" anchor="ctr">
+                  <a:tcPr anchor="ctr">
                     <a:lnL w="6350" cap="flat" cmpd="sng" algn="ctr">
                       <a:solidFill>
                         <a:srgbClr val="D1D5DB"/>
@@ -11109,7 +11048,7 @@
                     <a:bodyPr/>
                     <a:lstStyle/>
                     <a:p>
-                      <a:pPr algn="ctr" indent="0" marL="0">
+                      <a:pPr marL="0" indent="0" algn="ctr">
                         <a:buNone/>
                       </a:pPr>
                       <a:r>
@@ -11130,7 +11069,7 @@
                       </a:endParaRPr>
                     </a:p>
                   </a:txBody>
-                  <a:tcPr marL="91440" marR="91440" marT="45720" marB="45720" anchor="ctr">
+                  <a:tcPr anchor="ctr">
                     <a:lnL w="6350" cap="flat" cmpd="sng" algn="ctr">
                       <a:solidFill>
                         <a:srgbClr val="D1D5DB"/>
@@ -11177,7 +11116,7 @@
                     <a:bodyPr/>
                     <a:lstStyle/>
                     <a:p>
-                      <a:pPr algn="ctr" indent="0" marL="0">
+                      <a:pPr marL="0" indent="0" algn="ctr">
                         <a:buNone/>
                       </a:pPr>
                       <a:r>
@@ -11198,7 +11137,7 @@
                       </a:endParaRPr>
                     </a:p>
                   </a:txBody>
-                  <a:tcPr marL="91440" marR="91440" marT="45720" marB="45720" anchor="ctr">
+                  <a:tcPr anchor="ctr">
                     <a:lnL w="6350" cap="flat" cmpd="sng" algn="ctr">
                       <a:solidFill>
                         <a:srgbClr val="D1D5DB"/>
@@ -11245,7 +11184,7 @@
                     <a:bodyPr/>
                     <a:lstStyle/>
                     <a:p>
-                      <a:pPr algn="ctr" indent="0" marL="0">
+                      <a:pPr marL="0" indent="0" algn="ctr">
                         <a:buNone/>
                       </a:pPr>
                       <a:r>
@@ -11266,7 +11205,7 @@
                       </a:endParaRPr>
                     </a:p>
                   </a:txBody>
-                  <a:tcPr marL="91440" marR="91440" marT="45720" marB="45720" anchor="ctr">
+                  <a:tcPr anchor="ctr">
                     <a:lnL w="6350" cap="flat" cmpd="sng" algn="ctr">
                       <a:solidFill>
                         <a:srgbClr val="D1D5DB"/>
@@ -11308,6 +11247,11 @@
                     </a:solidFill>
                   </a:tcPr>
                 </a:tc>
+                <a:extLst>
+                  <a:ext uri="{0D108BD9-81ED-4DB2-BD59-A6C34878D82A}">
+                    <a16:rowId xmlns:a16="http://schemas.microsoft.com/office/drawing/2014/main" val="10002"/>
+                  </a:ext>
+                </a:extLst>
               </a:tr>
               <a:tr h="396240">
                 <a:tc>
@@ -11315,7 +11259,7 @@
                     <a:bodyPr/>
                     <a:lstStyle/>
                     <a:p>
-                      <a:pPr algn="ctr" indent="0" marL="0">
+                      <a:pPr marL="0" indent="0" algn="ctr">
                         <a:buNone/>
                       </a:pPr>
                       <a:r>
@@ -11336,7 +11280,7 @@
                       </a:endParaRPr>
                     </a:p>
                   </a:txBody>
-                  <a:tcPr marL="91440" marR="91440" marT="45720" marB="45720" anchor="ctr">
+                  <a:tcPr anchor="ctr">
                     <a:lnL w="6350" cap="flat" cmpd="sng" algn="ctr">
                       <a:solidFill>
                         <a:srgbClr val="D1D5DB"/>
@@ -11383,7 +11327,7 @@
                     <a:bodyPr/>
                     <a:lstStyle/>
                     <a:p>
-                      <a:pPr algn="ctr" indent="0" marL="0">
+                      <a:pPr marL="0" indent="0" algn="ctr">
                         <a:buNone/>
                       </a:pPr>
                       <a:r>
@@ -11404,7 +11348,7 @@
                       </a:endParaRPr>
                     </a:p>
                   </a:txBody>
-                  <a:tcPr marL="91440" marR="91440" marT="45720" marB="45720" anchor="ctr">
+                  <a:tcPr anchor="ctr">
                     <a:lnL w="6350" cap="flat" cmpd="sng" algn="ctr">
                       <a:solidFill>
                         <a:srgbClr val="D1D5DB"/>
@@ -11451,7 +11395,7 @@
                     <a:bodyPr/>
                     <a:lstStyle/>
                     <a:p>
-                      <a:pPr algn="ctr" indent="0" marL="0">
+                      <a:pPr marL="0" indent="0" algn="ctr">
                         <a:buNone/>
                       </a:pPr>
                       <a:r>
@@ -11472,7 +11416,7 @@
                       </a:endParaRPr>
                     </a:p>
                   </a:txBody>
-                  <a:tcPr marL="91440" marR="91440" marT="45720" marB="45720" anchor="ctr">
+                  <a:tcPr anchor="ctr">
                     <a:lnL w="6350" cap="flat" cmpd="sng" algn="ctr">
                       <a:solidFill>
                         <a:srgbClr val="D1D5DB"/>
@@ -11519,7 +11463,7 @@
                     <a:bodyPr/>
                     <a:lstStyle/>
                     <a:p>
-                      <a:pPr algn="ctr" indent="0" marL="0">
+                      <a:pPr marL="0" indent="0" algn="ctr">
                         <a:buNone/>
                       </a:pPr>
                       <a:r>
@@ -11540,7 +11484,7 @@
                       </a:endParaRPr>
                     </a:p>
                   </a:txBody>
-                  <a:tcPr marL="91440" marR="91440" marT="45720" marB="45720" anchor="ctr">
+                  <a:tcPr anchor="ctr">
                     <a:lnL w="6350" cap="flat" cmpd="sng" algn="ctr">
                       <a:solidFill>
                         <a:srgbClr val="D1D5DB"/>
@@ -11587,7 +11531,7 @@
                     <a:bodyPr/>
                     <a:lstStyle/>
                     <a:p>
-                      <a:pPr algn="ctr" indent="0" marL="0">
+                      <a:pPr marL="0" indent="0" algn="ctr">
                         <a:buNone/>
                       </a:pPr>
                       <a:r>
@@ -11608,7 +11552,7 @@
                       </a:endParaRPr>
                     </a:p>
                   </a:txBody>
-                  <a:tcPr marL="91440" marR="91440" marT="45720" marB="45720" anchor="ctr">
+                  <a:tcPr anchor="ctr">
                     <a:lnL w="6350" cap="flat" cmpd="sng" algn="ctr">
                       <a:solidFill>
                         <a:srgbClr val="D1D5DB"/>
@@ -11655,7 +11599,7 @@
                     <a:bodyPr/>
                     <a:lstStyle/>
                     <a:p>
-                      <a:pPr algn="ctr" indent="0" marL="0">
+                      <a:pPr marL="0" indent="0" algn="ctr">
                         <a:buNone/>
                       </a:pPr>
                       <a:r>
@@ -11676,7 +11620,7 @@
                       </a:endParaRPr>
                     </a:p>
                   </a:txBody>
-                  <a:tcPr marL="91440" marR="91440" marT="45720" marB="45720" anchor="ctr">
+                  <a:tcPr anchor="ctr">
                     <a:lnL w="6350" cap="flat" cmpd="sng" algn="ctr">
                       <a:solidFill>
                         <a:srgbClr val="D1D5DB"/>
@@ -11718,6 +11662,11 @@
                     </a:solidFill>
                   </a:tcPr>
                 </a:tc>
+                <a:extLst>
+                  <a:ext uri="{0D108BD9-81ED-4DB2-BD59-A6C34878D82A}">
+                    <a16:rowId xmlns:a16="http://schemas.microsoft.com/office/drawing/2014/main" val="10003"/>
+                  </a:ext>
+                </a:extLst>
               </a:tr>
               <a:tr h="396240">
                 <a:tc>
@@ -11725,7 +11674,7 @@
                     <a:bodyPr/>
                     <a:lstStyle/>
                     <a:p>
-                      <a:pPr algn="ctr" indent="0" marL="0">
+                      <a:pPr marL="0" indent="0" algn="ctr">
                         <a:buNone/>
                       </a:pPr>
                       <a:r>
@@ -11746,7 +11695,7 @@
                       </a:endParaRPr>
                     </a:p>
                   </a:txBody>
-                  <a:tcPr marL="91440" marR="91440" marT="45720" marB="45720" anchor="ctr">
+                  <a:tcPr anchor="ctr">
                     <a:lnL w="6350" cap="flat" cmpd="sng" algn="ctr">
                       <a:solidFill>
                         <a:srgbClr val="D1D5DB"/>
@@ -11793,7 +11742,7 @@
                     <a:bodyPr/>
                     <a:lstStyle/>
                     <a:p>
-                      <a:pPr algn="ctr" indent="0" marL="0">
+                      <a:pPr marL="0" indent="0" algn="ctr">
                         <a:buNone/>
                       </a:pPr>
                       <a:r>
@@ -11814,7 +11763,7 @@
                       </a:endParaRPr>
                     </a:p>
                   </a:txBody>
-                  <a:tcPr marL="91440" marR="91440" marT="45720" marB="45720" anchor="ctr">
+                  <a:tcPr anchor="ctr">
                     <a:lnL w="6350" cap="flat" cmpd="sng" algn="ctr">
                       <a:solidFill>
                         <a:srgbClr val="D1D5DB"/>
@@ -11861,7 +11810,7 @@
                     <a:bodyPr/>
                     <a:lstStyle/>
                     <a:p>
-                      <a:pPr algn="ctr" indent="0" marL="0">
+                      <a:pPr marL="0" indent="0" algn="ctr">
                         <a:buNone/>
                       </a:pPr>
                       <a:r>
@@ -11882,7 +11831,7 @@
                       </a:endParaRPr>
                     </a:p>
                   </a:txBody>
-                  <a:tcPr marL="91440" marR="91440" marT="45720" marB="45720" anchor="ctr">
+                  <a:tcPr anchor="ctr">
                     <a:lnL w="6350" cap="flat" cmpd="sng" algn="ctr">
                       <a:solidFill>
                         <a:srgbClr val="D1D5DB"/>
@@ -11929,7 +11878,7 @@
                     <a:bodyPr/>
                     <a:lstStyle/>
                     <a:p>
-                      <a:pPr algn="ctr" indent="0" marL="0">
+                      <a:pPr marL="0" indent="0" algn="ctr">
                         <a:buNone/>
                       </a:pPr>
                       <a:r>
@@ -11950,7 +11899,7 @@
                       </a:endParaRPr>
                     </a:p>
                   </a:txBody>
-                  <a:tcPr marL="91440" marR="91440" marT="45720" marB="45720" anchor="ctr">
+                  <a:tcPr anchor="ctr">
                     <a:lnL w="6350" cap="flat" cmpd="sng" algn="ctr">
                       <a:solidFill>
                         <a:srgbClr val="D1D5DB"/>
@@ -11997,7 +11946,7 @@
                     <a:bodyPr/>
                     <a:lstStyle/>
                     <a:p>
-                      <a:pPr algn="ctr" indent="0" marL="0">
+                      <a:pPr marL="0" indent="0" algn="ctr">
                         <a:buNone/>
                       </a:pPr>
                       <a:r>
@@ -12018,7 +11967,7 @@
                       </a:endParaRPr>
                     </a:p>
                   </a:txBody>
-                  <a:tcPr marL="91440" marR="91440" marT="45720" marB="45720" anchor="ctr">
+                  <a:tcPr anchor="ctr">
                     <a:lnL w="6350" cap="flat" cmpd="sng" algn="ctr">
                       <a:solidFill>
                         <a:srgbClr val="D1D5DB"/>
@@ -12065,7 +12014,7 @@
                     <a:bodyPr/>
                     <a:lstStyle/>
                     <a:p>
-                      <a:pPr algn="ctr" indent="0" marL="0">
+                      <a:pPr marL="0" indent="0" algn="ctr">
                         <a:buNone/>
                       </a:pPr>
                       <a:r>
@@ -12086,7 +12035,7 @@
                       </a:endParaRPr>
                     </a:p>
                   </a:txBody>
-                  <a:tcPr marL="91440" marR="91440" marT="45720" marB="45720" anchor="ctr">
+                  <a:tcPr anchor="ctr">
                     <a:lnL w="6350" cap="flat" cmpd="sng" algn="ctr">
                       <a:solidFill>
                         <a:srgbClr val="D1D5DB"/>
@@ -12128,6 +12077,11 @@
                     </a:solidFill>
                   </a:tcPr>
                 </a:tc>
+                <a:extLst>
+                  <a:ext uri="{0D108BD9-81ED-4DB2-BD59-A6C34878D82A}">
+                    <a16:rowId xmlns:a16="http://schemas.microsoft.com/office/drawing/2014/main" val="10004"/>
+                  </a:ext>
+                </a:extLst>
               </a:tr>
               <a:tr h="396240">
                 <a:tc>
@@ -12135,7 +12089,7 @@
                     <a:bodyPr/>
                     <a:lstStyle/>
                     <a:p>
-                      <a:pPr algn="ctr" indent="0" marL="0">
+                      <a:pPr marL="0" indent="0" algn="ctr">
                         <a:buNone/>
                       </a:pPr>
                       <a:r>
@@ -12156,7 +12110,7 @@
                       </a:endParaRPr>
                     </a:p>
                   </a:txBody>
-                  <a:tcPr marL="91440" marR="91440" marT="45720" marB="45720" anchor="ctr">
+                  <a:tcPr anchor="ctr">
                     <a:lnL w="6350" cap="flat" cmpd="sng" algn="ctr">
                       <a:solidFill>
                         <a:srgbClr val="D1D5DB"/>
@@ -12203,7 +12157,7 @@
                     <a:bodyPr/>
                     <a:lstStyle/>
                     <a:p>
-                      <a:pPr algn="ctr" indent="0" marL="0">
+                      <a:pPr marL="0" indent="0" algn="ctr">
                         <a:buNone/>
                       </a:pPr>
                       <a:r>
@@ -12224,7 +12178,7 @@
                       </a:endParaRPr>
                     </a:p>
                   </a:txBody>
-                  <a:tcPr marL="91440" marR="91440" marT="45720" marB="45720" anchor="ctr">
+                  <a:tcPr anchor="ctr">
                     <a:lnL w="6350" cap="flat" cmpd="sng" algn="ctr">
                       <a:solidFill>
                         <a:srgbClr val="D1D5DB"/>
@@ -12271,7 +12225,7 @@
                     <a:bodyPr/>
                     <a:lstStyle/>
                     <a:p>
-                      <a:pPr algn="ctr" indent="0" marL="0">
+                      <a:pPr marL="0" indent="0" algn="ctr">
                         <a:buNone/>
                       </a:pPr>
                       <a:r>
@@ -12292,7 +12246,7 @@
                       </a:endParaRPr>
                     </a:p>
                   </a:txBody>
-                  <a:tcPr marL="91440" marR="91440" marT="45720" marB="45720" anchor="ctr">
+                  <a:tcPr anchor="ctr">
                     <a:lnL w="6350" cap="flat" cmpd="sng" algn="ctr">
                       <a:solidFill>
                         <a:srgbClr val="D1D5DB"/>
@@ -12339,7 +12293,7 @@
                     <a:bodyPr/>
                     <a:lstStyle/>
                     <a:p>
-                      <a:pPr algn="ctr" indent="0" marL="0">
+                      <a:pPr marL="0" indent="0" algn="ctr">
                         <a:buNone/>
                       </a:pPr>
                       <a:r>
@@ -12360,7 +12314,7 @@
                       </a:endParaRPr>
                     </a:p>
                   </a:txBody>
-                  <a:tcPr marL="91440" marR="91440" marT="45720" marB="45720" anchor="ctr">
+                  <a:tcPr anchor="ctr">
                     <a:lnL w="6350" cap="flat" cmpd="sng" algn="ctr">
                       <a:solidFill>
                         <a:srgbClr val="D1D5DB"/>
@@ -12407,7 +12361,7 @@
                     <a:bodyPr/>
                     <a:lstStyle/>
                     <a:p>
-                      <a:pPr algn="ctr" indent="0" marL="0">
+                      <a:pPr marL="0" indent="0" algn="ctr">
                         <a:buNone/>
                       </a:pPr>
                       <a:r>
@@ -12428,7 +12382,7 @@
                       </a:endParaRPr>
                     </a:p>
                   </a:txBody>
-                  <a:tcPr marL="91440" marR="91440" marT="45720" marB="45720" anchor="ctr">
+                  <a:tcPr anchor="ctr">
                     <a:lnL w="6350" cap="flat" cmpd="sng" algn="ctr">
                       <a:solidFill>
                         <a:srgbClr val="D1D5DB"/>
@@ -12475,7 +12429,7 @@
                     <a:bodyPr/>
                     <a:lstStyle/>
                     <a:p>
-                      <a:pPr algn="ctr" indent="0" marL="0">
+                      <a:pPr marL="0" indent="0" algn="ctr">
                         <a:buNone/>
                       </a:pPr>
                       <a:r>
@@ -12496,7 +12450,7 @@
                       </a:endParaRPr>
                     </a:p>
                   </a:txBody>
-                  <a:tcPr marL="91440" marR="91440" marT="45720" marB="45720" anchor="ctr">
+                  <a:tcPr anchor="ctr">
                     <a:lnL w="6350" cap="flat" cmpd="sng" algn="ctr">
                       <a:solidFill>
                         <a:srgbClr val="D1D5DB"/>
@@ -12538,6 +12492,11 @@
                     </a:solidFill>
                   </a:tcPr>
                 </a:tc>
+                <a:extLst>
+                  <a:ext uri="{0D108BD9-81ED-4DB2-BD59-A6C34878D82A}">
+                    <a16:rowId xmlns:a16="http://schemas.microsoft.com/office/drawing/2014/main" val="10005"/>
+                  </a:ext>
+                </a:extLst>
               </a:tr>
             </a:tbl>
           </a:graphicData>
@@ -12564,7 +12523,7 @@
           <a:bodyPr wrap="square" rtlCol="0" anchor="ctr"/>
           <a:lstStyle/>
           <a:p>
-            <a:pPr indent="0" marL="0">
+            <a:pPr marL="0" indent="0">
               <a:buNone/>
             </a:pPr>
             <a:r>
@@ -12578,9 +12537,6 @@
               </a:rPr>
               <a:t>✓</a:t>
             </a:r>
-            <a:pPr indent="0" marL="0">
-              <a:buNone/>
-            </a:pPr>
             <a:r>
               <a:rPr lang="en-US" sz="1400" dirty="0">
                 <a:solidFill>
@@ -12592,9 +12548,6 @@
               </a:rPr>
               <a:t> = allowed     </a:t>
             </a:r>
-            <a:pPr indent="0" marL="0">
-              <a:buNone/>
-            </a:pPr>
             <a:r>
               <a:rPr lang="en-US" sz="1400" dirty="0">
                 <a:solidFill>
@@ -12606,9 +12559,6 @@
               </a:rPr>
               <a:t>-</a:t>
             </a:r>
-            <a:pPr indent="0" marL="0">
-              <a:buNone/>
-            </a:pPr>
             <a:r>
               <a:rPr lang="en-US" sz="1400" dirty="0">
                 <a:solidFill>
@@ -12645,7 +12595,7 @@
           <a:bodyPr wrap="square" rtlCol="0" anchor="ctr"/>
           <a:lstStyle/>
           <a:p>
-            <a:pPr indent="0" marL="0">
+            <a:pPr marL="0" indent="0">
               <a:buNone/>
             </a:pPr>
             <a:r>
@@ -12679,6 +12629,7 @@
         <a:solidFill>
           <a:srgbClr val="F5F5F5"/>
         </a:solidFill>
+        <a:effectLst/>
       </p:bgPr>
     </p:bg>
     <p:spTree>
@@ -12716,7 +12667,7 @@
           <a:bodyPr wrap="square" lIns="0" tIns="0" rIns="0" bIns="0" rtlCol="0" anchor="ctr"/>
           <a:lstStyle/>
           <a:p>
-            <a:pPr indent="0" marL="0">
+            <a:pPr marL="0" indent="0">
               <a:buNone/>
             </a:pPr>
             <a:r>
@@ -12753,6 +12704,13 @@
           </a:solidFill>
           <a:ln/>
         </p:spPr>
+        <p:txBody>
+          <a:bodyPr/>
+          <a:lstStyle/>
+          <a:p>
+            <a:endParaRPr lang="en-US"/>
+          </a:p>
+        </p:txBody>
       </p:sp>
       <p:sp>
         <p:nvSpPr>
@@ -12775,7 +12733,7 @@
           <a:bodyPr wrap="square" rtlCol="0" anchor="ctr"/>
           <a:lstStyle/>
           <a:p>
-            <a:pPr indent="0" marL="0">
+            <a:pPr marL="0" indent="0">
               <a:buNone/>
             </a:pPr>
             <a:r>
@@ -12812,6 +12770,13 @@
           </a:solidFill>
           <a:ln/>
         </p:spPr>
+        <p:txBody>
+          <a:bodyPr/>
+          <a:lstStyle/>
+          <a:p>
+            <a:endParaRPr lang="en-US"/>
+          </a:p>
+        </p:txBody>
       </p:sp>
       <p:sp>
         <p:nvSpPr>
@@ -12834,7 +12799,7 @@
           <a:bodyPr wrap="square" rtlCol="0" anchor="t"/>
           <a:lstStyle/>
           <a:p>
-            <a:pPr indent="0" marL="0">
+            <a:pPr marL="0" indent="0">
               <a:buNone/>
             </a:pPr>
             <a:r>
@@ -12851,7 +12816,7 @@
             <a:endParaRPr lang="en-US" sz="1000" dirty="0"/>
           </a:p>
           <a:p>
-            <a:pPr indent="0" marL="0">
+            <a:pPr marL="0" indent="0">
               <a:buNone/>
             </a:pPr>
             <a:r>
@@ -12865,9 +12830,6 @@
               </a:rPr>
               <a:t>    void on_entry(Ctx&amp; c) { </a:t>
             </a:r>
-            <a:pPr indent="0" marL="0">
-              <a:buNone/>
-            </a:pPr>
             <a:r>
               <a:rPr lang="en-US" sz="1000" dirty="0">
                 <a:solidFill>
@@ -12882,7 +12844,7 @@
             <a:endParaRPr lang="en-US" sz="1000" dirty="0"/>
           </a:p>
           <a:p>
-            <a:pPr indent="0" marL="0">
+            <a:pPr marL="0" indent="0">
               <a:buNone/>
             </a:pPr>
             <a:r>
@@ -12899,7 +12861,7 @@
             <a:endParaRPr lang="en-US" sz="1000" dirty="0"/>
           </a:p>
           <a:p>
-            <a:pPr indent="0" marL="0">
+            <a:pPr marL="0" indent="0">
               <a:buNone/>
             </a:pPr>
             <a:r>
@@ -12916,7 +12878,7 @@
             <a:endParaRPr lang="en-US" sz="1000" dirty="0"/>
           </a:p>
           <a:p>
-            <a:pPr indent="0" marL="0">
+            <a:pPr marL="0" indent="0">
               <a:buNone/>
             </a:pPr>
             <a:r>
@@ -12958,6 +12920,13 @@
             <a:prstDash val="solid"/>
           </a:ln>
         </p:spPr>
+        <p:txBody>
+          <a:bodyPr/>
+          <a:lstStyle/>
+          <a:p>
+            <a:endParaRPr lang="en-US"/>
+          </a:p>
+        </p:txBody>
       </p:sp>
       <p:sp>
         <p:nvSpPr>
@@ -12980,7 +12949,7 @@
           <a:bodyPr wrap="square" rtlCol="0" anchor="ctr"/>
           <a:lstStyle/>
           <a:p>
-            <a:pPr indent="0" marL="0">
+            <a:pPr marL="0" indent="0">
               <a:buNone/>
             </a:pPr>
             <a:r>
@@ -12997,7 +12966,7 @@
             <a:endParaRPr lang="en-US" sz="1100" dirty="0"/>
           </a:p>
           <a:p>
-            <a:pPr indent="0" marL="0">
+            <a:pPr marL="0" indent="0">
               <a:buNone/>
             </a:pPr>
             <a:r>
@@ -13036,7 +13005,7 @@
           <a:bodyPr wrap="square" rtlCol="0" anchor="ctr"/>
           <a:lstStyle/>
           <a:p>
-            <a:pPr indent="0" marL="0">
+            <a:pPr marL="0" indent="0">
               <a:buNone/>
             </a:pPr>
             <a:r>
@@ -13075,7 +13044,7 @@
           <a:bodyPr wrap="square" rtlCol="0" anchor="ctr"/>
           <a:lstStyle/>
           <a:p>
-            <a:pPr indent="0" marL="0">
+            <a:pPr marL="0" indent="0">
               <a:buNone/>
             </a:pPr>
             <a:r>
@@ -13089,9 +13058,6 @@
               </a:rPr>
               <a:t>1. Exception safety</a:t>
             </a:r>
-            <a:pPr indent="0" marL="0">
-              <a:buNone/>
-            </a:pPr>
             <a:r>
               <a:rPr lang="en-US" sz="1300" dirty="0">
                 <a:solidFill>
@@ -13106,7 +13072,7 @@
             <a:endParaRPr lang="en-US" sz="1300" dirty="0"/>
           </a:p>
           <a:p>
-            <a:pPr indent="0" marL="0">
+            <a:pPr marL="0" indent="0">
               <a:buNone/>
             </a:pPr>
             <a:r>
@@ -13120,9 +13086,6 @@
               </a:rPr>
               <a:t>2. Performance</a:t>
             </a:r>
-            <a:pPr indent="0" marL="0">
-              <a:buNone/>
-            </a:pPr>
             <a:r>
               <a:rPr lang="en-US" sz="1300" dirty="0">
                 <a:solidFill>
@@ -13137,7 +13100,7 @@
             <a:endParaRPr lang="en-US" sz="1300" dirty="0"/>
           </a:p>
           <a:p>
-            <a:pPr indent="0" marL="0">
+            <a:pPr marL="0" indent="0">
               <a:buNone/>
             </a:pPr>
             <a:r>
@@ -13151,9 +13114,6 @@
               </a:rPr>
               <a:t>3. Design discipline</a:t>
             </a:r>
-            <a:pPr indent="0" marL="0">
-              <a:buNone/>
-            </a:pPr>
             <a:r>
               <a:rPr lang="en-US" sz="1300" dirty="0">
                 <a:solidFill>
@@ -13190,7 +13150,7 @@
           <a:bodyPr wrap="square" rtlCol="0" anchor="ctr"/>
           <a:lstStyle/>
           <a:p>
-            <a:pPr indent="0" marL="0">
+            <a:pPr marL="0" indent="0">
               <a:buNone/>
             </a:pPr>
             <a:r>
@@ -13229,7 +13189,7 @@
           <a:bodyPr wrap="square" rtlCol="0" anchor="ctr"/>
           <a:lstStyle/>
           <a:p>
-            <a:pPr indent="0" marL="0">
+            <a:pPr marL="0" indent="0">
               <a:buNone/>
             </a:pPr>
             <a:r>
@@ -13268,6 +13228,13 @@
           </a:solidFill>
           <a:ln/>
         </p:spPr>
+        <p:txBody>
+          <a:bodyPr/>
+          <a:lstStyle/>
+          <a:p>
+            <a:endParaRPr lang="en-US"/>
+          </a:p>
+        </p:txBody>
       </p:sp>
       <p:sp>
         <p:nvSpPr>
@@ -13290,7 +13257,7 @@
           <a:bodyPr wrap="square" rtlCol="0" anchor="ctr"/>
           <a:lstStyle/>
           <a:p>
-            <a:pPr indent="0" marL="0">
+            <a:pPr marL="0" indent="0">
               <a:buNone/>
             </a:pPr>
             <a:r>
@@ -13304,9 +13271,6 @@
               </a:rPr>
               <a:t>Runtime cost: </a:t>
             </a:r>
-            <a:pPr indent="0" marL="0">
-              <a:buNone/>
-            </a:pPr>
             <a:r>
               <a:rPr lang="en-US" sz="1300" dirty="0">
                 <a:solidFill>
@@ -13338,6 +13302,7 @@
         <a:solidFill>
           <a:srgbClr val="1E1E1E"/>
         </a:solidFill>
+        <a:effectLst/>
       </p:bgPr>
     </p:bg>
     <p:spTree>
@@ -13375,7 +13340,7 @@
           <a:bodyPr wrap="square" rtlCol="0" anchor="ctr"/>
           <a:lstStyle/>
           <a:p>
-            <a:pPr indent="0" marL="0">
+            <a:pPr marL="0" indent="0">
               <a:buNone/>
             </a:pPr>
             <a:r>
@@ -13412,6 +13377,13 @@
           </a:solidFill>
           <a:ln/>
         </p:spPr>
+        <p:txBody>
+          <a:bodyPr/>
+          <a:lstStyle/>
+          <a:p>
+            <a:endParaRPr lang="en-US"/>
+          </a:p>
+        </p:txBody>
       </p:sp>
       <p:sp>
         <p:nvSpPr>
@@ -13436,7 +13408,7 @@
           <a:bodyPr wrap="square" rtlCol="0" anchor="ctr"/>
           <a:lstStyle/>
           <a:p>
-            <a:pPr algn="ctr" indent="0" marL="0">
+            <a:pPr marL="0" indent="0" algn="ctr">
               <a:buNone/>
             </a:pPr>
             <a:r>
@@ -13475,7 +13447,7 @@
           <a:bodyPr wrap="square" rtlCol="0" anchor="ctr"/>
           <a:lstStyle/>
           <a:p>
-            <a:pPr indent="0" marL="0">
+            <a:pPr marL="0" indent="0">
               <a:buNone/>
             </a:pPr>
             <a:r>
@@ -13514,7 +13486,7 @@
           <a:bodyPr wrap="square" rtlCol="0" anchor="ctr"/>
           <a:lstStyle/>
           <a:p>
-            <a:pPr indent="0" marL="0">
+            <a:pPr marL="0" indent="0">
               <a:buNone/>
             </a:pPr>
             <a:r>
@@ -13555,7 +13527,7 @@
           <a:bodyPr wrap="square" rtlCol="0" anchor="ctr"/>
           <a:lstStyle/>
           <a:p>
-            <a:pPr algn="ctr" indent="0" marL="0">
+            <a:pPr marL="0" indent="0" algn="ctr">
               <a:buNone/>
             </a:pPr>
             <a:r>
@@ -13594,7 +13566,7 @@
           <a:bodyPr wrap="square" rtlCol="0" anchor="ctr"/>
           <a:lstStyle/>
           <a:p>
-            <a:pPr indent="0" marL="0">
+            <a:pPr marL="0" indent="0">
               <a:buNone/>
             </a:pPr>
             <a:r>
@@ -13633,7 +13605,7 @@
           <a:bodyPr wrap="square" rtlCol="0" anchor="ctr"/>
           <a:lstStyle/>
           <a:p>
-            <a:pPr indent="0" marL="0">
+            <a:pPr marL="0" indent="0">
               <a:buNone/>
             </a:pPr>
             <a:r>
@@ -13674,7 +13646,7 @@
           <a:bodyPr wrap="square" rtlCol="0" anchor="ctr"/>
           <a:lstStyle/>
           <a:p>
-            <a:pPr algn="ctr" indent="0" marL="0">
+            <a:pPr marL="0" indent="0" algn="ctr">
               <a:buNone/>
             </a:pPr>
             <a:r>
@@ -13713,7 +13685,7 @@
           <a:bodyPr wrap="square" rtlCol="0" anchor="ctr"/>
           <a:lstStyle/>
           <a:p>
-            <a:pPr indent="0" marL="0">
+            <a:pPr marL="0" indent="0">
               <a:buNone/>
             </a:pPr>
             <a:r>
@@ -13752,7 +13724,7 @@
           <a:bodyPr wrap="square" rtlCol="0" anchor="ctr"/>
           <a:lstStyle/>
           <a:p>
-            <a:pPr indent="0" marL="0">
+            <a:pPr marL="0" indent="0">
               <a:buNone/>
             </a:pPr>
             <a:r>
@@ -13793,7 +13765,7 @@
           <a:bodyPr wrap="square" rtlCol="0" anchor="ctr"/>
           <a:lstStyle/>
           <a:p>
-            <a:pPr algn="ctr" indent="0" marL="0">
+            <a:pPr marL="0" indent="0" algn="ctr">
               <a:buNone/>
             </a:pPr>
             <a:r>
@@ -13832,7 +13804,7 @@
           <a:bodyPr wrap="square" rtlCol="0" anchor="ctr"/>
           <a:lstStyle/>
           <a:p>
-            <a:pPr indent="0" marL="0">
+            <a:pPr marL="0" indent="0">
               <a:buNone/>
             </a:pPr>
             <a:r>
@@ -13871,7 +13843,7 @@
           <a:bodyPr wrap="square" rtlCol="0" anchor="ctr"/>
           <a:lstStyle/>
           <a:p>
-            <a:pPr indent="0" marL="0">
+            <a:pPr marL="0" indent="0">
               <a:buNone/>
             </a:pPr>
             <a:r>
@@ -13910,7 +13882,7 @@
           <a:bodyPr wrap="square" rtlCol="0" anchor="ctr"/>
           <a:lstStyle/>
           <a:p>
-            <a:pPr indent="0" marL="0">
+            <a:pPr marL="0" indent="0">
               <a:buNone/>
             </a:pPr>
             <a:r>
@@ -13944,6 +13916,7 @@
         <a:solidFill>
           <a:srgbClr val="1E1E1E"/>
         </a:solidFill>
+        <a:effectLst/>
       </p:bgPr>
     </p:bg>
     <p:spTree>
@@ -13986,6 +13959,13 @@
             <a:prstDash val="solid"/>
           </a:ln>
         </p:spPr>
+        <p:txBody>
+          <a:bodyPr/>
+          <a:lstStyle/>
+          <a:p>
+            <a:endParaRPr lang="en-US"/>
+          </a:p>
+        </p:txBody>
       </p:sp>
       <p:sp>
         <p:nvSpPr>
@@ -14008,7 +13988,7 @@
           <a:bodyPr wrap="square" rtlCol="0" anchor="ctr"/>
           <a:lstStyle/>
           <a:p>
-            <a:pPr indent="0" marL="0">
+            <a:pPr marL="0" indent="0">
               <a:buNone/>
             </a:pPr>
             <a:r>
@@ -14047,7 +14027,7 @@
           <a:bodyPr wrap="square" rtlCol="0" anchor="ctr"/>
           <a:lstStyle/>
           <a:p>
-            <a:pPr indent="0" marL="0">
+            <a:pPr marL="0" indent="0">
               <a:buNone/>
             </a:pPr>
             <a:r>
@@ -14086,7 +14066,7 @@
           <a:bodyPr wrap="square" rtlCol="0" anchor="t"/>
           <a:lstStyle/>
           <a:p>
-            <a:pPr indent="0" marL="0">
+            <a:pPr marL="0" indent="0">
               <a:buNone/>
             </a:pPr>
             <a:r>
@@ -14100,9 +14080,6 @@
               </a:rPr>
               <a:t>This session assumes </a:t>
             </a:r>
-            <a:pPr indent="0" marL="0">
-              <a:buNone/>
-            </a:pPr>
             <a:r>
               <a:rPr lang="en-US" sz="1800" b="1" dirty="0">
                 <a:solidFill>
@@ -14114,9 +14091,6 @@
               </a:rPr>
               <a:t>single-thread confinement</a:t>
             </a:r>
-            <a:pPr indent="0" marL="0">
-              <a:buNone/>
-            </a:pPr>
             <a:r>
               <a:rPr lang="en-US" sz="1800" dirty="0">
                 <a:solidFill>
@@ -14131,7 +14105,7 @@
             <a:endParaRPr lang="en-US" sz="1800" dirty="0"/>
           </a:p>
           <a:p>
-            <a:pPr indent="0" marL="0">
+            <a:pPr marL="0" indent="0">
               <a:buNone/>
             </a:pPr>
             <a:endParaRPr lang="en-US" sz="1800" dirty="0"/>
@@ -14173,13 +14147,13 @@
             <a:endParaRPr lang="en-US" sz="1800" dirty="0"/>
           </a:p>
           <a:p>
-            <a:pPr indent="0" marL="0">
+            <a:pPr marL="0" indent="0">
               <a:buNone/>
             </a:pPr>
             <a:endParaRPr lang="en-US" sz="1800" dirty="0"/>
           </a:p>
           <a:p>
-            <a:pPr indent="0" marL="0">
+            <a:pPr marL="0" indent="0">
               <a:buNone/>
             </a:pPr>
             <a:r>
@@ -14213,6 +14187,7 @@
         <a:solidFill>
           <a:srgbClr val="1E1E1E"/>
         </a:solidFill>
+        <a:effectLst/>
       </p:bgPr>
     </p:bg>
     <p:spTree>
@@ -14250,7 +14225,7 @@
           <a:bodyPr wrap="square" rtlCol="0" anchor="ctr"/>
           <a:lstStyle/>
           <a:p>
-            <a:pPr indent="0" marL="0">
+            <a:pPr marL="0" indent="0">
               <a:buNone/>
             </a:pPr>
             <a:r>
@@ -14287,6 +14262,13 @@
           </a:solidFill>
           <a:ln/>
         </p:spPr>
+        <p:txBody>
+          <a:bodyPr/>
+          <a:lstStyle/>
+          <a:p>
+            <a:endParaRPr lang="en-US"/>
+          </a:p>
+        </p:txBody>
       </p:sp>
       <p:sp>
         <p:nvSpPr>
@@ -14309,7 +14291,7 @@
           <a:bodyPr wrap="square" rtlCol="0" anchor="ctr"/>
           <a:lstStyle/>
           <a:p>
-            <a:pPr indent="0" marL="0">
+            <a:pPr marL="0" indent="0">
               <a:buNone/>
             </a:pPr>
             <a:r>
@@ -14343,6 +14325,7 @@
         <a:solidFill>
           <a:srgbClr val="F5F5F5"/>
         </a:solidFill>
+        <a:effectLst/>
       </p:bgPr>
     </p:bg>
     <p:spTree>
@@ -14380,7 +14363,7 @@
           <a:bodyPr wrap="square" lIns="0" tIns="0" rIns="0" bIns="0" rtlCol="0" anchor="ctr"/>
           <a:lstStyle/>
           <a:p>
-            <a:pPr indent="0" marL="0">
+            <a:pPr marL="0" indent="0">
               <a:buNone/>
             </a:pPr>
             <a:r>
@@ -14417,6 +14400,13 @@
           </a:solidFill>
           <a:ln/>
         </p:spPr>
+        <p:txBody>
+          <a:bodyPr/>
+          <a:lstStyle/>
+          <a:p>
+            <a:endParaRPr lang="en-US"/>
+          </a:p>
+        </p:txBody>
       </p:sp>
       <p:sp>
         <p:nvSpPr>
@@ -14437,6 +14427,13 @@
           </a:solidFill>
           <a:ln/>
         </p:spPr>
+        <p:txBody>
+          <a:bodyPr/>
+          <a:lstStyle/>
+          <a:p>
+            <a:endParaRPr lang="en-US"/>
+          </a:p>
+        </p:txBody>
       </p:sp>
       <p:sp>
         <p:nvSpPr>
@@ -14459,7 +14456,7 @@
           <a:bodyPr wrap="square" rtlCol="0" anchor="t"/>
           <a:lstStyle/>
           <a:p>
-            <a:pPr indent="0" marL="0">
+            <a:pPr marL="0" indent="0">
               <a:buNone/>
             </a:pPr>
             <a:r>
@@ -14476,7 +14473,7 @@
             <a:endParaRPr lang="en-US" sz="1000" dirty="0"/>
           </a:p>
           <a:p>
-            <a:pPr indent="0" marL="0">
+            <a:pPr marL="0" indent="0">
               <a:buNone/>
             </a:pPr>
             <a:r>
@@ -14493,7 +14490,7 @@
             <a:endParaRPr lang="en-US" sz="1000" dirty="0"/>
           </a:p>
           <a:p>
-            <a:pPr indent="0" marL="0">
+            <a:pPr marL="0" indent="0">
               <a:buNone/>
             </a:pPr>
             <a:r>
@@ -14507,9 +14504,6 @@
               </a:rPr>
               <a:t>        ctx.socket.close();  </a:t>
             </a:r>
-            <a:pPr indent="0" marL="0">
-              <a:buNone/>
-            </a:pPr>
             <a:r>
               <a:rPr lang="en-US" sz="1000" dirty="0">
                 <a:solidFill>
@@ -14524,7 +14518,7 @@
             <a:endParaRPr lang="en-US" sz="1000" dirty="0"/>
           </a:p>
           <a:p>
-            <a:pPr indent="0" marL="0">
+            <a:pPr marL="0" indent="0">
               <a:buNone/>
             </a:pPr>
             <a:r>
@@ -14541,7 +14535,7 @@
             <a:endParaRPr lang="en-US" sz="1000" dirty="0"/>
           </a:p>
           <a:p>
-            <a:pPr indent="0" marL="0">
+            <a:pPr marL="0" indent="0">
               <a:buNone/>
             </a:pPr>
             <a:r>
@@ -14558,7 +14552,7 @@
             <a:endParaRPr lang="en-US" sz="1000" dirty="0"/>
           </a:p>
           <a:p>
-            <a:pPr indent="0" marL="0">
+            <a:pPr marL="0" indent="0">
               <a:buNone/>
             </a:pPr>
             <a:r>
@@ -14575,13 +14569,13 @@
             <a:endParaRPr lang="en-US" sz="1000" dirty="0"/>
           </a:p>
           <a:p>
-            <a:pPr indent="0" marL="0">
+            <a:pPr marL="0" indent="0">
               <a:buNone/>
             </a:pPr>
             <a:endParaRPr lang="en-US" sz="1000" dirty="0"/>
           </a:p>
           <a:p>
-            <a:pPr indent="0" marL="0">
+            <a:pPr marL="0" indent="0">
               <a:buNone/>
             </a:pPr>
             <a:r>
@@ -14598,7 +14592,7 @@
             <a:endParaRPr lang="en-US" sz="1000" dirty="0"/>
           </a:p>
           <a:p>
-            <a:pPr indent="0" marL="0">
+            <a:pPr marL="0" indent="0">
               <a:buNone/>
             </a:pPr>
             <a:r>
@@ -14615,7 +14609,7 @@
             <a:endParaRPr lang="en-US" sz="1000" dirty="0"/>
           </a:p>
           <a:p>
-            <a:pPr indent="0" marL="0">
+            <a:pPr marL="0" indent="0">
               <a:buNone/>
             </a:pPr>
             <a:r>
@@ -14629,9 +14623,6 @@
               </a:rPr>
               <a:t>        ctx.socket.cancel();  </a:t>
             </a:r>
-            <a:pPr indent="0" marL="0">
-              <a:buNone/>
-            </a:pPr>
             <a:r>
               <a:rPr lang="en-US" sz="1000" dirty="0">
                 <a:solidFill>
@@ -14646,7 +14637,7 @@
             <a:endParaRPr lang="en-US" sz="1000" dirty="0"/>
           </a:p>
           <a:p>
-            <a:pPr indent="0" marL="0">
+            <a:pPr marL="0" indent="0">
               <a:buNone/>
             </a:pPr>
             <a:r>
@@ -14663,7 +14654,7 @@
             <a:endParaRPr lang="en-US" sz="1000" dirty="0"/>
           </a:p>
           <a:p>
-            <a:pPr indent="0" marL="0">
+            <a:pPr marL="0" indent="0">
               <a:buNone/>
             </a:pPr>
             <a:r>
@@ -14680,7 +14671,7 @@
             <a:endParaRPr lang="en-US" sz="1000" dirty="0"/>
           </a:p>
           <a:p>
-            <a:pPr indent="0" marL="0">
+            <a:pPr marL="0" indent="0">
               <a:buNone/>
             </a:pPr>
             <a:r>
@@ -14697,7 +14688,7 @@
             <a:endParaRPr lang="en-US" sz="1000" dirty="0"/>
           </a:p>
           <a:p>
-            <a:pPr indent="0" marL="0">
+            <a:pPr marL="0" indent="0">
               <a:buNone/>
             </a:pPr>
             <a:r>
@@ -14714,13 +14705,13 @@
             <a:endParaRPr lang="en-US" sz="1000" dirty="0"/>
           </a:p>
           <a:p>
-            <a:pPr indent="0" marL="0">
+            <a:pPr marL="0" indent="0">
               <a:buNone/>
             </a:pPr>
             <a:endParaRPr lang="en-US" sz="1000" dirty="0"/>
           </a:p>
           <a:p>
-            <a:pPr indent="0" marL="0">
+            <a:pPr marL="0" indent="0">
               <a:buNone/>
             </a:pPr>
             <a:r>
@@ -14737,7 +14728,7 @@
             <a:endParaRPr lang="en-US" sz="1000" dirty="0"/>
           </a:p>
           <a:p>
-            <a:pPr indent="0" marL="0">
+            <a:pPr marL="0" indent="0">
               <a:buNone/>
             </a:pPr>
             <a:r>
@@ -14754,7 +14745,7 @@
             <a:endParaRPr lang="en-US" sz="1000" dirty="0"/>
           </a:p>
           <a:p>
-            <a:pPr indent="0" marL="0">
+            <a:pPr marL="0" indent="0">
               <a:buNone/>
             </a:pPr>
             <a:r>
@@ -14788,6 +14779,7 @@
         <a:solidFill>
           <a:srgbClr val="F5F5F5"/>
         </a:solidFill>
+        <a:effectLst/>
       </p:bgPr>
     </p:bg>
     <p:spTree>
@@ -14825,7 +14817,7 @@
           <a:bodyPr wrap="square" lIns="0" tIns="0" rIns="0" bIns="0" rtlCol="0" anchor="ctr"/>
           <a:lstStyle/>
           <a:p>
-            <a:pPr indent="0" marL="0">
+            <a:pPr marL="0" indent="0">
               <a:buNone/>
             </a:pPr>
             <a:r>
@@ -14862,6 +14854,13 @@
           </a:solidFill>
           <a:ln/>
         </p:spPr>
+        <p:txBody>
+          <a:bodyPr/>
+          <a:lstStyle/>
+          <a:p>
+            <a:endParaRPr lang="en-US"/>
+          </a:p>
+        </p:txBody>
       </p:sp>
       <p:sp>
         <p:nvSpPr>
@@ -14882,6 +14881,13 @@
           </a:solidFill>
           <a:ln/>
         </p:spPr>
+        <p:txBody>
+          <a:bodyPr/>
+          <a:lstStyle/>
+          <a:p>
+            <a:endParaRPr lang="en-US"/>
+          </a:p>
+        </p:txBody>
       </p:sp>
       <p:sp>
         <p:nvSpPr>
@@ -14904,7 +14910,7 @@
           <a:bodyPr wrap="square" rtlCol="0" anchor="t"/>
           <a:lstStyle/>
           <a:p>
-            <a:pPr indent="0" marL="0">
+            <a:pPr marL="0" indent="0">
               <a:buNone/>
             </a:pPr>
             <a:r>
@@ -14921,7 +14927,7 @@
             <a:endParaRPr lang="en-US" sz="1000" dirty="0"/>
           </a:p>
           <a:p>
-            <a:pPr indent="0" marL="0">
+            <a:pPr marL="0" indent="0">
               <a:buNone/>
             </a:pPr>
             <a:r>
@@ -14938,7 +14944,7 @@
             <a:endParaRPr lang="en-US" sz="1000" dirty="0"/>
           </a:p>
           <a:p>
-            <a:pPr indent="0" marL="0">
+            <a:pPr marL="0" indent="0">
               <a:buNone/>
             </a:pPr>
             <a:r>
@@ -14955,7 +14961,7 @@
             <a:endParaRPr lang="en-US" sz="1000" dirty="0"/>
           </a:p>
           <a:p>
-            <a:pPr indent="0" marL="0">
+            <a:pPr marL="0" indent="0">
               <a:buNone/>
             </a:pPr>
             <a:r>
@@ -14972,7 +14978,7 @@
             <a:endParaRPr lang="en-US" sz="1000" dirty="0"/>
           </a:p>
           <a:p>
-            <a:pPr indent="0" marL="0">
+            <a:pPr marL="0" indent="0">
               <a:buNone/>
             </a:pPr>
             <a:r>
@@ -14989,7 +14995,7 @@
             <a:endParaRPr lang="en-US" sz="1000" dirty="0"/>
           </a:p>
           <a:p>
-            <a:pPr indent="0" marL="0">
+            <a:pPr marL="0" indent="0">
               <a:buNone/>
             </a:pPr>
             <a:r>
@@ -15006,7 +15012,7 @@
             <a:endParaRPr lang="en-US" sz="1000" dirty="0"/>
           </a:p>
           <a:p>
-            <a:pPr indent="0" marL="0">
+            <a:pPr marL="0" indent="0">
               <a:buNone/>
             </a:pPr>
             <a:r>
@@ -15023,7 +15029,7 @@
             <a:endParaRPr lang="en-US" sz="1000" dirty="0"/>
           </a:p>
           <a:p>
-            <a:pPr indent="0" marL="0">
+            <a:pPr marL="0" indent="0">
               <a:buNone/>
             </a:pPr>
             <a:r>
@@ -15040,7 +15046,7 @@
             <a:endParaRPr lang="en-US" sz="1000" dirty="0"/>
           </a:p>
           <a:p>
-            <a:pPr indent="0" marL="0">
+            <a:pPr marL="0" indent="0">
               <a:buNone/>
             </a:pPr>
             <a:r>
@@ -15057,7 +15063,7 @@
             <a:endParaRPr lang="en-US" sz="1000" dirty="0"/>
           </a:p>
           <a:p>
-            <a:pPr indent="0" marL="0">
+            <a:pPr marL="0" indent="0">
               <a:buNone/>
             </a:pPr>
             <a:r>
@@ -15074,7 +15080,7 @@
             <a:endParaRPr lang="en-US" sz="1000" dirty="0"/>
           </a:p>
           <a:p>
-            <a:pPr indent="0" marL="0">
+            <a:pPr marL="0" indent="0">
               <a:buNone/>
             </a:pPr>
             <a:r>
@@ -15091,7 +15097,7 @@
             <a:endParaRPr lang="en-US" sz="1000" dirty="0"/>
           </a:p>
           <a:p>
-            <a:pPr indent="0" marL="0">
+            <a:pPr marL="0" indent="0">
               <a:buNone/>
             </a:pPr>
             <a:r>
@@ -15108,7 +15114,7 @@
             <a:endParaRPr lang="en-US" sz="1000" dirty="0"/>
           </a:p>
           <a:p>
-            <a:pPr indent="0" marL="0">
+            <a:pPr marL="0" indent="0">
               <a:buNone/>
             </a:pPr>
             <a:r>
@@ -15125,7 +15131,7 @@
             <a:endParaRPr lang="en-US" sz="1000" dirty="0"/>
           </a:p>
           <a:p>
-            <a:pPr indent="0" marL="0">
+            <a:pPr marL="0" indent="0">
               <a:buNone/>
             </a:pPr>
             <a:r>
@@ -15142,7 +15148,7 @@
             <a:endParaRPr lang="en-US" sz="1000" dirty="0"/>
           </a:p>
           <a:p>
-            <a:pPr indent="0" marL="0">
+            <a:pPr marL="0" indent="0">
               <a:buNone/>
             </a:pPr>
             <a:r>
@@ -15181,7 +15187,7 @@
           <a:bodyPr wrap="square" rtlCol="0" anchor="ctr"/>
           <a:lstStyle/>
           <a:p>
-            <a:pPr indent="0" marL="0">
+            <a:pPr marL="0" indent="0">
               <a:buNone/>
             </a:pPr>
             <a:r>
@@ -15220,7 +15226,7 @@
           <a:bodyPr wrap="square" rtlCol="0" anchor="ctr"/>
           <a:lstStyle/>
           <a:p>
-            <a:pPr indent="0" marL="0">
+            <a:pPr marL="0" indent="0">
               <a:buNone/>
             </a:pPr>
             <a:r>
@@ -15234,9 +15240,6 @@
               </a:rPr>
               <a:t>✓ </a:t>
             </a:r>
-            <a:pPr indent="0" marL="0">
-              <a:buNone/>
-            </a:pPr>
             <a:r>
               <a:rPr lang="en-US" sz="1200" dirty="0">
                 <a:solidFill>
@@ -15248,9 +15251,6 @@
               </a:rPr>
               <a:t>disconnect during Connecting → properly cancels</a:t>
             </a:r>
-            <a:pPr indent="0" marL="0">
-              <a:buNone/>
-            </a:pPr>
             <a:r>
               <a:rPr lang="en-US" sz="1200" dirty="0">
                 <a:solidFill>
@@ -15262,9 +15262,6 @@
               </a:rPr>
               <a:t>   ✓ </a:t>
             </a:r>
-            <a:pPr indent="0" marL="0">
-              <a:buNone/>
-            </a:pPr>
             <a:r>
               <a:rPr lang="en-US" sz="1200" dirty="0">
                 <a:solidFill>
@@ -15279,7 +15276,7 @@
             <a:endParaRPr lang="en-US" sz="1200" dirty="0"/>
           </a:p>
           <a:p>
-            <a:pPr indent="0" marL="0">
+            <a:pPr marL="0" indent="0">
               <a:buNone/>
             </a:pPr>
             <a:r>
@@ -15293,9 +15290,6 @@
               </a:rPr>
               <a:t>✓ </a:t>
             </a:r>
-            <a:pPr indent="0" marL="0">
-              <a:buNone/>
-            </a:pPr>
             <a:r>
               <a:rPr lang="en-US" sz="1200" dirty="0">
                 <a:solidFill>
@@ -15307,9 +15301,6 @@
               </a:rPr>
               <a:t>Entry/exit actions → guaranteed to run</a:t>
             </a:r>
-            <a:pPr indent="0" marL="0">
-              <a:buNone/>
-            </a:pPr>
             <a:r>
               <a:rPr lang="en-US" sz="1200" dirty="0">
                 <a:solidFill>
@@ -15321,9 +15312,6 @@
               </a:rPr>
               <a:t>   ✓ </a:t>
             </a:r>
-            <a:pPr indent="0" marL="0">
-              <a:buNone/>
-            </a:pPr>
             <a:r>
               <a:rPr lang="en-US" sz="1200" dirty="0">
                 <a:solidFill>
@@ -15338,7 +15326,7 @@
             <a:endParaRPr lang="en-US" sz="1200" dirty="0"/>
           </a:p>
           <a:p>
-            <a:pPr indent="0" marL="0">
+            <a:pPr marL="0" indent="0">
               <a:buNone/>
             </a:pPr>
             <a:r>
@@ -15352,9 +15340,6 @@
               </a:rPr>
               <a:t>✓ </a:t>
             </a:r>
-            <a:pPr indent="0" marL="0">
-              <a:buNone/>
-            </a:pPr>
             <a:r>
               <a:rPr lang="en-US" sz="1200" dirty="0">
                 <a:solidFill>
@@ -15386,6 +15371,7 @@
         <a:solidFill>
           <a:srgbClr val="1E1E1E"/>
         </a:solidFill>
+        <a:effectLst/>
       </p:bgPr>
     </p:bg>
     <p:spTree>
@@ -15423,7 +15409,7 @@
           <a:bodyPr wrap="square" rtlCol="0" anchor="ctr"/>
           <a:lstStyle/>
           <a:p>
-            <a:pPr indent="0" marL="0">
+            <a:pPr marL="0" indent="0">
               <a:buNone/>
             </a:pPr>
             <a:r>
@@ -15460,6 +15446,13 @@
           </a:solidFill>
           <a:ln/>
         </p:spPr>
+        <p:txBody>
+          <a:bodyPr/>
+          <a:lstStyle/>
+          <a:p>
+            <a:endParaRPr lang="en-US"/>
+          </a:p>
+        </p:txBody>
       </p:sp>
       <p:sp>
         <p:nvSpPr>
@@ -15482,7 +15475,7 @@
           <a:bodyPr wrap="square" rtlCol="0" anchor="ctr"/>
           <a:lstStyle/>
           <a:p>
-            <a:pPr indent="0" marL="0">
+            <a:pPr marL="0" indent="0">
               <a:buNone/>
             </a:pPr>
             <a:r>
@@ -15516,6 +15509,7 @@
         <a:solidFill>
           <a:srgbClr val="F5F5F5"/>
         </a:solidFill>
+        <a:effectLst/>
       </p:bgPr>
     </p:bg>
     <p:spTree>
@@ -15553,7 +15547,7 @@
           <a:bodyPr wrap="square" lIns="0" tIns="0" rIns="0" bIns="0" rtlCol="0" anchor="ctr"/>
           <a:lstStyle/>
           <a:p>
-            <a:pPr indent="0" marL="0">
+            <a:pPr marL="0" indent="0">
               <a:buNone/>
             </a:pPr>
             <a:r>
@@ -15590,6 +15584,13 @@
           </a:solidFill>
           <a:ln/>
         </p:spPr>
+        <p:txBody>
+          <a:bodyPr/>
+          <a:lstStyle/>
+          <a:p>
+            <a:endParaRPr lang="en-US"/>
+          </a:p>
+        </p:txBody>
       </p:sp>
       <p:sp>
         <p:nvSpPr>
@@ -15612,7 +15613,7 @@
           <a:bodyPr wrap="square" rtlCol="0" anchor="ctr"/>
           <a:lstStyle/>
           <a:p>
-            <a:pPr indent="0" marL="0">
+            <a:pPr marL="0" indent="0">
               <a:buNone/>
             </a:pPr>
             <a:r>
@@ -15649,6 +15650,13 @@
           </a:solidFill>
           <a:ln/>
         </p:spPr>
+        <p:txBody>
+          <a:bodyPr/>
+          <a:lstStyle/>
+          <a:p>
+            <a:endParaRPr lang="en-US"/>
+          </a:p>
+        </p:txBody>
       </p:sp>
       <p:sp>
         <p:nvSpPr>
@@ -15671,7 +15679,7 @@
           <a:bodyPr wrap="square" rtlCol="0" anchor="t"/>
           <a:lstStyle/>
           <a:p>
-            <a:pPr indent="0" marL="0">
+            <a:pPr marL="0" indent="0">
               <a:buNone/>
             </a:pPr>
             <a:r>
@@ -15688,7 +15696,7 @@
             <a:endParaRPr lang="en-US" sz="900" dirty="0"/>
           </a:p>
           <a:p>
-            <a:pPr indent="0" marL="0">
+            <a:pPr marL="0" indent="0">
               <a:buNone/>
             </a:pPr>
             <a:r>
@@ -15702,9 +15710,6 @@
               </a:rPr>
               <a:t>    uint64_t connect_generation = 0;  </a:t>
             </a:r>
-            <a:pPr indent="0" marL="0">
-              <a:buNone/>
-            </a:pPr>
             <a:r>
               <a:rPr lang="en-US" sz="900" dirty="0">
                 <a:solidFill>
@@ -15719,7 +15724,7 @@
             <a:endParaRPr lang="en-US" sz="900" dirty="0"/>
           </a:p>
           <a:p>
-            <a:pPr indent="0" marL="0">
+            <a:pPr marL="0" indent="0">
               <a:buNone/>
             </a:pPr>
             <a:r>
@@ -15733,9 +15738,6 @@
               </a:rPr>
               <a:t>    std::function&lt;void()&gt; on_connect_success;  </a:t>
             </a:r>
-            <a:pPr indent="0" marL="0">
-              <a:buNone/>
-            </a:pPr>
             <a:r>
               <a:rPr lang="en-US" sz="900" dirty="0">
                 <a:solidFill>
@@ -15750,7 +15752,7 @@
             <a:endParaRPr lang="en-US" sz="900" dirty="0"/>
           </a:p>
           <a:p>
-            <a:pPr indent="0" marL="0">
+            <a:pPr marL="0" indent="0">
               <a:buNone/>
             </a:pPr>
             <a:r>
@@ -15767,13 +15769,13 @@
             <a:endParaRPr lang="en-US" sz="900" dirty="0"/>
           </a:p>
           <a:p>
-            <a:pPr indent="0" marL="0">
+            <a:pPr marL="0" indent="0">
               <a:buNone/>
             </a:pPr>
             <a:endParaRPr lang="en-US" sz="900" dirty="0"/>
           </a:p>
           <a:p>
-            <a:pPr indent="0" marL="0">
+            <a:pPr marL="0" indent="0">
               <a:buNone/>
             </a:pPr>
             <a:r>
@@ -15790,7 +15792,7 @@
             <a:endParaRPr lang="en-US" sz="900" dirty="0"/>
           </a:p>
           <a:p>
-            <a:pPr indent="0" marL="0">
+            <a:pPr marL="0" indent="0">
               <a:buNone/>
             </a:pPr>
             <a:r>
@@ -15807,7 +15809,7 @@
             <a:endParaRPr lang="en-US" sz="900" dirty="0"/>
           </a:p>
           <a:p>
-            <a:pPr indent="0" marL="0">
+            <a:pPr marL="0" indent="0">
               <a:buNone/>
             </a:pPr>
             <a:r>
@@ -15824,7 +15826,7 @@
             <a:endParaRPr lang="en-US" sz="900" dirty="0"/>
           </a:p>
           <a:p>
-            <a:pPr indent="0" marL="0">
+            <a:pPr marL="0" indent="0">
               <a:buNone/>
             </a:pPr>
             <a:r>
@@ -15841,7 +15843,7 @@
             <a:endParaRPr lang="en-US" sz="900" dirty="0"/>
           </a:p>
           <a:p>
-            <a:pPr indent="0" marL="0">
+            <a:pPr marL="0" indent="0">
               <a:buNone/>
             </a:pPr>
             <a:r>
@@ -15858,7 +15860,7 @@
             <a:endParaRPr lang="en-US" sz="900" dirty="0"/>
           </a:p>
           <a:p>
-            <a:pPr indent="0" marL="0">
+            <a:pPr marL="0" indent="0">
               <a:buNone/>
             </a:pPr>
             <a:r>
@@ -15872,9 +15874,6 @@
               </a:rPr>
               <a:t>            if (my_gen != ctx.connect_generation) return;  </a:t>
             </a:r>
-            <a:pPr indent="0" marL="0">
-              <a:buNone/>
-            </a:pPr>
             <a:r>
               <a:rPr lang="en-US" sz="900" dirty="0">
                 <a:solidFill>
@@ -15889,7 +15888,7 @@
             <a:endParaRPr lang="en-US" sz="900" dirty="0"/>
           </a:p>
           <a:p>
-            <a:pPr indent="0" marL="0">
+            <a:pPr marL="0" indent="0">
               <a:buNone/>
             </a:pPr>
             <a:r>
@@ -15906,7 +15905,7 @@
             <a:endParaRPr lang="en-US" sz="900" dirty="0"/>
           </a:p>
           <a:p>
-            <a:pPr indent="0" marL="0">
+            <a:pPr marL="0" indent="0">
               <a:buNone/>
             </a:pPr>
             <a:r>
@@ -15923,7 +15922,7 @@
             <a:endParaRPr lang="en-US" sz="900" dirty="0"/>
           </a:p>
           <a:p>
-            <a:pPr indent="0" marL="0">
+            <a:pPr marL="0" indent="0">
               <a:buNone/>
             </a:pPr>
             <a:r>
@@ -15940,7 +15939,7 @@
             <a:endParaRPr lang="en-US" sz="900" dirty="0"/>
           </a:p>
           <a:p>
-            <a:pPr indent="0" marL="0">
+            <a:pPr marL="0" indent="0">
               <a:buNone/>
             </a:pPr>
             <a:r>
@@ -15957,7 +15956,7 @@
             <a:endParaRPr lang="en-US" sz="900" dirty="0"/>
           </a:p>
           <a:p>
-            <a:pPr indent="0" marL="0">
+            <a:pPr marL="0" indent="0">
               <a:buNone/>
             </a:pPr>
             <a:r>
@@ -15998,10 +15997,34 @@
             <a:tbl>
               <a:tblPr/>
               <a:tblGrid>
-                <a:gridCol w="2148840"/>
-                <a:gridCol w="2148840"/>
-                <a:gridCol w="2148840"/>
-                <a:gridCol w="2148840"/>
+                <a:gridCol w="2148840">
+                  <a:extLst>
+                    <a:ext uri="{9D8B030D-6E8A-4147-A177-3AD203B41FA5}">
+                      <a16:colId xmlns:a16="http://schemas.microsoft.com/office/drawing/2014/main" val="20000"/>
+                    </a:ext>
+                  </a:extLst>
+                </a:gridCol>
+                <a:gridCol w="2148840">
+                  <a:extLst>
+                    <a:ext uri="{9D8B030D-6E8A-4147-A177-3AD203B41FA5}">
+                      <a16:colId xmlns:a16="http://schemas.microsoft.com/office/drawing/2014/main" val="20001"/>
+                    </a:ext>
+                  </a:extLst>
+                </a:gridCol>
+                <a:gridCol w="2148840">
+                  <a:extLst>
+                    <a:ext uri="{9D8B030D-6E8A-4147-A177-3AD203B41FA5}">
+                      <a16:colId xmlns:a16="http://schemas.microsoft.com/office/drawing/2014/main" val="20002"/>
+                    </a:ext>
+                  </a:extLst>
+                </a:gridCol>
+                <a:gridCol w="2148840">
+                  <a:extLst>
+                    <a:ext uri="{9D8B030D-6E8A-4147-A177-3AD203B41FA5}">
+                      <a16:colId xmlns:a16="http://schemas.microsoft.com/office/drawing/2014/main" val="20003"/>
+                    </a:ext>
+                  </a:extLst>
+                </a:gridCol>
               </a:tblGrid>
               <a:tr h="274320">
                 <a:tc>
@@ -16009,7 +16032,7 @@
                     <a:bodyPr/>
                     <a:lstStyle/>
                     <a:p>
-                      <a:pPr algn="ctr" indent="0" marL="0">
+                      <a:pPr marL="0" indent="0" algn="ctr">
                         <a:buNone/>
                       </a:pPr>
                       <a:r>
@@ -16030,7 +16053,7 @@
                       </a:endParaRPr>
                     </a:p>
                   </a:txBody>
-                  <a:tcPr marL="91440" marR="91440" marT="45720" marB="45720" anchor="ctr">
+                  <a:tcPr anchor="ctr">
                     <a:lnL w="6350" cap="flat" cmpd="sng" algn="ctr">
                       <a:solidFill>
                         <a:srgbClr val="D1D5DB"/>
@@ -16077,7 +16100,7 @@
                     <a:bodyPr/>
                     <a:lstStyle/>
                     <a:p>
-                      <a:pPr algn="ctr" indent="0" marL="0">
+                      <a:pPr marL="0" indent="0" algn="ctr">
                         <a:buNone/>
                       </a:pPr>
                       <a:r>
@@ -16098,7 +16121,7 @@
                       </a:endParaRPr>
                     </a:p>
                   </a:txBody>
-                  <a:tcPr marL="91440" marR="91440" marT="45720" marB="45720" anchor="ctr">
+                  <a:tcPr anchor="ctr">
                     <a:lnL w="6350" cap="flat" cmpd="sng" algn="ctr">
                       <a:solidFill>
                         <a:srgbClr val="D1D5DB"/>
@@ -16145,7 +16168,7 @@
                     <a:bodyPr/>
                     <a:lstStyle/>
                     <a:p>
-                      <a:pPr algn="ctr" indent="0" marL="0">
+                      <a:pPr marL="0" indent="0" algn="ctr">
                         <a:buNone/>
                       </a:pPr>
                       <a:r>
@@ -16166,7 +16189,7 @@
                       </a:endParaRPr>
                     </a:p>
                   </a:txBody>
-                  <a:tcPr marL="91440" marR="91440" marT="45720" marB="45720" anchor="ctr">
+                  <a:tcPr anchor="ctr">
                     <a:lnL w="6350" cap="flat" cmpd="sng" algn="ctr">
                       <a:solidFill>
                         <a:srgbClr val="D1D5DB"/>
@@ -16213,7 +16236,7 @@
                     <a:bodyPr/>
                     <a:lstStyle/>
                     <a:p>
-                      <a:pPr algn="ctr" indent="0" marL="0">
+                      <a:pPr marL="0" indent="0" algn="ctr">
                         <a:buNone/>
                       </a:pPr>
                       <a:r>
@@ -16234,7 +16257,7 @@
                       </a:endParaRPr>
                     </a:p>
                   </a:txBody>
-                  <a:tcPr marL="91440" marR="91440" marT="45720" marB="45720" anchor="ctr">
+                  <a:tcPr anchor="ctr">
                     <a:lnL w="6350" cap="flat" cmpd="sng" algn="ctr">
                       <a:solidFill>
                         <a:srgbClr val="D1D5DB"/>
@@ -16276,6 +16299,11 @@
                     </a:solidFill>
                   </a:tcPr>
                 </a:tc>
+                <a:extLst>
+                  <a:ext uri="{0D108BD9-81ED-4DB2-BD59-A6C34878D82A}">
+                    <a16:rowId xmlns:a16="http://schemas.microsoft.com/office/drawing/2014/main" val="10000"/>
+                  </a:ext>
+                </a:extLst>
               </a:tr>
               <a:tr h="274320">
                 <a:tc>
@@ -16283,7 +16311,7 @@
                     <a:bodyPr/>
                     <a:lstStyle/>
                     <a:p>
-                      <a:pPr algn="ctr" indent="0" marL="0">
+                      <a:pPr marL="0" indent="0" algn="ctr">
                         <a:buNone/>
                       </a:pPr>
                       <a:r>
@@ -16304,7 +16332,7 @@
                       </a:endParaRPr>
                     </a:p>
                   </a:txBody>
-                  <a:tcPr marL="91440" marR="91440" marT="45720" marB="45720" anchor="ctr">
+                  <a:tcPr anchor="ctr">
                     <a:lnL w="6350" cap="flat" cmpd="sng" algn="ctr">
                       <a:solidFill>
                         <a:srgbClr val="D1D5DB"/>
@@ -16351,7 +16379,7 @@
                     <a:bodyPr/>
                     <a:lstStyle/>
                     <a:p>
-                      <a:pPr algn="ctr" indent="0" marL="0">
+                      <a:pPr marL="0" indent="0" algn="ctr">
                         <a:buNone/>
                       </a:pPr>
                       <a:r>
@@ -16372,7 +16400,7 @@
                       </a:endParaRPr>
                     </a:p>
                   </a:txBody>
-                  <a:tcPr marL="91440" marR="91440" marT="45720" marB="45720" anchor="ctr">
+                  <a:tcPr anchor="ctr">
                     <a:lnL w="6350" cap="flat" cmpd="sng" algn="ctr">
                       <a:solidFill>
                         <a:srgbClr val="D1D5DB"/>
@@ -16419,7 +16447,7 @@
                     <a:bodyPr/>
                     <a:lstStyle/>
                     <a:p>
-                      <a:pPr algn="ctr" indent="0" marL="0">
+                      <a:pPr marL="0" indent="0" algn="ctr">
                         <a:buNone/>
                       </a:pPr>
                       <a:r>
@@ -16440,7 +16468,7 @@
                       </a:endParaRPr>
                     </a:p>
                   </a:txBody>
-                  <a:tcPr marL="91440" marR="91440" marT="45720" marB="45720" anchor="ctr">
+                  <a:tcPr anchor="ctr">
                     <a:lnL w="6350" cap="flat" cmpd="sng" algn="ctr">
                       <a:solidFill>
                         <a:srgbClr val="D1D5DB"/>
@@ -16487,7 +16515,7 @@
                     <a:bodyPr/>
                     <a:lstStyle/>
                     <a:p>
-                      <a:pPr algn="ctr" indent="0" marL="0">
+                      <a:pPr marL="0" indent="0" algn="ctr">
                         <a:buNone/>
                       </a:pPr>
                       <a:r>
@@ -16508,7 +16536,7 @@
                       </a:endParaRPr>
                     </a:p>
                   </a:txBody>
-                  <a:tcPr marL="91440" marR="91440" marT="45720" marB="45720" anchor="ctr">
+                  <a:tcPr anchor="ctr">
                     <a:lnL w="6350" cap="flat" cmpd="sng" algn="ctr">
                       <a:solidFill>
                         <a:srgbClr val="D1D5DB"/>
@@ -16550,6 +16578,11 @@
                     </a:solidFill>
                   </a:tcPr>
                 </a:tc>
+                <a:extLst>
+                  <a:ext uri="{0D108BD9-81ED-4DB2-BD59-A6C34878D82A}">
+                    <a16:rowId xmlns:a16="http://schemas.microsoft.com/office/drawing/2014/main" val="10001"/>
+                  </a:ext>
+                </a:extLst>
               </a:tr>
               <a:tr h="274320">
                 <a:tc>
@@ -16557,7 +16590,7 @@
                     <a:bodyPr/>
                     <a:lstStyle/>
                     <a:p>
-                      <a:pPr algn="ctr" indent="0" marL="0">
+                      <a:pPr marL="0" indent="0" algn="ctr">
                         <a:buNone/>
                       </a:pPr>
                       <a:r>
@@ -16578,7 +16611,7 @@
                       </a:endParaRPr>
                     </a:p>
                   </a:txBody>
-                  <a:tcPr marL="91440" marR="91440" marT="45720" marB="45720" anchor="ctr">
+                  <a:tcPr anchor="ctr">
                     <a:lnL w="6350" cap="flat" cmpd="sng" algn="ctr">
                       <a:solidFill>
                         <a:srgbClr val="D1D5DB"/>
@@ -16625,7 +16658,7 @@
                     <a:bodyPr/>
                     <a:lstStyle/>
                     <a:p>
-                      <a:pPr algn="ctr" indent="0" marL="0">
+                      <a:pPr marL="0" indent="0" algn="ctr">
                         <a:buNone/>
                       </a:pPr>
                       <a:r>
@@ -16646,7 +16679,7 @@
                       </a:endParaRPr>
                     </a:p>
                   </a:txBody>
-                  <a:tcPr marL="91440" marR="91440" marT="45720" marB="45720" anchor="ctr">
+                  <a:tcPr anchor="ctr">
                     <a:lnL w="6350" cap="flat" cmpd="sng" algn="ctr">
                       <a:solidFill>
                         <a:srgbClr val="D1D5DB"/>
@@ -16693,7 +16726,7 @@
                     <a:bodyPr/>
                     <a:lstStyle/>
                     <a:p>
-                      <a:pPr algn="ctr" indent="0" marL="0">
+                      <a:pPr marL="0" indent="0" algn="ctr">
                         <a:buNone/>
                       </a:pPr>
                       <a:r>
@@ -16714,7 +16747,7 @@
                       </a:endParaRPr>
                     </a:p>
                   </a:txBody>
-                  <a:tcPr marL="91440" marR="91440" marT="45720" marB="45720" anchor="ctr">
+                  <a:tcPr anchor="ctr">
                     <a:lnL w="6350" cap="flat" cmpd="sng" algn="ctr">
                       <a:solidFill>
                         <a:srgbClr val="D1D5DB"/>
@@ -16761,7 +16794,7 @@
                     <a:bodyPr/>
                     <a:lstStyle/>
                     <a:p>
-                      <a:pPr algn="ctr" indent="0" marL="0">
+                      <a:pPr marL="0" indent="0" algn="ctr">
                         <a:buNone/>
                       </a:pPr>
                       <a:r>
@@ -16782,7 +16815,7 @@
                       </a:endParaRPr>
                     </a:p>
                   </a:txBody>
-                  <a:tcPr marL="91440" marR="91440" marT="45720" marB="45720" anchor="ctr">
+                  <a:tcPr anchor="ctr">
                     <a:lnL w="6350" cap="flat" cmpd="sng" algn="ctr">
                       <a:solidFill>
                         <a:srgbClr val="D1D5DB"/>
@@ -16824,6 +16857,11 @@
                     </a:solidFill>
                   </a:tcPr>
                 </a:tc>
+                <a:extLst>
+                  <a:ext uri="{0D108BD9-81ED-4DB2-BD59-A6C34878D82A}">
+                    <a16:rowId xmlns:a16="http://schemas.microsoft.com/office/drawing/2014/main" val="10002"/>
+                  </a:ext>
+                </a:extLst>
               </a:tr>
               <a:tr h="274320">
                 <a:tc>
@@ -16831,7 +16869,7 @@
                     <a:bodyPr/>
                     <a:lstStyle/>
                     <a:p>
-                      <a:pPr algn="ctr" indent="0" marL="0">
+                      <a:pPr marL="0" indent="0" algn="ctr">
                         <a:buNone/>
                       </a:pPr>
                       <a:r>
@@ -16852,7 +16890,7 @@
                       </a:endParaRPr>
                     </a:p>
                   </a:txBody>
-                  <a:tcPr marL="91440" marR="91440" marT="45720" marB="45720" anchor="ctr">
+                  <a:tcPr anchor="ctr">
                     <a:lnL w="6350" cap="flat" cmpd="sng" algn="ctr">
                       <a:solidFill>
                         <a:srgbClr val="D1D5DB"/>
@@ -16899,7 +16937,7 @@
                     <a:bodyPr/>
                     <a:lstStyle/>
                     <a:p>
-                      <a:pPr algn="ctr" indent="0" marL="0">
+                      <a:pPr marL="0" indent="0" algn="ctr">
                         <a:buNone/>
                       </a:pPr>
                       <a:r>
@@ -16920,7 +16958,7 @@
                       </a:endParaRPr>
                     </a:p>
                   </a:txBody>
-                  <a:tcPr marL="91440" marR="91440" marT="45720" marB="45720" anchor="ctr">
+                  <a:tcPr anchor="ctr">
                     <a:lnL w="6350" cap="flat" cmpd="sng" algn="ctr">
                       <a:solidFill>
                         <a:srgbClr val="D1D5DB"/>
@@ -16967,7 +17005,7 @@
                     <a:bodyPr/>
                     <a:lstStyle/>
                     <a:p>
-                      <a:pPr algn="ctr" indent="0" marL="0">
+                      <a:pPr marL="0" indent="0" algn="ctr">
                         <a:buNone/>
                       </a:pPr>
                       <a:r>
@@ -16988,7 +17026,7 @@
                       </a:endParaRPr>
                     </a:p>
                   </a:txBody>
-                  <a:tcPr marL="91440" marR="91440" marT="45720" marB="45720" anchor="ctr">
+                  <a:tcPr anchor="ctr">
                     <a:lnL w="6350" cap="flat" cmpd="sng" algn="ctr">
                       <a:solidFill>
                         <a:srgbClr val="D1D5DB"/>
@@ -17035,7 +17073,7 @@
                     <a:bodyPr/>
                     <a:lstStyle/>
                     <a:p>
-                      <a:pPr algn="ctr" indent="0" marL="0">
+                      <a:pPr marL="0" indent="0" algn="ctr">
                         <a:buNone/>
                       </a:pPr>
                       <a:r>
@@ -17056,7 +17094,7 @@
                       </a:endParaRPr>
                     </a:p>
                   </a:txBody>
-                  <a:tcPr marL="91440" marR="91440" marT="45720" marB="45720" anchor="ctr">
+                  <a:tcPr anchor="ctr">
                     <a:lnL w="6350" cap="flat" cmpd="sng" algn="ctr">
                       <a:solidFill>
                         <a:srgbClr val="D1D5DB"/>
@@ -17098,6 +17136,11 @@
                     </a:solidFill>
                   </a:tcPr>
                 </a:tc>
+                <a:extLst>
+                  <a:ext uri="{0D108BD9-81ED-4DB2-BD59-A6C34878D82A}">
+                    <a16:rowId xmlns:a16="http://schemas.microsoft.com/office/drawing/2014/main" val="10003"/>
+                  </a:ext>
+                </a:extLst>
               </a:tr>
             </a:tbl>
           </a:graphicData>
@@ -17119,6 +17162,7 @@
         <a:solidFill>
           <a:srgbClr val="1E1E1E"/>
         </a:solidFill>
+        <a:effectLst/>
       </p:bgPr>
     </p:bg>
     <p:spTree>
@@ -17156,7 +17200,7 @@
           <a:bodyPr wrap="square" rtlCol="0" anchor="ctr"/>
           <a:lstStyle/>
           <a:p>
-            <a:pPr indent="0" marL="0">
+            <a:pPr marL="0" indent="0">
               <a:buNone/>
             </a:pPr>
             <a:r>
@@ -17193,6 +17237,13 @@
           </a:solidFill>
           <a:ln/>
         </p:spPr>
+        <p:txBody>
+          <a:bodyPr/>
+          <a:lstStyle/>
+          <a:p>
+            <a:endParaRPr lang="en-US"/>
+          </a:p>
+        </p:txBody>
       </p:sp>
       <p:sp>
         <p:nvSpPr>
@@ -17215,7 +17266,7 @@
           <a:bodyPr wrap="square" rtlCol="0" anchor="ctr"/>
           <a:lstStyle/>
           <a:p>
-            <a:pPr indent="0" marL="0">
+            <a:pPr marL="0" indent="0">
               <a:buNone/>
             </a:pPr>
             <a:r>
@@ -17254,7 +17305,7 @@
           <a:bodyPr wrap="square" rtlCol="0" anchor="ctr"/>
           <a:lstStyle/>
           <a:p>
-            <a:pPr indent="0" marL="0">
+            <a:pPr marL="0" indent="0">
               <a:buNone/>
             </a:pPr>
             <a:r>
@@ -17293,7 +17344,7 @@
           <a:bodyPr wrap="square" rtlCol="0" anchor="ctr"/>
           <a:lstStyle/>
           <a:p>
-            <a:pPr indent="0" marL="0">
+            <a:pPr marL="0" indent="0">
               <a:buNone/>
             </a:pPr>
             <a:r>
@@ -17330,6 +17381,13 @@
           </a:solidFill>
           <a:ln/>
         </p:spPr>
+        <p:txBody>
+          <a:bodyPr/>
+          <a:lstStyle/>
+          <a:p>
+            <a:endParaRPr lang="en-US"/>
+          </a:p>
+        </p:txBody>
       </p:sp>
       <p:sp>
         <p:nvSpPr>
@@ -17352,7 +17410,7 @@
           <a:bodyPr wrap="square" rtlCol="0" anchor="ctr"/>
           <a:lstStyle/>
           <a:p>
-            <a:pPr algn="ctr" indent="0" marL="0">
+            <a:pPr marL="0" indent="0" algn="ctr">
               <a:buNone/>
             </a:pPr>
             <a:r>
@@ -17366,9 +17424,6 @@
               </a:rPr>
               <a:t>StateMachine</a:t>
             </a:r>
-            <a:pPr algn="ctr" indent="0" marL="0">
-              <a:buNone/>
-            </a:pPr>
             <a:r>
               <a:rPr lang="en-US" sz="2000" dirty="0">
                 <a:solidFill>
@@ -17383,7 +17438,7 @@
             <a:endParaRPr lang="en-US" sz="2000" dirty="0"/>
           </a:p>
           <a:p>
-            <a:pPr algn="ctr" indent="0" marL="0">
+            <a:pPr marL="0" indent="0" algn="ctr">
               <a:buNone/>
             </a:pPr>
             <a:r>
@@ -17397,9 +17452,6 @@
               </a:rPr>
               <a:t>Generation counters</a:t>
             </a:r>
-            <a:pPr algn="ctr" indent="0" marL="0">
-              <a:buNone/>
-            </a:pPr>
             <a:r>
               <a:rPr lang="en-US" sz="2000" dirty="0">
                 <a:solidFill>
@@ -17431,6 +17483,7 @@
         <a:solidFill>
           <a:srgbClr val="1E1E1E"/>
         </a:solidFill>
+        <a:effectLst/>
       </p:bgPr>
     </p:bg>
     <p:spTree>
@@ -17468,7 +17521,7 @@
           <a:bodyPr wrap="square" rtlCol="0" anchor="ctr"/>
           <a:lstStyle/>
           <a:p>
-            <a:pPr indent="0" marL="0">
+            <a:pPr marL="0" indent="0">
               <a:buNone/>
             </a:pPr>
             <a:r>
@@ -17505,6 +17558,13 @@
           </a:solidFill>
           <a:ln/>
         </p:spPr>
+        <p:txBody>
+          <a:bodyPr/>
+          <a:lstStyle/>
+          <a:p>
+            <a:endParaRPr lang="en-US"/>
+          </a:p>
+        </p:txBody>
       </p:sp>
       <p:sp>
         <p:nvSpPr>
@@ -17527,7 +17587,7 @@
           <a:bodyPr wrap="square" rtlCol="0" anchor="ctr"/>
           <a:lstStyle/>
           <a:p>
-            <a:pPr indent="0" marL="0">
+            <a:pPr marL="0" indent="0">
               <a:buNone/>
             </a:pPr>
             <a:r>
@@ -17561,6 +17621,7 @@
         <a:solidFill>
           <a:srgbClr val="F5F5F5"/>
         </a:solidFill>
+        <a:effectLst/>
       </p:bgPr>
     </p:bg>
     <p:spTree>
@@ -17598,7 +17659,7 @@
           <a:bodyPr wrap="square" lIns="0" tIns="0" rIns="0" bIns="0" rtlCol="0" anchor="ctr"/>
           <a:lstStyle/>
           <a:p>
-            <a:pPr indent="0" marL="0">
+            <a:pPr marL="0" indent="0">
               <a:buNone/>
             </a:pPr>
             <a:r>
@@ -17635,6 +17696,13 @@
           </a:solidFill>
           <a:ln/>
         </p:spPr>
+        <p:txBody>
+          <a:bodyPr/>
+          <a:lstStyle/>
+          <a:p>
+            <a:endParaRPr lang="en-US"/>
+          </a:p>
+        </p:txBody>
       </p:sp>
       <p:sp>
         <p:nvSpPr>
@@ -17659,7 +17727,7 @@
           <a:bodyPr wrap="square" rtlCol="0" anchor="ctr"/>
           <a:lstStyle/>
           <a:p>
-            <a:pPr algn="ctr" indent="0" marL="0">
+            <a:pPr marL="0" indent="0" algn="ctr">
               <a:buNone/>
             </a:pPr>
             <a:r>
@@ -17698,7 +17766,7 @@
           <a:bodyPr wrap="square" rtlCol="0" anchor="ctr"/>
           <a:lstStyle/>
           <a:p>
-            <a:pPr indent="0" marL="0">
+            <a:pPr marL="0" indent="0">
               <a:buNone/>
             </a:pPr>
             <a:r>
@@ -17737,7 +17805,7 @@
           <a:bodyPr wrap="square" rtlCol="0" anchor="ctr"/>
           <a:lstStyle/>
           <a:p>
-            <a:pPr indent="0" marL="0">
+            <a:pPr marL="0" indent="0">
               <a:buNone/>
             </a:pPr>
             <a:r>
@@ -17778,7 +17846,7 @@
           <a:bodyPr wrap="square" rtlCol="0" anchor="ctr"/>
           <a:lstStyle/>
           <a:p>
-            <a:pPr algn="ctr" indent="0" marL="0">
+            <a:pPr marL="0" indent="0" algn="ctr">
               <a:buNone/>
             </a:pPr>
             <a:r>
@@ -17817,7 +17885,7 @@
           <a:bodyPr wrap="square" rtlCol="0" anchor="ctr"/>
           <a:lstStyle/>
           <a:p>
-            <a:pPr indent="0" marL="0">
+            <a:pPr marL="0" indent="0">
               <a:buNone/>
             </a:pPr>
             <a:r>
@@ -17856,7 +17924,7 @@
           <a:bodyPr wrap="square" rtlCol="0" anchor="ctr"/>
           <a:lstStyle/>
           <a:p>
-            <a:pPr indent="0" marL="0">
+            <a:pPr marL="0" indent="0">
               <a:buNone/>
             </a:pPr>
             <a:r>
@@ -17897,7 +17965,7 @@
           <a:bodyPr wrap="square" rtlCol="0" anchor="ctr"/>
           <a:lstStyle/>
           <a:p>
-            <a:pPr algn="ctr" indent="0" marL="0">
+            <a:pPr marL="0" indent="0" algn="ctr">
               <a:buNone/>
             </a:pPr>
             <a:r>
@@ -17936,7 +18004,7 @@
           <a:bodyPr wrap="square" rtlCol="0" anchor="ctr"/>
           <a:lstStyle/>
           <a:p>
-            <a:pPr indent="0" marL="0">
+            <a:pPr marL="0" indent="0">
               <a:buNone/>
             </a:pPr>
             <a:r>
@@ -17975,7 +18043,7 @@
           <a:bodyPr wrap="square" rtlCol="0" anchor="ctr"/>
           <a:lstStyle/>
           <a:p>
-            <a:pPr indent="0" marL="0">
+            <a:pPr marL="0" indent="0">
               <a:buNone/>
             </a:pPr>
             <a:r>
@@ -18016,7 +18084,7 @@
           <a:bodyPr wrap="square" rtlCol="0" anchor="ctr"/>
           <a:lstStyle/>
           <a:p>
-            <a:pPr algn="ctr" indent="0" marL="0">
+            <a:pPr marL="0" indent="0" algn="ctr">
               <a:buNone/>
             </a:pPr>
             <a:r>
@@ -18055,7 +18123,7 @@
           <a:bodyPr wrap="square" rtlCol="0" anchor="ctr"/>
           <a:lstStyle/>
           <a:p>
-            <a:pPr indent="0" marL="0">
+            <a:pPr marL="0" indent="0">
               <a:buNone/>
             </a:pPr>
             <a:r>
@@ -18094,7 +18162,7 @@
           <a:bodyPr wrap="square" rtlCol="0" anchor="ctr"/>
           <a:lstStyle/>
           <a:p>
-            <a:pPr indent="0" marL="0">
+            <a:pPr marL="0" indent="0">
               <a:buNone/>
             </a:pPr>
             <a:r>
@@ -18135,7 +18203,7 @@
           <a:bodyPr wrap="square" rtlCol="0" anchor="ctr"/>
           <a:lstStyle/>
           <a:p>
-            <a:pPr algn="ctr" indent="0" marL="0">
+            <a:pPr marL="0" indent="0" algn="ctr">
               <a:buNone/>
             </a:pPr>
             <a:r>
@@ -18174,7 +18242,7 @@
           <a:bodyPr wrap="square" rtlCol="0" anchor="ctr"/>
           <a:lstStyle/>
           <a:p>
-            <a:pPr indent="0" marL="0">
+            <a:pPr marL="0" indent="0">
               <a:buNone/>
             </a:pPr>
             <a:r>
@@ -18213,7 +18281,7 @@
           <a:bodyPr wrap="square" rtlCol="0" anchor="ctr"/>
           <a:lstStyle/>
           <a:p>
-            <a:pPr indent="0" marL="0">
+            <a:pPr marL="0" indent="0">
               <a:buNone/>
             </a:pPr>
             <a:r>
@@ -18254,7 +18322,7 @@
           <a:bodyPr wrap="square" rtlCol="0" anchor="ctr"/>
           <a:lstStyle/>
           <a:p>
-            <a:pPr algn="ctr" indent="0" marL="0">
+            <a:pPr marL="0" indent="0" algn="ctr">
               <a:buNone/>
             </a:pPr>
             <a:r>
@@ -18293,7 +18361,7 @@
           <a:bodyPr wrap="square" rtlCol="0" anchor="ctr"/>
           <a:lstStyle/>
           <a:p>
-            <a:pPr indent="0" marL="0">
+            <a:pPr marL="0" indent="0">
               <a:buNone/>
             </a:pPr>
             <a:r>
@@ -18332,7 +18400,7 @@
           <a:bodyPr wrap="square" rtlCol="0" anchor="ctr"/>
           <a:lstStyle/>
           <a:p>
-            <a:pPr indent="0" marL="0">
+            <a:pPr marL="0" indent="0">
               <a:buNone/>
             </a:pPr>
             <a:r>
@@ -18373,7 +18441,7 @@
           <a:bodyPr wrap="square" rtlCol="0" anchor="ctr"/>
           <a:lstStyle/>
           <a:p>
-            <a:pPr algn="ctr" indent="0" marL="0">
+            <a:pPr marL="0" indent="0" algn="ctr">
               <a:buNone/>
             </a:pPr>
             <a:r>
@@ -18412,7 +18480,7 @@
           <a:bodyPr wrap="square" rtlCol="0" anchor="ctr"/>
           <a:lstStyle/>
           <a:p>
-            <a:pPr indent="0" marL="0">
+            <a:pPr marL="0" indent="0">
               <a:buNone/>
             </a:pPr>
             <a:r>
@@ -18451,7 +18519,7 @@
           <a:bodyPr wrap="square" rtlCol="0" anchor="ctr"/>
           <a:lstStyle/>
           <a:p>
-            <a:pPr indent="0" marL="0">
+            <a:pPr marL="0" indent="0">
               <a:buNone/>
             </a:pPr>
             <a:r>
@@ -18485,6 +18553,7 @@
         <a:solidFill>
           <a:srgbClr val="F5F5F5"/>
         </a:solidFill>
+        <a:effectLst/>
       </p:bgPr>
     </p:bg>
     <p:spTree>
@@ -18522,7 +18591,7 @@
           <a:bodyPr wrap="square" lIns="0" tIns="0" rIns="0" bIns="0" rtlCol="0" anchor="ctr"/>
           <a:lstStyle/>
           <a:p>
-            <a:pPr indent="0" marL="0">
+            <a:pPr marL="0" indent="0">
               <a:buNone/>
             </a:pPr>
             <a:r>
@@ -18559,6 +18628,13 @@
           </a:solidFill>
           <a:ln/>
         </p:spPr>
+        <p:txBody>
+          <a:bodyPr/>
+          <a:lstStyle/>
+          <a:p>
+            <a:endParaRPr lang="en-US"/>
+          </a:p>
+        </p:txBody>
       </p:sp>
       <p:sp>
         <p:nvSpPr>
@@ -18584,6 +18660,13 @@
             <a:prstDash val="solid"/>
           </a:ln>
         </p:spPr>
+        <p:txBody>
+          <a:bodyPr/>
+          <a:lstStyle/>
+          <a:p>
+            <a:endParaRPr lang="en-US"/>
+          </a:p>
+        </p:txBody>
       </p:sp>
       <p:sp>
         <p:nvSpPr>
@@ -18606,7 +18689,7 @@
           <a:bodyPr wrap="square" rtlCol="0" anchor="ctr"/>
           <a:lstStyle/>
           <a:p>
-            <a:pPr indent="0" marL="0">
+            <a:pPr marL="0" indent="0">
               <a:buNone/>
             </a:pPr>
             <a:r>
@@ -18663,7 +18746,7 @@
             <a:endParaRPr lang="en-US" sz="1100" dirty="0"/>
           </a:p>
           <a:p>
-            <a:pPr indent="0" marL="0">
+            <a:pPr marL="0" indent="0">
               <a:buNone/>
             </a:pPr>
             <a:r>
@@ -18680,7 +18763,7 @@
             <a:endParaRPr lang="en-US" sz="1100" dirty="0"/>
           </a:p>
           <a:p>
-            <a:pPr indent="0" marL="0">
+            <a:pPr marL="0" indent="0">
               <a:buNone/>
             </a:pPr>
             <a:r>
@@ -18697,7 +18780,7 @@
             <a:endParaRPr lang="en-US" sz="1100" dirty="0"/>
           </a:p>
           <a:p>
-            <a:pPr indent="0" marL="0">
+            <a:pPr marL="0" indent="0">
               <a:buNone/>
             </a:pPr>
             <a:r>
@@ -18714,7 +18797,7 @@
             <a:endParaRPr lang="en-US" sz="1100" dirty="0"/>
           </a:p>
           <a:p>
-            <a:pPr indent="0" marL="0">
+            <a:pPr marL="0" indent="0">
               <a:buNone/>
             </a:pPr>
             <a:r>
@@ -18756,6 +18839,13 @@
             <a:prstDash val="solid"/>
           </a:ln>
         </p:spPr>
+        <p:txBody>
+          <a:bodyPr/>
+          <a:lstStyle/>
+          <a:p>
+            <a:endParaRPr lang="en-US"/>
+          </a:p>
+        </p:txBody>
       </p:sp>
       <p:sp>
         <p:nvSpPr>
@@ -18778,7 +18868,7 @@
           <a:bodyPr wrap="square" rtlCol="0" anchor="ctr"/>
           <a:lstStyle/>
           <a:p>
-            <a:pPr indent="0" marL="0">
+            <a:pPr marL="0" indent="0">
               <a:buNone/>
             </a:pPr>
             <a:r>
@@ -18835,7 +18925,7 @@
             <a:endParaRPr lang="en-US" sz="1100" dirty="0"/>
           </a:p>
           <a:p>
-            <a:pPr indent="0" marL="0">
+            <a:pPr marL="0" indent="0">
               <a:buNone/>
             </a:pPr>
             <a:r>
@@ -18852,7 +18942,7 @@
             <a:endParaRPr lang="en-US" sz="1100" dirty="0"/>
           </a:p>
           <a:p>
-            <a:pPr indent="0" marL="0">
+            <a:pPr marL="0" indent="0">
               <a:buNone/>
             </a:pPr>
             <a:r>
@@ -18869,7 +18959,7 @@
             <a:endParaRPr lang="en-US" sz="1100" dirty="0"/>
           </a:p>
           <a:p>
-            <a:pPr indent="0" marL="0">
+            <a:pPr marL="0" indent="0">
               <a:buNone/>
             </a:pPr>
             <a:r>
@@ -18908,7 +18998,7 @@
           <a:bodyPr wrap="square" rtlCol="0" anchor="ctr"/>
           <a:lstStyle/>
           <a:p>
-            <a:pPr indent="0" marL="0">
+            <a:pPr marL="0" indent="0">
               <a:buNone/>
             </a:pPr>
             <a:r>
@@ -18947,7 +19037,7 @@
           <a:bodyPr wrap="square" rtlCol="0" anchor="ctr"/>
           <a:lstStyle/>
           <a:p>
-            <a:pPr indent="0" marL="0">
+            <a:pPr marL="0" indent="0">
               <a:buNone/>
             </a:pPr>
             <a:r>
@@ -18986,6 +19076,13 @@
           </a:solidFill>
           <a:ln/>
         </p:spPr>
+        <p:txBody>
+          <a:bodyPr/>
+          <a:lstStyle/>
+          <a:p>
+            <a:endParaRPr lang="en-US"/>
+          </a:p>
+        </p:txBody>
       </p:sp>
       <p:sp>
         <p:nvSpPr>
@@ -19008,7 +19105,7 @@
           <a:bodyPr wrap="square" rtlCol="0" anchor="ctr"/>
           <a:lstStyle/>
           <a:p>
-            <a:pPr indent="0" marL="0">
+            <a:pPr marL="0" indent="0">
               <a:buNone/>
             </a:pPr>
             <a:r>
@@ -19022,9 +19119,6 @@
               </a:rPr>
               <a:t>Migration cost: </a:t>
             </a:r>
-            <a:pPr indent="0" marL="0">
-              <a:buNone/>
-            </a:pPr>
             <a:r>
               <a:rPr lang="en-US" sz="1300" dirty="0">
                 <a:solidFill>
@@ -19056,6 +19150,7 @@
         <a:solidFill>
           <a:srgbClr val="1E1E1E"/>
         </a:solidFill>
+        <a:effectLst/>
       </p:bgPr>
     </p:bg>
     <p:spTree>
@@ -19093,7 +19188,7 @@
           <a:bodyPr wrap="square" rtlCol="0" anchor="ctr"/>
           <a:lstStyle/>
           <a:p>
-            <a:pPr indent="0" marL="0">
+            <a:pPr marL="0" indent="0">
               <a:buNone/>
             </a:pPr>
             <a:r>
@@ -19130,6 +19225,13 @@
           </a:solidFill>
           <a:ln/>
         </p:spPr>
+        <p:txBody>
+          <a:bodyPr/>
+          <a:lstStyle/>
+          <a:p>
+            <a:endParaRPr lang="en-US"/>
+          </a:p>
+        </p:txBody>
       </p:sp>
       <p:sp>
         <p:nvSpPr>
@@ -19152,7 +19254,7 @@
           <a:bodyPr wrap="square" rtlCol="0" anchor="ctr"/>
           <a:lstStyle/>
           <a:p>
-            <a:pPr indent="0" marL="0">
+            <a:pPr marL="0" indent="0">
               <a:buNone/>
             </a:pPr>
             <a:r>
@@ -19249,7 +19351,7 @@
           <a:bodyPr wrap="square" rtlCol="0" anchor="ctr"/>
           <a:lstStyle/>
           <a:p>
-            <a:pPr indent="0" marL="0">
+            <a:pPr marL="0" indent="0">
               <a:buNone/>
             </a:pPr>
             <a:r>
@@ -19364,7 +19466,7 @@
           <a:bodyPr wrap="square" rtlCol="0" anchor="ctr"/>
           <a:lstStyle/>
           <a:p>
-            <a:pPr indent="0" marL="0">
+            <a:pPr marL="0" indent="0">
               <a:buNone/>
             </a:pPr>
             <a:r>
@@ -19391,31 +19493,49 @@
           <p:nvPr>
             <p:extLst>
               <p:ext uri="{D42A27DB-BD31-4B8C-83A1-F6EECF244321}">
-                <p14:modId xmlns:p14="http://schemas.microsoft.com/office/powerpoint/2010/main" val="1579011935"/>
+                <p14:modId xmlns:p14="http://schemas.microsoft.com/office/powerpoint/2010/main" val="1890111585"/>
               </p:ext>
             </p:extLst>
           </p:nvPr>
         </p:nvGraphicFramePr>
         <p:xfrm>
-          <a:off x="1371600" y="4343400"/>
-          <a:ext cx="6400800" cy="868680"/>
+          <a:off x="2130056" y="4022740"/>
+          <a:ext cx="6400800" cy="1036320"/>
         </p:xfrm>
         <a:graphic>
           <a:graphicData uri="http://schemas.openxmlformats.org/drawingml/2006/table">
             <a:tbl>
               <a:tblPr/>
               <a:tblGrid>
-                <a:gridCol w="2133600"/>
-                <a:gridCol w="2133600"/>
-                <a:gridCol w="2133600"/>
+                <a:gridCol w="2133600">
+                  <a:extLst>
+                    <a:ext uri="{9D8B030D-6E8A-4147-A177-3AD203B41FA5}">
+                      <a16:colId xmlns:a16="http://schemas.microsoft.com/office/drawing/2014/main" val="20000"/>
+                    </a:ext>
+                  </a:extLst>
+                </a:gridCol>
+                <a:gridCol w="2133600">
+                  <a:extLst>
+                    <a:ext uri="{9D8B030D-6E8A-4147-A177-3AD203B41FA5}">
+                      <a16:colId xmlns:a16="http://schemas.microsoft.com/office/drawing/2014/main" val="20001"/>
+                    </a:ext>
+                  </a:extLst>
+                </a:gridCol>
+                <a:gridCol w="2133600">
+                  <a:extLst>
+                    <a:ext uri="{9D8B030D-6E8A-4147-A177-3AD203B41FA5}">
+                      <a16:colId xmlns:a16="http://schemas.microsoft.com/office/drawing/2014/main" val="20002"/>
+                    </a:ext>
+                  </a:extLst>
+                </a:gridCol>
               </a:tblGrid>
-              <a:tr h="217170">
+              <a:tr h="215398">
                 <a:tc>
                   <a:txBody>
                     <a:bodyPr/>
                     <a:lstStyle/>
                     <a:p>
-                      <a:pPr algn="ctr" indent="0" marL="0">
+                      <a:pPr marL="0" indent="0" algn="ctr">
                         <a:buNone/>
                       </a:pPr>
                       <a:endParaRPr lang="en-US" sz="1100" dirty="0">
@@ -19425,7 +19545,7 @@
                       </a:endParaRPr>
                     </a:p>
                   </a:txBody>
-                  <a:tcPr marL="91440" marR="91440" marT="45720" marB="45720" anchor="ctr">
+                  <a:tcPr anchor="ctr">
                     <a:lnL w="6350" cap="flat" cmpd="sng" algn="ctr">
                       <a:solidFill>
                         <a:srgbClr val="52525B"/>
@@ -19472,7 +19592,7 @@
                     <a:bodyPr/>
                     <a:lstStyle/>
                     <a:p>
-                      <a:pPr algn="ctr" indent="0" marL="0">
+                      <a:pPr marL="0" indent="0" algn="ctr">
                         <a:buNone/>
                       </a:pPr>
                       <a:r>
@@ -19493,7 +19613,7 @@
                       </a:endParaRPr>
                     </a:p>
                   </a:txBody>
-                  <a:tcPr marL="91440" marR="91440" marT="45720" marB="45720" anchor="ctr">
+                  <a:tcPr anchor="ctr">
                     <a:lnL w="6350" cap="flat" cmpd="sng" algn="ctr">
                       <a:solidFill>
                         <a:srgbClr val="52525B"/>
@@ -19540,7 +19660,7 @@
                     <a:bodyPr/>
                     <a:lstStyle/>
                     <a:p>
-                      <a:pPr algn="ctr" indent="0" marL="0">
+                      <a:pPr marL="0" indent="0" algn="ctr">
                         <a:buNone/>
                       </a:pPr>
                       <a:r>
@@ -19561,7 +19681,7 @@
                       </a:endParaRPr>
                     </a:p>
                   </a:txBody>
-                  <a:tcPr marL="91440" marR="91440" marT="45720" marB="45720" anchor="ctr">
+                  <a:tcPr anchor="ctr">
                     <a:lnL w="6350" cap="flat" cmpd="sng" algn="ctr">
                       <a:solidFill>
                         <a:srgbClr val="52525B"/>
@@ -19603,6 +19723,11 @@
                     </a:solidFill>
                   </a:tcPr>
                 </a:tc>
+                <a:extLst>
+                  <a:ext uri="{0D108BD9-81ED-4DB2-BD59-A6C34878D82A}">
+                    <a16:rowId xmlns:a16="http://schemas.microsoft.com/office/drawing/2014/main" val="10000"/>
+                  </a:ext>
+                </a:extLst>
               </a:tr>
               <a:tr h="217170">
                 <a:tc>
@@ -19610,7 +19735,7 @@
                     <a:bodyPr/>
                     <a:lstStyle/>
                     <a:p>
-                      <a:pPr algn="ctr" indent="0" marL="0">
+                      <a:pPr marL="0" indent="0" algn="ctr">
                         <a:buNone/>
                       </a:pPr>
                       <a:r>
@@ -19631,7 +19756,7 @@
                       </a:endParaRPr>
                     </a:p>
                   </a:txBody>
-                  <a:tcPr marL="91440" marR="91440" marT="45720" marB="45720" anchor="ctr">
+                  <a:tcPr anchor="ctr">
                     <a:lnL w="6350" cap="flat" cmpd="sng" algn="ctr">
                       <a:solidFill>
                         <a:srgbClr val="52525B"/>
@@ -19678,7 +19803,7 @@
                     <a:bodyPr/>
                     <a:lstStyle/>
                     <a:p>
-                      <a:pPr algn="ctr" indent="0" marL="0">
+                      <a:pPr marL="0" indent="0" algn="ctr">
                         <a:buNone/>
                       </a:pPr>
                       <a:r>
@@ -19699,7 +19824,7 @@
                       </a:endParaRPr>
                     </a:p>
                   </a:txBody>
-                  <a:tcPr marL="91440" marR="91440" marT="45720" marB="45720" anchor="ctr">
+                  <a:tcPr anchor="ctr">
                     <a:lnL w="6350" cap="flat" cmpd="sng" algn="ctr">
                       <a:solidFill>
                         <a:srgbClr val="52525B"/>
@@ -19746,7 +19871,7 @@
                     <a:bodyPr/>
                     <a:lstStyle/>
                     <a:p>
-                      <a:pPr algn="ctr" indent="0" marL="0">
+                      <a:pPr marL="0" indent="0" algn="ctr">
                         <a:buNone/>
                       </a:pPr>
                       <a:r>
@@ -19767,7 +19892,7 @@
                       </a:endParaRPr>
                     </a:p>
                   </a:txBody>
-                  <a:tcPr marL="91440" marR="91440" marT="45720" marB="45720" anchor="ctr">
+                  <a:tcPr anchor="ctr">
                     <a:lnL w="6350" cap="flat" cmpd="sng" algn="ctr">
                       <a:solidFill>
                         <a:srgbClr val="52525B"/>
@@ -19809,6 +19934,11 @@
                     </a:solidFill>
                   </a:tcPr>
                 </a:tc>
+                <a:extLst>
+                  <a:ext uri="{0D108BD9-81ED-4DB2-BD59-A6C34878D82A}">
+                    <a16:rowId xmlns:a16="http://schemas.microsoft.com/office/drawing/2014/main" val="10001"/>
+                  </a:ext>
+                </a:extLst>
               </a:tr>
               <a:tr h="217170">
                 <a:tc>
@@ -19816,7 +19946,7 @@
                     <a:bodyPr/>
                     <a:lstStyle/>
                     <a:p>
-                      <a:pPr algn="ctr" indent="0" marL="0">
+                      <a:pPr marL="0" indent="0" algn="ctr">
                         <a:buNone/>
                       </a:pPr>
                       <a:r>
@@ -19837,7 +19967,7 @@
                       </a:endParaRPr>
                     </a:p>
                   </a:txBody>
-                  <a:tcPr marL="91440" marR="91440" marT="45720" marB="45720" anchor="ctr">
+                  <a:tcPr anchor="ctr">
                     <a:lnL w="6350" cap="flat" cmpd="sng" algn="ctr">
                       <a:solidFill>
                         <a:srgbClr val="52525B"/>
@@ -19884,7 +20014,7 @@
                     <a:bodyPr/>
                     <a:lstStyle/>
                     <a:p>
-                      <a:pPr algn="ctr" indent="0" marL="0">
+                      <a:pPr marL="0" indent="0" algn="ctr">
                         <a:buNone/>
                       </a:pPr>
                       <a:r>
@@ -19905,7 +20035,7 @@
                       </a:endParaRPr>
                     </a:p>
                   </a:txBody>
-                  <a:tcPr marL="91440" marR="91440" marT="45720" marB="45720" anchor="ctr">
+                  <a:tcPr anchor="ctr">
                     <a:lnL w="6350" cap="flat" cmpd="sng" algn="ctr">
                       <a:solidFill>
                         <a:srgbClr val="52525B"/>
@@ -19952,7 +20082,7 @@
                     <a:bodyPr/>
                     <a:lstStyle/>
                     <a:p>
-                      <a:pPr algn="ctr" indent="0" marL="0">
+                      <a:pPr marL="0" indent="0" algn="ctr">
                         <a:buNone/>
                       </a:pPr>
                       <a:r>
@@ -19973,7 +20103,7 @@
                       </a:endParaRPr>
                     </a:p>
                   </a:txBody>
-                  <a:tcPr marL="91440" marR="91440" marT="45720" marB="45720" anchor="ctr">
+                  <a:tcPr anchor="ctr">
                     <a:lnL w="6350" cap="flat" cmpd="sng" algn="ctr">
                       <a:solidFill>
                         <a:srgbClr val="52525B"/>
@@ -20015,6 +20145,11 @@
                     </a:solidFill>
                   </a:tcPr>
                 </a:tc>
+                <a:extLst>
+                  <a:ext uri="{0D108BD9-81ED-4DB2-BD59-A6C34878D82A}">
+                    <a16:rowId xmlns:a16="http://schemas.microsoft.com/office/drawing/2014/main" val="10002"/>
+                  </a:ext>
+                </a:extLst>
               </a:tr>
               <a:tr h="217170">
                 <a:tc>
@@ -20022,7 +20157,7 @@
                     <a:bodyPr/>
                     <a:lstStyle/>
                     <a:p>
-                      <a:pPr algn="ctr" indent="0" marL="0">
+                      <a:pPr marL="0" indent="0" algn="ctr">
                         <a:buNone/>
                       </a:pPr>
                       <a:r>
@@ -20043,7 +20178,7 @@
                       </a:endParaRPr>
                     </a:p>
                   </a:txBody>
-                  <a:tcPr marL="91440" marR="91440" marT="45720" marB="45720" anchor="ctr">
+                  <a:tcPr anchor="ctr">
                     <a:lnL w="6350" cap="flat" cmpd="sng" algn="ctr">
                       <a:solidFill>
                         <a:srgbClr val="52525B"/>
@@ -20090,7 +20225,7 @@
                     <a:bodyPr/>
                     <a:lstStyle/>
                     <a:p>
-                      <a:pPr algn="ctr" indent="0" marL="0">
+                      <a:pPr marL="0" indent="0" algn="ctr">
                         <a:buNone/>
                       </a:pPr>
                       <a:r>
@@ -20111,7 +20246,7 @@
                       </a:endParaRPr>
                     </a:p>
                   </a:txBody>
-                  <a:tcPr marL="91440" marR="91440" marT="45720" marB="45720" anchor="ctr">
+                  <a:tcPr anchor="ctr">
                     <a:lnL w="6350" cap="flat" cmpd="sng" algn="ctr">
                       <a:solidFill>
                         <a:srgbClr val="52525B"/>
@@ -20158,7 +20293,7 @@
                     <a:bodyPr/>
                     <a:lstStyle/>
                     <a:p>
-                      <a:pPr algn="ctr" indent="0" marL="0">
+                      <a:pPr marL="0" indent="0" algn="ctr">
                         <a:buNone/>
                       </a:pPr>
                       <a:r>
@@ -20179,7 +20314,7 @@
                       </a:endParaRPr>
                     </a:p>
                   </a:txBody>
-                  <a:tcPr marL="91440" marR="91440" marT="45720" marB="45720" anchor="ctr">
+                  <a:tcPr anchor="ctr">
                     <a:lnL w="6350" cap="flat" cmpd="sng" algn="ctr">
                       <a:solidFill>
                         <a:srgbClr val="52525B"/>
@@ -20221,6 +20356,11 @@
                     </a:solidFill>
                   </a:tcPr>
                 </a:tc>
+                <a:extLst>
+                  <a:ext uri="{0D108BD9-81ED-4DB2-BD59-A6C34878D82A}">
+                    <a16:rowId xmlns:a16="http://schemas.microsoft.com/office/drawing/2014/main" val="10003"/>
+                  </a:ext>
+                </a:extLst>
               </a:tr>
             </a:tbl>
           </a:graphicData>
@@ -20242,6 +20382,7 @@
         <a:solidFill>
           <a:srgbClr val="F5F5F5"/>
         </a:solidFill>
+        <a:effectLst/>
       </p:bgPr>
     </p:bg>
     <p:spTree>
@@ -20279,7 +20420,7 @@
           <a:bodyPr wrap="square" lIns="0" tIns="0" rIns="0" bIns="0" rtlCol="0" anchor="ctr"/>
           <a:lstStyle/>
           <a:p>
-            <a:pPr indent="0" marL="0">
+            <a:pPr marL="0" indent="0">
               <a:buNone/>
             </a:pPr>
             <a:r>
@@ -20318,7 +20459,7 @@
           <a:bodyPr wrap="square" rtlCol="0" anchor="ctr"/>
           <a:lstStyle/>
           <a:p>
-            <a:pPr indent="0" marL="0">
+            <a:pPr marL="0" indent="0">
               <a:buNone/>
             </a:pPr>
             <a:r>
@@ -20355,6 +20496,13 @@
           </a:solidFill>
           <a:ln/>
         </p:spPr>
+        <p:txBody>
+          <a:bodyPr/>
+          <a:lstStyle/>
+          <a:p>
+            <a:endParaRPr lang="en-US"/>
+          </a:p>
+        </p:txBody>
       </p:sp>
       <p:sp>
         <p:nvSpPr>
@@ -20377,7 +20525,7 @@
           <a:bodyPr wrap="square" rtlCol="0" anchor="t"/>
           <a:lstStyle/>
           <a:p>
-            <a:pPr indent="0" marL="0">
+            <a:pPr marL="0" indent="0">
               <a:buNone/>
             </a:pPr>
             <a:r>
@@ -20394,13 +20542,13 @@
             <a:endParaRPr lang="en-US" sz="1100" dirty="0"/>
           </a:p>
           <a:p>
-            <a:pPr indent="0" marL="0">
+            <a:pPr marL="0" indent="0">
               <a:buNone/>
             </a:pPr>
             <a:endParaRPr lang="en-US" sz="1100" dirty="0"/>
           </a:p>
           <a:p>
-            <a:pPr indent="0" marL="0">
+            <a:pPr marL="0" indent="0">
               <a:buNone/>
             </a:pPr>
             <a:r>
@@ -20417,7 +20565,7 @@
             <a:endParaRPr lang="en-US" sz="1100" dirty="0"/>
           </a:p>
           <a:p>
-            <a:pPr indent="0" marL="0">
+            <a:pPr marL="0" indent="0">
               <a:buNone/>
             </a:pPr>
             <a:r>
@@ -20434,7 +20582,7 @@
             <a:endParaRPr lang="en-US" sz="1100" dirty="0"/>
           </a:p>
           <a:p>
-            <a:pPr indent="0" marL="0">
+            <a:pPr marL="0" indent="0">
               <a:buNone/>
             </a:pPr>
             <a:r>
@@ -20451,7 +20599,7 @@
             <a:endParaRPr lang="en-US" sz="1100" dirty="0"/>
           </a:p>
           <a:p>
-            <a:pPr indent="0" marL="0">
+            <a:pPr marL="0" indent="0">
               <a:buNone/>
             </a:pPr>
             <a:r>
@@ -20468,7 +20616,7 @@
             <a:endParaRPr lang="en-US" sz="1100" dirty="0"/>
           </a:p>
           <a:p>
-            <a:pPr indent="0" marL="0">
+            <a:pPr marL="0" indent="0">
               <a:buNone/>
             </a:pPr>
             <a:r>
@@ -20485,7 +20633,7 @@
             <a:endParaRPr lang="en-US" sz="1100" dirty="0"/>
           </a:p>
           <a:p>
-            <a:pPr indent="0" marL="0">
+            <a:pPr marL="0" indent="0">
               <a:buNone/>
             </a:pPr>
             <a:r>
@@ -20502,7 +20650,7 @@
             <a:endParaRPr lang="en-US" sz="1100" dirty="0"/>
           </a:p>
           <a:p>
-            <a:pPr indent="0" marL="0">
+            <a:pPr marL="0" indent="0">
               <a:buNone/>
             </a:pPr>
             <a:r>
@@ -20519,7 +20667,7 @@
             <a:endParaRPr lang="en-US" sz="1100" dirty="0"/>
           </a:p>
           <a:p>
-            <a:pPr indent="0" marL="0">
+            <a:pPr marL="0" indent="0">
               <a:buNone/>
             </a:pPr>
             <a:r>
@@ -20536,7 +20684,7 @@
             <a:endParaRPr lang="en-US" sz="1100" dirty="0"/>
           </a:p>
           <a:p>
-            <a:pPr indent="0" marL="0">
+            <a:pPr marL="0" indent="0">
               <a:buNone/>
             </a:pPr>
             <a:r>
@@ -20553,7 +20701,7 @@
             <a:endParaRPr lang="en-US" sz="1100" dirty="0"/>
           </a:p>
           <a:p>
-            <a:pPr indent="0" marL="0">
+            <a:pPr marL="0" indent="0">
               <a:buNone/>
             </a:pPr>
             <a:r>
@@ -20570,7 +20718,7 @@
             <a:endParaRPr lang="en-US" sz="1100" dirty="0"/>
           </a:p>
           <a:p>
-            <a:pPr indent="0" marL="0">
+            <a:pPr marL="0" indent="0">
               <a:buNone/>
             </a:pPr>
             <a:r>
@@ -20587,7 +20735,7 @@
             <a:endParaRPr lang="en-US" sz="1100" dirty="0"/>
           </a:p>
           <a:p>
-            <a:pPr indent="0" marL="0">
+            <a:pPr marL="0" indent="0">
               <a:buNone/>
             </a:pPr>
             <a:r>
@@ -20604,7 +20752,7 @@
             <a:endParaRPr lang="en-US" sz="1100" dirty="0"/>
           </a:p>
           <a:p>
-            <a:pPr indent="0" marL="0">
+            <a:pPr marL="0" indent="0">
               <a:buNone/>
             </a:pPr>
             <a:r>
@@ -20621,7 +20769,7 @@
             <a:endParaRPr lang="en-US" sz="1100" dirty="0"/>
           </a:p>
           <a:p>
-            <a:pPr indent="0" marL="0">
+            <a:pPr marL="0" indent="0">
               <a:buNone/>
             </a:pPr>
             <a:r>
@@ -20638,7 +20786,7 @@
             <a:endParaRPr lang="en-US" sz="1100" dirty="0"/>
           </a:p>
           <a:p>
-            <a:pPr indent="0" marL="0">
+            <a:pPr marL="0" indent="0">
               <a:buNone/>
             </a:pPr>
             <a:r>
@@ -20672,6 +20820,7 @@
         <a:solidFill>
           <a:srgbClr val="1E1E1E"/>
         </a:solidFill>
+        <a:effectLst/>
       </p:bgPr>
     </p:bg>
     <p:spTree>
@@ -20709,7 +20858,7 @@
           <a:bodyPr wrap="square" rtlCol="0" anchor="ctr"/>
           <a:lstStyle/>
           <a:p>
-            <a:pPr indent="0" marL="0">
+            <a:pPr marL="0" indent="0">
               <a:buNone/>
             </a:pPr>
             <a:r>
@@ -20746,6 +20895,13 @@
           </a:solidFill>
           <a:ln/>
         </p:spPr>
+        <p:txBody>
+          <a:bodyPr/>
+          <a:lstStyle/>
+          <a:p>
+            <a:endParaRPr lang="en-US"/>
+          </a:p>
+        </p:txBody>
       </p:sp>
       <p:sp>
         <p:nvSpPr>
@@ -20768,7 +20924,7 @@
           <a:bodyPr wrap="square" rtlCol="0" anchor="ctr"/>
           <a:lstStyle/>
           <a:p>
-            <a:pPr indent="0" marL="0">
+            <a:pPr marL="0" indent="0">
               <a:buNone/>
             </a:pPr>
             <a:r>
@@ -20807,7 +20963,7 @@
           <a:bodyPr wrap="square" rtlCol="0" anchor="ctr"/>
           <a:lstStyle/>
           <a:p>
-            <a:pPr indent="0" marL="0">
+            <a:pPr marL="0" indent="0">
               <a:buNone/>
             </a:pPr>
             <a:r>
@@ -20846,7 +21002,7 @@
           <a:bodyPr wrap="square" rtlCol="0" anchor="ctr"/>
           <a:lstStyle/>
           <a:p>
-            <a:pPr indent="0" marL="0">
+            <a:pPr marL="0" indent="0">
               <a:buNone/>
             </a:pPr>
             <a:r>
@@ -20880,6 +21036,7 @@
         <a:solidFill>
           <a:srgbClr val="F5F5F5"/>
         </a:solidFill>
+        <a:effectLst/>
       </p:bgPr>
     </p:bg>
     <p:spTree>
@@ -20917,7 +21074,7 @@
           <a:bodyPr wrap="square" lIns="0" tIns="0" rIns="0" bIns="0" rtlCol="0" anchor="ctr"/>
           <a:lstStyle/>
           <a:p>
-            <a:pPr indent="0" marL="0">
+            <a:pPr marL="0" indent="0">
               <a:buNone/>
             </a:pPr>
             <a:r>
@@ -20954,6 +21111,13 @@
           </a:solidFill>
           <a:ln/>
         </p:spPr>
+        <p:txBody>
+          <a:bodyPr/>
+          <a:lstStyle/>
+          <a:p>
+            <a:endParaRPr lang="en-US"/>
+          </a:p>
+        </p:txBody>
       </p:sp>
       <p:sp>
         <p:nvSpPr>
@@ -20974,6 +21138,13 @@
           </a:solidFill>
           <a:ln/>
         </p:spPr>
+        <p:txBody>
+          <a:bodyPr/>
+          <a:lstStyle/>
+          <a:p>
+            <a:endParaRPr lang="en-US"/>
+          </a:p>
+        </p:txBody>
       </p:sp>
       <p:sp>
         <p:nvSpPr>
@@ -20996,7 +21167,7 @@
           <a:bodyPr wrap="square" rtlCol="0" anchor="t"/>
           <a:lstStyle/>
           <a:p>
-            <a:pPr indent="0" marL="0">
+            <a:pPr marL="0" indent="0">
               <a:buNone/>
             </a:pPr>
             <a:r>
@@ -21013,7 +21184,7 @@
             <a:endParaRPr lang="en-US" sz="1300" dirty="0"/>
           </a:p>
           <a:p>
-            <a:pPr indent="0" marL="0">
+            <a:pPr marL="0" indent="0">
               <a:buNone/>
             </a:pPr>
             <a:r>
@@ -21030,7 +21201,7 @@
             <a:endParaRPr lang="en-US" sz="1300" dirty="0"/>
           </a:p>
           <a:p>
-            <a:pPr indent="0" marL="0">
+            <a:pPr marL="0" indent="0">
               <a:buNone/>
             </a:pPr>
             <a:r>
@@ -21047,7 +21218,7 @@
             <a:endParaRPr lang="en-US" sz="1300" dirty="0"/>
           </a:p>
           <a:p>
-            <a:pPr indent="0" marL="0">
+            <a:pPr marL="0" indent="0">
               <a:buNone/>
             </a:pPr>
             <a:r>
@@ -21064,7 +21235,7 @@
             <a:endParaRPr lang="en-US" sz="1300" dirty="0"/>
           </a:p>
           <a:p>
-            <a:pPr indent="0" marL="0">
+            <a:pPr marL="0" indent="0">
               <a:buNone/>
             </a:pPr>
             <a:r>
@@ -21081,7 +21252,7 @@
             <a:endParaRPr lang="en-US" sz="1300" dirty="0"/>
           </a:p>
           <a:p>
-            <a:pPr indent="0" marL="0">
+            <a:pPr marL="0" indent="0">
               <a:buNone/>
             </a:pPr>
             <a:r>
@@ -21098,7 +21269,7 @@
             <a:endParaRPr lang="en-US" sz="1300" dirty="0"/>
           </a:p>
           <a:p>
-            <a:pPr indent="0" marL="0">
+            <a:pPr marL="0" indent="0">
               <a:buNone/>
             </a:pPr>
             <a:r>
@@ -21115,7 +21286,7 @@
             <a:endParaRPr lang="en-US" sz="1300" dirty="0"/>
           </a:p>
           <a:p>
-            <a:pPr indent="0" marL="0">
+            <a:pPr marL="0" indent="0">
               <a:buNone/>
             </a:pPr>
             <a:r>
@@ -21132,7 +21303,7 @@
             <a:endParaRPr lang="en-US" sz="1300" dirty="0"/>
           </a:p>
           <a:p>
-            <a:pPr indent="0" marL="0">
+            <a:pPr marL="0" indent="0">
               <a:buNone/>
             </a:pPr>
             <a:r>
@@ -21149,7 +21320,7 @@
             <a:endParaRPr lang="en-US" sz="1300" dirty="0"/>
           </a:p>
           <a:p>
-            <a:pPr indent="0" marL="0">
+            <a:pPr marL="0" indent="0">
               <a:buNone/>
             </a:pPr>
             <a:r>
@@ -21166,7 +21337,7 @@
             <a:endParaRPr lang="en-US" sz="1300" dirty="0"/>
           </a:p>
           <a:p>
-            <a:pPr indent="0" marL="0">
+            <a:pPr marL="0" indent="0">
               <a:buNone/>
             </a:pPr>
             <a:r>
@@ -21183,7 +21354,7 @@
             <a:endParaRPr lang="en-US" sz="1300" dirty="0"/>
           </a:p>
           <a:p>
-            <a:pPr indent="0" marL="0">
+            <a:pPr marL="0" indent="0">
               <a:buNone/>
             </a:pPr>
             <a:r>
@@ -21200,7 +21371,7 @@
             <a:endParaRPr lang="en-US" sz="1300" dirty="0"/>
           </a:p>
           <a:p>
-            <a:pPr indent="0" marL="0">
+            <a:pPr marL="0" indent="0">
               <a:buNone/>
             </a:pPr>
             <a:r>
@@ -21242,6 +21413,13 @@
             <a:prstDash val="solid"/>
           </a:ln>
         </p:spPr>
+        <p:txBody>
+          <a:bodyPr/>
+          <a:lstStyle/>
+          <a:p>
+            <a:endParaRPr lang="en-US"/>
+          </a:p>
+        </p:txBody>
       </p:sp>
       <p:sp>
         <p:nvSpPr>
@@ -21264,7 +21442,7 @@
           <a:bodyPr wrap="square" rtlCol="0" anchor="ctr"/>
           <a:lstStyle/>
           <a:p>
-            <a:pPr indent="0" marL="0">
+            <a:pPr marL="0" indent="0">
               <a:buNone/>
             </a:pPr>
             <a:r>
@@ -21298,6 +21476,7 @@
         <a:solidFill>
           <a:srgbClr val="F5F5F5"/>
         </a:solidFill>
+        <a:effectLst/>
       </p:bgPr>
     </p:bg>
     <p:spTree>
@@ -21335,7 +21514,7 @@
           <a:bodyPr wrap="square" lIns="0" tIns="0" rIns="0" bIns="0" rtlCol="0" anchor="ctr"/>
           <a:lstStyle/>
           <a:p>
-            <a:pPr indent="0" marL="0">
+            <a:pPr marL="0" indent="0">
               <a:buNone/>
             </a:pPr>
             <a:r>
@@ -21372,6 +21551,13 @@
           </a:solidFill>
           <a:ln/>
         </p:spPr>
+        <p:txBody>
+          <a:bodyPr/>
+          <a:lstStyle/>
+          <a:p>
+            <a:endParaRPr lang="en-US"/>
+          </a:p>
+        </p:txBody>
       </p:sp>
       <p:sp>
         <p:nvSpPr>
@@ -21392,6 +21578,13 @@
           </a:solidFill>
           <a:ln/>
         </p:spPr>
+        <p:txBody>
+          <a:bodyPr/>
+          <a:lstStyle/>
+          <a:p>
+            <a:endParaRPr lang="en-US"/>
+          </a:p>
+        </p:txBody>
       </p:sp>
       <p:sp>
         <p:nvSpPr>
@@ -21414,7 +21607,7 @@
           <a:bodyPr wrap="square" rtlCol="0" anchor="t"/>
           <a:lstStyle/>
           <a:p>
-            <a:pPr indent="0" marL="0">
+            <a:pPr marL="0" indent="0">
               <a:buNone/>
             </a:pPr>
             <a:r>
@@ -21431,7 +21624,7 @@
             <a:endParaRPr lang="en-US" sz="1100" dirty="0"/>
           </a:p>
           <a:p>
-            <a:pPr indent="0" marL="0">
+            <a:pPr marL="0" indent="0">
               <a:buNone/>
             </a:pPr>
             <a:r>
@@ -21448,7 +21641,7 @@
             <a:endParaRPr lang="en-US" sz="1100" dirty="0"/>
           </a:p>
           <a:p>
-            <a:pPr indent="0" marL="0">
+            <a:pPr marL="0" indent="0">
               <a:buNone/>
             </a:pPr>
             <a:r>
@@ -21465,7 +21658,7 @@
             <a:endParaRPr lang="en-US" sz="1100" dirty="0"/>
           </a:p>
           <a:p>
-            <a:pPr indent="0" marL="0">
+            <a:pPr marL="0" indent="0">
               <a:buNone/>
             </a:pPr>
             <a:r>
@@ -21482,7 +21675,7 @@
             <a:endParaRPr lang="en-US" sz="1100" dirty="0"/>
           </a:p>
           <a:p>
-            <a:pPr indent="0" marL="0">
+            <a:pPr marL="0" indent="0">
               <a:buNone/>
             </a:pPr>
             <a:r>
@@ -21499,7 +21692,7 @@
             <a:endParaRPr lang="en-US" sz="1100" dirty="0"/>
           </a:p>
           <a:p>
-            <a:pPr indent="0" marL="0">
+            <a:pPr marL="0" indent="0">
               <a:buNone/>
             </a:pPr>
             <a:r>
@@ -21536,6 +21729,13 @@
           </a:solidFill>
           <a:ln/>
         </p:spPr>
+        <p:txBody>
+          <a:bodyPr/>
+          <a:lstStyle/>
+          <a:p>
+            <a:endParaRPr lang="en-US"/>
+          </a:p>
+        </p:txBody>
       </p:sp>
       <p:sp>
         <p:nvSpPr>
@@ -21558,7 +21758,7 @@
           <a:bodyPr wrap="square" rtlCol="0" anchor="t"/>
           <a:lstStyle/>
           <a:p>
-            <a:pPr indent="0" marL="0">
+            <a:pPr marL="0" indent="0">
               <a:buNone/>
             </a:pPr>
             <a:r>
@@ -21575,7 +21775,7 @@
             <a:endParaRPr lang="en-US" sz="1100" dirty="0"/>
           </a:p>
           <a:p>
-            <a:pPr indent="0" marL="0">
+            <a:pPr marL="0" indent="0">
               <a:buNone/>
             </a:pPr>
             <a:r>
@@ -21592,7 +21792,7 @@
             <a:endParaRPr lang="en-US" sz="1100" dirty="0"/>
           </a:p>
           <a:p>
-            <a:pPr indent="0" marL="0">
+            <a:pPr marL="0" indent="0">
               <a:buNone/>
             </a:pPr>
             <a:r>
@@ -21609,7 +21809,7 @@
             <a:endParaRPr lang="en-US" sz="1100" dirty="0"/>
           </a:p>
           <a:p>
-            <a:pPr indent="0" marL="0">
+            <a:pPr marL="0" indent="0">
               <a:buNone/>
             </a:pPr>
             <a:r>
@@ -21626,13 +21826,13 @@
             <a:endParaRPr lang="en-US" sz="1100" dirty="0"/>
           </a:p>
           <a:p>
-            <a:pPr indent="0" marL="0">
+            <a:pPr marL="0" indent="0">
               <a:buNone/>
             </a:pPr>
             <a:endParaRPr lang="en-US" sz="1100" dirty="0"/>
           </a:p>
           <a:p>
-            <a:pPr indent="0" marL="0">
+            <a:pPr marL="0" indent="0">
               <a:buNone/>
             </a:pPr>
             <a:r>
@@ -21649,7 +21849,7 @@
             <a:endParaRPr lang="en-US" sz="1100" dirty="0"/>
           </a:p>
           <a:p>
-            <a:pPr indent="0" marL="0">
+            <a:pPr marL="0" indent="0">
               <a:buNone/>
             </a:pPr>
             <a:r>
@@ -21666,7 +21866,7 @@
             <a:endParaRPr lang="en-US" sz="1100" dirty="0"/>
           </a:p>
           <a:p>
-            <a:pPr indent="0" marL="0">
+            <a:pPr marL="0" indent="0">
               <a:buNone/>
             </a:pPr>
             <a:r>
@@ -21708,6 +21908,13 @@
             <a:prstDash val="solid"/>
           </a:ln>
         </p:spPr>
+        <p:txBody>
+          <a:bodyPr/>
+          <a:lstStyle/>
+          <a:p>
+            <a:endParaRPr lang="en-US"/>
+          </a:p>
+        </p:txBody>
       </p:sp>
       <p:sp>
         <p:nvSpPr>
@@ -21728,6 +21935,13 @@
           </a:solidFill>
           <a:ln/>
         </p:spPr>
+        <p:txBody>
+          <a:bodyPr/>
+          <a:lstStyle/>
+          <a:p>
+            <a:endParaRPr lang="en-US"/>
+          </a:p>
+        </p:txBody>
       </p:sp>
       <p:sp>
         <p:nvSpPr>
@@ -21750,7 +21964,7 @@
           <a:bodyPr wrap="square" rtlCol="0" anchor="ctr"/>
           <a:lstStyle/>
           <a:p>
-            <a:pPr indent="0" marL="0">
+            <a:pPr marL="0" indent="0">
               <a:buNone/>
             </a:pPr>
             <a:r>
@@ -21789,7 +22003,7 @@
           <a:bodyPr wrap="square" rtlCol="0" anchor="ctr"/>
           <a:lstStyle/>
           <a:p>
-            <a:pPr indent="0" marL="0">
+            <a:pPr marL="0" indent="0">
               <a:buNone/>
             </a:pPr>
             <a:r>
@@ -21803,9 +22017,6 @@
               </a:rPr>
               <a:t>"Sometimes </a:t>
             </a:r>
-            <a:pPr indent="0" marL="0">
-              <a:buNone/>
-            </a:pPr>
             <a:r>
               <a:rPr lang="en-US" sz="1800" i="1" dirty="0">
                 <a:solidFill>
@@ -21817,9 +22028,6 @@
               </a:rPr>
               <a:t>send()</a:t>
             </a:r>
-            <a:pPr indent="0" marL="0">
-              <a:buNone/>
-            </a:pPr>
             <a:r>
               <a:rPr lang="en-US" sz="1800" i="1" dirty="0">
                 <a:solidFill>
@@ -21856,7 +22064,7 @@
           <a:bodyPr wrap="square" rtlCol="0" anchor="ctr"/>
           <a:lstStyle/>
           <a:p>
-            <a:pPr algn="ctr" indent="0" marL="0">
+            <a:pPr marL="0" indent="0" algn="ctr">
               <a:buNone/>
             </a:pPr>
             <a:r>
@@ -21890,6 +22098,7 @@
         <a:solidFill>
           <a:srgbClr val="1E1E1E"/>
         </a:solidFill>
+        <a:effectLst/>
       </p:bgPr>
     </p:bg>
     <p:spTree>
@@ -21927,7 +22136,7 @@
           <a:bodyPr wrap="square" rtlCol="0" anchor="ctr"/>
           <a:lstStyle/>
           <a:p>
-            <a:pPr indent="0" marL="0">
+            <a:pPr marL="0" indent="0">
               <a:buNone/>
             </a:pPr>
             <a:r>
@@ -21966,7 +22175,7 @@
           <a:bodyPr wrap="square" rtlCol="0" anchor="ctr"/>
           <a:lstStyle/>
           <a:p>
-            <a:pPr indent="0" marL="0">
+            <a:pPr marL="0" indent="0">
               <a:buNone/>
             </a:pPr>
             <a:r>
@@ -22010,6 +22219,13 @@
             <a:prstDash val="solid"/>
           </a:ln>
         </p:spPr>
+        <p:txBody>
+          <a:bodyPr/>
+          <a:lstStyle/>
+          <a:p>
+            <a:endParaRPr lang="en-US"/>
+          </a:p>
+        </p:txBody>
       </p:sp>
       <p:sp>
         <p:nvSpPr>
@@ -22032,7 +22248,7 @@
           <a:bodyPr wrap="square" rtlCol="0" anchor="ctr"/>
           <a:lstStyle/>
           <a:p>
-            <a:pPr algn="ctr" indent="0" marL="0">
+            <a:pPr marL="0" indent="0" algn="ctr">
               <a:buNone/>
             </a:pPr>
             <a:r>
@@ -22071,7 +22287,7 @@
           <a:bodyPr wrap="square" rtlCol="0" anchor="ctr"/>
           <a:lstStyle/>
           <a:p>
-            <a:pPr algn="ctr" indent="0" marL="0">
+            <a:pPr marL="0" indent="0" algn="ctr">
               <a:buNone/>
             </a:pPr>
             <a:r>
@@ -22105,6 +22321,7 @@
         <a:solidFill>
           <a:srgbClr val="F5F5F5"/>
         </a:solidFill>
+        <a:effectLst/>
       </p:bgPr>
     </p:bg>
     <p:spTree>
@@ -22142,7 +22359,7 @@
           <a:bodyPr wrap="square" lIns="0" tIns="0" rIns="0" bIns="0" rtlCol="0" anchor="ctr"/>
           <a:lstStyle/>
           <a:p>
-            <a:pPr indent="0" marL="0">
+            <a:pPr marL="0" indent="0">
               <a:buNone/>
             </a:pPr>
             <a:r>
@@ -22179,6 +22396,13 @@
           </a:solidFill>
           <a:ln/>
         </p:spPr>
+        <p:txBody>
+          <a:bodyPr/>
+          <a:lstStyle/>
+          <a:p>
+            <a:endParaRPr lang="en-US"/>
+          </a:p>
+        </p:txBody>
       </p:sp>
       <p:graphicFrame>
         <p:nvGraphicFramePr>
@@ -22196,18 +22420,48 @@
         </p:nvGraphicFramePr>
         <p:xfrm>
           <a:off x="274320" y="914400"/>
-          <a:ext cx="8595360" cy="2103120"/>
+          <a:ext cx="7040880" cy="2103120"/>
         </p:xfrm>
         <a:graphic>
           <a:graphicData uri="http://schemas.openxmlformats.org/drawingml/2006/table">
             <a:tbl>
               <a:tblPr/>
               <a:tblGrid>
-                <a:gridCol w="548640"/>
-                <a:gridCol w="1737360"/>
-                <a:gridCol w="1188720"/>
-                <a:gridCol w="2377440"/>
-                <a:gridCol w="1188720"/>
+                <a:gridCol w="548640">
+                  <a:extLst>
+                    <a:ext uri="{9D8B030D-6E8A-4147-A177-3AD203B41FA5}">
+                      <a16:colId xmlns:a16="http://schemas.microsoft.com/office/drawing/2014/main" val="20000"/>
+                    </a:ext>
+                  </a:extLst>
+                </a:gridCol>
+                <a:gridCol w="1737360">
+                  <a:extLst>
+                    <a:ext uri="{9D8B030D-6E8A-4147-A177-3AD203B41FA5}">
+                      <a16:colId xmlns:a16="http://schemas.microsoft.com/office/drawing/2014/main" val="20001"/>
+                    </a:ext>
+                  </a:extLst>
+                </a:gridCol>
+                <a:gridCol w="1188720">
+                  <a:extLst>
+                    <a:ext uri="{9D8B030D-6E8A-4147-A177-3AD203B41FA5}">
+                      <a16:colId xmlns:a16="http://schemas.microsoft.com/office/drawing/2014/main" val="20002"/>
+                    </a:ext>
+                  </a:extLst>
+                </a:gridCol>
+                <a:gridCol w="2377440">
+                  <a:extLst>
+                    <a:ext uri="{9D8B030D-6E8A-4147-A177-3AD203B41FA5}">
+                      <a16:colId xmlns:a16="http://schemas.microsoft.com/office/drawing/2014/main" val="20003"/>
+                    </a:ext>
+                  </a:extLst>
+                </a:gridCol>
+                <a:gridCol w="1188720">
+                  <a:extLst>
+                    <a:ext uri="{9D8B030D-6E8A-4147-A177-3AD203B41FA5}">
+                      <a16:colId xmlns:a16="http://schemas.microsoft.com/office/drawing/2014/main" val="20004"/>
+                    </a:ext>
+                  </a:extLst>
+                </a:gridCol>
               </a:tblGrid>
               <a:tr h="420624">
                 <a:tc>
@@ -22215,7 +22469,7 @@
                     <a:bodyPr/>
                     <a:lstStyle/>
                     <a:p>
-                      <a:pPr algn="ctr" indent="0" marL="0">
+                      <a:pPr marL="0" indent="0" algn="ctr">
                         <a:buNone/>
                       </a:pPr>
                       <a:r>
@@ -22236,7 +22490,7 @@
                       </a:endParaRPr>
                     </a:p>
                   </a:txBody>
-                  <a:tcPr marL="91440" marR="91440" marT="45720" marB="45720" anchor="ctr">
+                  <a:tcPr anchor="ctr">
                     <a:lnL w="6350" cap="flat" cmpd="sng" algn="ctr">
                       <a:solidFill>
                         <a:srgbClr val="D1D5DB"/>
@@ -22283,7 +22537,7 @@
                     <a:bodyPr/>
                     <a:lstStyle/>
                     <a:p>
-                      <a:pPr algn="ctr" indent="0" marL="0">
+                      <a:pPr marL="0" indent="0" algn="ctr">
                         <a:buNone/>
                       </a:pPr>
                       <a:r>
@@ -22304,7 +22558,7 @@
                       </a:endParaRPr>
                     </a:p>
                   </a:txBody>
-                  <a:tcPr marL="91440" marR="91440" marT="45720" marB="45720" anchor="ctr">
+                  <a:tcPr anchor="ctr">
                     <a:lnL w="6350" cap="flat" cmpd="sng" algn="ctr">
                       <a:solidFill>
                         <a:srgbClr val="D1D5DB"/>
@@ -22351,7 +22605,7 @@
                     <a:bodyPr/>
                     <a:lstStyle/>
                     <a:p>
-                      <a:pPr algn="ctr" indent="0" marL="0">
+                      <a:pPr marL="0" indent="0" algn="ctr">
                         <a:buNone/>
                       </a:pPr>
                       <a:r>
@@ -22372,7 +22626,7 @@
                       </a:endParaRPr>
                     </a:p>
                   </a:txBody>
-                  <a:tcPr marL="91440" marR="91440" marT="45720" marB="45720" anchor="ctr">
+                  <a:tcPr anchor="ctr">
                     <a:lnL w="6350" cap="flat" cmpd="sng" algn="ctr">
                       <a:solidFill>
                         <a:srgbClr val="D1D5DB"/>
@@ -22419,7 +22673,7 @@
                     <a:bodyPr/>
                     <a:lstStyle/>
                     <a:p>
-                      <a:pPr algn="ctr" indent="0" marL="0">
+                      <a:pPr marL="0" indent="0" algn="ctr">
                         <a:buNone/>
                       </a:pPr>
                       <a:r>
@@ -22440,7 +22694,7 @@
                       </a:endParaRPr>
                     </a:p>
                   </a:txBody>
-                  <a:tcPr marL="91440" marR="91440" marT="45720" marB="45720" anchor="ctr">
+                  <a:tcPr anchor="ctr">
                     <a:lnL w="6350" cap="flat" cmpd="sng" algn="ctr">
                       <a:solidFill>
                         <a:srgbClr val="D1D5DB"/>
@@ -22487,7 +22741,7 @@
                     <a:bodyPr/>
                     <a:lstStyle/>
                     <a:p>
-                      <a:pPr algn="ctr" indent="0" marL="0">
+                      <a:pPr marL="0" indent="0" algn="ctr">
                         <a:buNone/>
                       </a:pPr>
                       <a:r>
@@ -22508,7 +22762,7 @@
                       </a:endParaRPr>
                     </a:p>
                   </a:txBody>
-                  <a:tcPr marL="91440" marR="91440" marT="45720" marB="45720" anchor="ctr">
+                  <a:tcPr anchor="ctr">
                     <a:lnL w="6350" cap="flat" cmpd="sng" algn="ctr">
                       <a:solidFill>
                         <a:srgbClr val="D1D5DB"/>
@@ -22550,6 +22804,11 @@
                     </a:solidFill>
                   </a:tcPr>
                 </a:tc>
+                <a:extLst>
+                  <a:ext uri="{0D108BD9-81ED-4DB2-BD59-A6C34878D82A}">
+                    <a16:rowId xmlns:a16="http://schemas.microsoft.com/office/drawing/2014/main" val="10000"/>
+                  </a:ext>
+                </a:extLst>
               </a:tr>
               <a:tr h="420624">
                 <a:tc>
@@ -22557,7 +22816,7 @@
                     <a:bodyPr/>
                     <a:lstStyle/>
                     <a:p>
-                      <a:pPr algn="ctr" indent="0" marL="0">
+                      <a:pPr marL="0" indent="0" algn="ctr">
                         <a:buNone/>
                       </a:pPr>
                       <a:r>
@@ -22578,7 +22837,7 @@
                       </a:endParaRPr>
                     </a:p>
                   </a:txBody>
-                  <a:tcPr marL="91440" marR="91440" marT="45720" marB="45720" anchor="ctr">
+                  <a:tcPr anchor="ctr">
                     <a:lnL w="6350" cap="flat" cmpd="sng" algn="ctr">
                       <a:solidFill>
                         <a:srgbClr val="D1D5DB"/>
@@ -22625,7 +22884,7 @@
                     <a:bodyPr/>
                     <a:lstStyle/>
                     <a:p>
-                      <a:pPr algn="ctr" indent="0" marL="0">
+                      <a:pPr marL="0" indent="0" algn="ctr">
                         <a:buNone/>
                       </a:pPr>
                       <a:r>
@@ -22646,7 +22905,7 @@
                       </a:endParaRPr>
                     </a:p>
                   </a:txBody>
-                  <a:tcPr marL="91440" marR="91440" marT="45720" marB="45720" anchor="ctr">
+                  <a:tcPr anchor="ctr">
                     <a:lnL w="6350" cap="flat" cmpd="sng" algn="ctr">
                       <a:solidFill>
                         <a:srgbClr val="D1D5DB"/>
@@ -22693,7 +22952,7 @@
                     <a:bodyPr/>
                     <a:lstStyle/>
                     <a:p>
-                      <a:pPr algn="ctr" indent="0" marL="0">
+                      <a:pPr marL="0" indent="0" algn="ctr">
                         <a:buNone/>
                       </a:pPr>
                       <a:r>
@@ -22714,7 +22973,7 @@
                       </a:endParaRPr>
                     </a:p>
                   </a:txBody>
-                  <a:tcPr marL="91440" marR="91440" marT="45720" marB="45720" anchor="ctr">
+                  <a:tcPr anchor="ctr">
                     <a:lnL w="6350" cap="flat" cmpd="sng" algn="ctr">
                       <a:solidFill>
                         <a:srgbClr val="D1D5DB"/>
@@ -22761,7 +23020,7 @@
                     <a:bodyPr/>
                     <a:lstStyle/>
                     <a:p>
-                      <a:pPr algn="ctr" indent="0" marL="0">
+                      <a:pPr marL="0" indent="0" algn="ctr">
                         <a:buNone/>
                       </a:pPr>
                       <a:r>
@@ -22782,7 +23041,7 @@
                       </a:endParaRPr>
                     </a:p>
                   </a:txBody>
-                  <a:tcPr marL="91440" marR="91440" marT="45720" marB="45720" anchor="ctr">
+                  <a:tcPr anchor="ctr">
                     <a:lnL w="6350" cap="flat" cmpd="sng" algn="ctr">
                       <a:solidFill>
                         <a:srgbClr val="D1D5DB"/>
@@ -22829,7 +23088,7 @@
                     <a:bodyPr/>
                     <a:lstStyle/>
                     <a:p>
-                      <a:pPr algn="ctr" indent="0" marL="0">
+                      <a:pPr marL="0" indent="0" algn="ctr">
                         <a:buNone/>
                       </a:pPr>
                       <a:r>
@@ -22850,7 +23109,7 @@
                       </a:endParaRPr>
                     </a:p>
                   </a:txBody>
-                  <a:tcPr marL="91440" marR="91440" marT="45720" marB="45720" anchor="ctr">
+                  <a:tcPr anchor="ctr">
                     <a:lnL w="6350" cap="flat" cmpd="sng" algn="ctr">
                       <a:solidFill>
                         <a:srgbClr val="D1D5DB"/>
@@ -22892,6 +23151,11 @@
                     </a:solidFill>
                   </a:tcPr>
                 </a:tc>
+                <a:extLst>
+                  <a:ext uri="{0D108BD9-81ED-4DB2-BD59-A6C34878D82A}">
+                    <a16:rowId xmlns:a16="http://schemas.microsoft.com/office/drawing/2014/main" val="10001"/>
+                  </a:ext>
+                </a:extLst>
               </a:tr>
               <a:tr h="420624">
                 <a:tc>
@@ -22899,7 +23163,7 @@
                     <a:bodyPr/>
                     <a:lstStyle/>
                     <a:p>
-                      <a:pPr algn="ctr" indent="0" marL="0">
+                      <a:pPr marL="0" indent="0" algn="ctr">
                         <a:buNone/>
                       </a:pPr>
                       <a:r>
@@ -22920,7 +23184,7 @@
                       </a:endParaRPr>
                     </a:p>
                   </a:txBody>
-                  <a:tcPr marL="91440" marR="91440" marT="45720" marB="45720" anchor="ctr">
+                  <a:tcPr anchor="ctr">
                     <a:lnL w="6350" cap="flat" cmpd="sng" algn="ctr">
                       <a:solidFill>
                         <a:srgbClr val="D1D5DB"/>
@@ -22967,7 +23231,7 @@
                     <a:bodyPr/>
                     <a:lstStyle/>
                     <a:p>
-                      <a:pPr algn="ctr" indent="0" marL="0">
+                      <a:pPr marL="0" indent="0" algn="ctr">
                         <a:buNone/>
                       </a:pPr>
                       <a:r>
@@ -22988,7 +23252,7 @@
                       </a:endParaRPr>
                     </a:p>
                   </a:txBody>
-                  <a:tcPr marL="91440" marR="91440" marT="45720" marB="45720" anchor="ctr">
+                  <a:tcPr anchor="ctr">
                     <a:lnL w="6350" cap="flat" cmpd="sng" algn="ctr">
                       <a:solidFill>
                         <a:srgbClr val="D1D5DB"/>
@@ -23035,7 +23299,7 @@
                     <a:bodyPr/>
                     <a:lstStyle/>
                     <a:p>
-                      <a:pPr algn="ctr" indent="0" marL="0">
+                      <a:pPr marL="0" indent="0" algn="ctr">
                         <a:buNone/>
                       </a:pPr>
                       <a:r>
@@ -23056,7 +23320,7 @@
                       </a:endParaRPr>
                     </a:p>
                   </a:txBody>
-                  <a:tcPr marL="91440" marR="91440" marT="45720" marB="45720" anchor="ctr">
+                  <a:tcPr anchor="ctr">
                     <a:lnL w="6350" cap="flat" cmpd="sng" algn="ctr">
                       <a:solidFill>
                         <a:srgbClr val="D1D5DB"/>
@@ -23103,7 +23367,7 @@
                     <a:bodyPr/>
                     <a:lstStyle/>
                     <a:p>
-                      <a:pPr algn="ctr" indent="0" marL="0">
+                      <a:pPr marL="0" indent="0" algn="ctr">
                         <a:buNone/>
                       </a:pPr>
                       <a:r>
@@ -23124,7 +23388,7 @@
                       </a:endParaRPr>
                     </a:p>
                   </a:txBody>
-                  <a:tcPr marL="91440" marR="91440" marT="45720" marB="45720" anchor="ctr">
+                  <a:tcPr anchor="ctr">
                     <a:lnL w="6350" cap="flat" cmpd="sng" algn="ctr">
                       <a:solidFill>
                         <a:srgbClr val="D1D5DB"/>
@@ -23171,7 +23435,7 @@
                     <a:bodyPr/>
                     <a:lstStyle/>
                     <a:p>
-                      <a:pPr algn="ctr" indent="0" marL="0">
+                      <a:pPr marL="0" indent="0" algn="ctr">
                         <a:buNone/>
                       </a:pPr>
                       <a:r>
@@ -23192,7 +23456,7 @@
                       </a:endParaRPr>
                     </a:p>
                   </a:txBody>
-                  <a:tcPr marL="91440" marR="91440" marT="45720" marB="45720" anchor="ctr">
+                  <a:tcPr anchor="ctr">
                     <a:lnL w="6350" cap="flat" cmpd="sng" algn="ctr">
                       <a:solidFill>
                         <a:srgbClr val="D1D5DB"/>
@@ -23234,6 +23498,11 @@
                     </a:solidFill>
                   </a:tcPr>
                 </a:tc>
+                <a:extLst>
+                  <a:ext uri="{0D108BD9-81ED-4DB2-BD59-A6C34878D82A}">
+                    <a16:rowId xmlns:a16="http://schemas.microsoft.com/office/drawing/2014/main" val="10002"/>
+                  </a:ext>
+                </a:extLst>
               </a:tr>
               <a:tr h="420624">
                 <a:tc>
@@ -23241,7 +23510,7 @@
                     <a:bodyPr/>
                     <a:lstStyle/>
                     <a:p>
-                      <a:pPr algn="ctr" indent="0" marL="0">
+                      <a:pPr marL="0" indent="0" algn="ctr">
                         <a:buNone/>
                       </a:pPr>
                       <a:r>
@@ -23262,7 +23531,7 @@
                       </a:endParaRPr>
                     </a:p>
                   </a:txBody>
-                  <a:tcPr marL="91440" marR="91440" marT="45720" marB="45720" anchor="ctr">
+                  <a:tcPr anchor="ctr">
                     <a:lnL w="6350" cap="flat" cmpd="sng" algn="ctr">
                       <a:solidFill>
                         <a:srgbClr val="D1D5DB"/>
@@ -23309,7 +23578,7 @@
                     <a:bodyPr/>
                     <a:lstStyle/>
                     <a:p>
-                      <a:pPr algn="ctr" indent="0" marL="0">
+                      <a:pPr marL="0" indent="0" algn="ctr">
                         <a:buNone/>
                       </a:pPr>
                       <a:r>
@@ -23330,7 +23599,7 @@
                       </a:endParaRPr>
                     </a:p>
                   </a:txBody>
-                  <a:tcPr marL="91440" marR="91440" marT="45720" marB="45720" anchor="ctr">
+                  <a:tcPr anchor="ctr">
                     <a:lnL w="6350" cap="flat" cmpd="sng" algn="ctr">
                       <a:solidFill>
                         <a:srgbClr val="D1D5DB"/>
@@ -23377,7 +23646,7 @@
                     <a:bodyPr/>
                     <a:lstStyle/>
                     <a:p>
-                      <a:pPr algn="ctr" indent="0" marL="0">
+                      <a:pPr marL="0" indent="0" algn="ctr">
                         <a:buNone/>
                       </a:pPr>
                       <a:r>
@@ -23398,7 +23667,7 @@
                       </a:endParaRPr>
                     </a:p>
                   </a:txBody>
-                  <a:tcPr marL="91440" marR="91440" marT="45720" marB="45720" anchor="ctr">
+                  <a:tcPr anchor="ctr">
                     <a:lnL w="6350" cap="flat" cmpd="sng" algn="ctr">
                       <a:solidFill>
                         <a:srgbClr val="D1D5DB"/>
@@ -23445,7 +23714,7 @@
                     <a:bodyPr/>
                     <a:lstStyle/>
                     <a:p>
-                      <a:pPr algn="ctr" indent="0" marL="0">
+                      <a:pPr marL="0" indent="0" algn="ctr">
                         <a:buNone/>
                       </a:pPr>
                       <a:r>
@@ -23466,7 +23735,7 @@
                       </a:endParaRPr>
                     </a:p>
                   </a:txBody>
-                  <a:tcPr marL="91440" marR="91440" marT="45720" marB="45720" anchor="ctr">
+                  <a:tcPr anchor="ctr">
                     <a:lnL w="6350" cap="flat" cmpd="sng" algn="ctr">
                       <a:solidFill>
                         <a:srgbClr val="D1D5DB"/>
@@ -23513,7 +23782,7 @@
                     <a:bodyPr/>
                     <a:lstStyle/>
                     <a:p>
-                      <a:pPr algn="ctr" indent="0" marL="0">
+                      <a:pPr marL="0" indent="0" algn="ctr">
                         <a:buNone/>
                       </a:pPr>
                       <a:r>
@@ -23534,7 +23803,7 @@
                       </a:endParaRPr>
                     </a:p>
                   </a:txBody>
-                  <a:tcPr marL="91440" marR="91440" marT="45720" marB="45720" anchor="ctr">
+                  <a:tcPr anchor="ctr">
                     <a:lnL w="6350" cap="flat" cmpd="sng" algn="ctr">
                       <a:solidFill>
                         <a:srgbClr val="D1D5DB"/>
@@ -23576,6 +23845,11 @@
                     </a:solidFill>
                   </a:tcPr>
                 </a:tc>
+                <a:extLst>
+                  <a:ext uri="{0D108BD9-81ED-4DB2-BD59-A6C34878D82A}">
+                    <a16:rowId xmlns:a16="http://schemas.microsoft.com/office/drawing/2014/main" val="10003"/>
+                  </a:ext>
+                </a:extLst>
               </a:tr>
               <a:tr h="420624">
                 <a:tc>
@@ -23583,7 +23857,7 @@
                     <a:bodyPr/>
                     <a:lstStyle/>
                     <a:p>
-                      <a:pPr algn="ctr" indent="0" marL="0">
+                      <a:pPr marL="0" indent="0" algn="ctr">
                         <a:buNone/>
                       </a:pPr>
                       <a:r>
@@ -23604,7 +23878,7 @@
                       </a:endParaRPr>
                     </a:p>
                   </a:txBody>
-                  <a:tcPr marL="91440" marR="91440" marT="45720" marB="45720" anchor="ctr">
+                  <a:tcPr anchor="ctr">
                     <a:lnL w="6350" cap="flat" cmpd="sng" algn="ctr">
                       <a:solidFill>
                         <a:srgbClr val="D1D5DB"/>
@@ -23651,7 +23925,7 @@
                     <a:bodyPr/>
                     <a:lstStyle/>
                     <a:p>
-                      <a:pPr algn="ctr" indent="0" marL="0">
+                      <a:pPr marL="0" indent="0" algn="ctr">
                         <a:buNone/>
                       </a:pPr>
                       <a:r>
@@ -23672,7 +23946,7 @@
                       </a:endParaRPr>
                     </a:p>
                   </a:txBody>
-                  <a:tcPr marL="91440" marR="91440" marT="45720" marB="45720" anchor="ctr">
+                  <a:tcPr anchor="ctr">
                     <a:lnL w="6350" cap="flat" cmpd="sng" algn="ctr">
                       <a:solidFill>
                         <a:srgbClr val="D1D5DB"/>
@@ -23719,7 +23993,7 @@
                     <a:bodyPr/>
                     <a:lstStyle/>
                     <a:p>
-                      <a:pPr algn="ctr" indent="0" marL="0">
+                      <a:pPr marL="0" indent="0" algn="ctr">
                         <a:buNone/>
                       </a:pPr>
                       <a:r>
@@ -23740,7 +24014,7 @@
                       </a:endParaRPr>
                     </a:p>
                   </a:txBody>
-                  <a:tcPr marL="91440" marR="91440" marT="45720" marB="45720" anchor="ctr">
+                  <a:tcPr anchor="ctr">
                     <a:lnL w="6350" cap="flat" cmpd="sng" algn="ctr">
                       <a:solidFill>
                         <a:srgbClr val="D1D5DB"/>
@@ -23787,7 +24061,7 @@
                     <a:bodyPr/>
                     <a:lstStyle/>
                     <a:p>
-                      <a:pPr algn="ctr" indent="0" marL="0">
+                      <a:pPr marL="0" indent="0" algn="ctr">
                         <a:buNone/>
                       </a:pPr>
                       <a:r>
@@ -23808,7 +24082,7 @@
                       </a:endParaRPr>
                     </a:p>
                   </a:txBody>
-                  <a:tcPr marL="91440" marR="91440" marT="45720" marB="45720" anchor="ctr">
+                  <a:tcPr anchor="ctr">
                     <a:lnL w="6350" cap="flat" cmpd="sng" algn="ctr">
                       <a:solidFill>
                         <a:srgbClr val="D1D5DB"/>
@@ -23855,7 +24129,7 @@
                     <a:bodyPr/>
                     <a:lstStyle/>
                     <a:p>
-                      <a:pPr algn="ctr" indent="0" marL="0">
+                      <a:pPr marL="0" indent="0" algn="ctr">
                         <a:buNone/>
                       </a:pPr>
                       <a:r>
@@ -23876,7 +24150,7 @@
                       </a:endParaRPr>
                     </a:p>
                   </a:txBody>
-                  <a:tcPr marL="91440" marR="91440" marT="45720" marB="45720" anchor="ctr">
+                  <a:tcPr anchor="ctr">
                     <a:lnL w="6350" cap="flat" cmpd="sng" algn="ctr">
                       <a:solidFill>
                         <a:srgbClr val="D1D5DB"/>
@@ -23918,6 +24192,11 @@
                     </a:solidFill>
                   </a:tcPr>
                 </a:tc>
+                <a:extLst>
+                  <a:ext uri="{0D108BD9-81ED-4DB2-BD59-A6C34878D82A}">
+                    <a16:rowId xmlns:a16="http://schemas.microsoft.com/office/drawing/2014/main" val="10004"/>
+                  </a:ext>
+                </a:extLst>
               </a:tr>
             </a:tbl>
           </a:graphicData>
@@ -23947,6 +24226,13 @@
             <a:prstDash val="solid"/>
           </a:ln>
         </p:spPr>
+        <p:txBody>
+          <a:bodyPr/>
+          <a:lstStyle/>
+          <a:p>
+            <a:endParaRPr lang="en-US"/>
+          </a:p>
+        </p:txBody>
       </p:sp>
       <p:sp>
         <p:nvSpPr>
@@ -23969,7 +24255,7 @@
           <a:bodyPr wrap="square" rtlCol="0" anchor="ctr"/>
           <a:lstStyle/>
           <a:p>
-            <a:pPr indent="0" marL="0">
+            <a:pPr marL="0" indent="0">
               <a:buNone/>
             </a:pPr>
             <a:r>
@@ -23983,9 +24269,6 @@
               </a:rPr>
               <a:t>Result: </a:t>
             </a:r>
-            <a:pPr indent="0" marL="0">
-              <a:buNone/>
-            </a:pPr>
             <a:r>
               <a:rPr lang="en-US" sz="1800" dirty="0">
                 <a:solidFill>
@@ -23997,9 +24280,6 @@
               </a:rPr>
               <a:t>State says </a:t>
             </a:r>
-            <a:pPr indent="0" marL="0">
-              <a:buNone/>
-            </a:pPr>
             <a:r>
               <a:rPr lang="en-US" sz="1800" b="1" dirty="0">
                 <a:solidFill>
@@ -24011,9 +24291,6 @@
               </a:rPr>
               <a:t>Connected</a:t>
             </a:r>
-            <a:pPr indent="0" marL="0">
-              <a:buNone/>
-            </a:pPr>
             <a:r>
               <a:rPr lang="en-US" sz="1800" dirty="0">
                 <a:solidFill>
@@ -24025,9 +24302,6 @@
               </a:rPr>
               <a:t>, but socket is </a:t>
             </a:r>
-            <a:pPr indent="0" marL="0">
-              <a:buNone/>
-            </a:pPr>
             <a:r>
               <a:rPr lang="en-US" sz="1800" b="1" dirty="0">
                 <a:solidFill>
@@ -24039,9 +24313,6 @@
               </a:rPr>
               <a:t>closed</a:t>
             </a:r>
-            <a:pPr indent="0" marL="0">
-              <a:buNone/>
-            </a:pPr>
             <a:r>
               <a:rPr lang="en-US" sz="1800" dirty="0">
                 <a:solidFill>
@@ -24078,7 +24349,7 @@
           <a:bodyPr wrap="square" rtlCol="0" anchor="ctr"/>
           <a:lstStyle/>
           <a:p>
-            <a:pPr indent="0" marL="0">
+            <a:pPr marL="0" indent="0">
               <a:buNone/>
             </a:pPr>
             <a:r>
@@ -24112,16 +24383,34 @@
         </p:nvGraphicFramePr>
         <p:xfrm>
           <a:off x="457200" y="4480560"/>
-          <a:ext cx="3657600" cy="640080"/>
+          <a:ext cx="3657600" cy="731520"/>
         </p:xfrm>
         <a:graphic>
           <a:graphicData uri="http://schemas.openxmlformats.org/drawingml/2006/table">
             <a:tbl>
               <a:tblPr/>
               <a:tblGrid>
-                <a:gridCol w="1219200"/>
-                <a:gridCol w="1219200"/>
-                <a:gridCol w="1219200"/>
+                <a:gridCol w="1219200">
+                  <a:extLst>
+                    <a:ext uri="{9D8B030D-6E8A-4147-A177-3AD203B41FA5}">
+                      <a16:colId xmlns:a16="http://schemas.microsoft.com/office/drawing/2014/main" val="20000"/>
+                    </a:ext>
+                  </a:extLst>
+                </a:gridCol>
+                <a:gridCol w="1219200">
+                  <a:extLst>
+                    <a:ext uri="{9D8B030D-6E8A-4147-A177-3AD203B41FA5}">
+                      <a16:colId xmlns:a16="http://schemas.microsoft.com/office/drawing/2014/main" val="20001"/>
+                    </a:ext>
+                  </a:extLst>
+                </a:gridCol>
+                <a:gridCol w="1219200">
+                  <a:extLst>
+                    <a:ext uri="{9D8B030D-6E8A-4147-A177-3AD203B41FA5}">
+                      <a16:colId xmlns:a16="http://schemas.microsoft.com/office/drawing/2014/main" val="20002"/>
+                    </a:ext>
+                  </a:extLst>
+                </a:gridCol>
               </a:tblGrid>
               <a:tr h="213360">
                 <a:tc>
@@ -24129,7 +24418,7 @@
                     <a:bodyPr/>
                     <a:lstStyle/>
                     <a:p>
-                      <a:pPr algn="ctr" indent="0" marL="0">
+                      <a:pPr marL="0" indent="0" algn="ctr">
                         <a:buNone/>
                       </a:pPr>
                       <a:r>
@@ -24150,7 +24439,7 @@
                       </a:endParaRPr>
                     </a:p>
                   </a:txBody>
-                  <a:tcPr marL="91440" marR="91440" marT="45720" marB="45720" anchor="ctr">
+                  <a:tcPr anchor="ctr">
                     <a:lnL w="6350" cap="flat" cmpd="sng" algn="ctr">
                       <a:solidFill>
                         <a:srgbClr val="D1D5DB"/>
@@ -24197,7 +24486,7 @@
                     <a:bodyPr/>
                     <a:lstStyle/>
                     <a:p>
-                      <a:pPr algn="ctr" indent="0" marL="0">
+                      <a:pPr marL="0" indent="0" algn="ctr">
                         <a:buNone/>
                       </a:pPr>
                       <a:r>
@@ -24218,7 +24507,7 @@
                       </a:endParaRPr>
                     </a:p>
                   </a:txBody>
-                  <a:tcPr marL="91440" marR="91440" marT="45720" marB="45720" anchor="ctr">
+                  <a:tcPr anchor="ctr">
                     <a:lnL w="6350" cap="flat" cmpd="sng" algn="ctr">
                       <a:solidFill>
                         <a:srgbClr val="D1D5DB"/>
@@ -24265,7 +24554,7 @@
                     <a:bodyPr/>
                     <a:lstStyle/>
                     <a:p>
-                      <a:pPr algn="ctr" indent="0" marL="0">
+                      <a:pPr marL="0" indent="0" algn="ctr">
                         <a:buNone/>
                       </a:pPr>
                       <a:r>
@@ -24286,7 +24575,7 @@
                       </a:endParaRPr>
                     </a:p>
                   </a:txBody>
-                  <a:tcPr marL="91440" marR="91440" marT="45720" marB="45720" anchor="ctr">
+                  <a:tcPr anchor="ctr">
                     <a:lnL w="6350" cap="flat" cmpd="sng" algn="ctr">
                       <a:solidFill>
                         <a:srgbClr val="D1D5DB"/>
@@ -24328,6 +24617,11 @@
                     </a:solidFill>
                   </a:tcPr>
                 </a:tc>
+                <a:extLst>
+                  <a:ext uri="{0D108BD9-81ED-4DB2-BD59-A6C34878D82A}">
+                    <a16:rowId xmlns:a16="http://schemas.microsoft.com/office/drawing/2014/main" val="10000"/>
+                  </a:ext>
+                </a:extLst>
               </a:tr>
               <a:tr h="213360">
                 <a:tc>
@@ -24335,7 +24629,7 @@
                     <a:bodyPr/>
                     <a:lstStyle/>
                     <a:p>
-                      <a:pPr algn="ctr" indent="0" marL="0">
+                      <a:pPr marL="0" indent="0" algn="ctr">
                         <a:buNone/>
                       </a:pPr>
                       <a:r>
@@ -24356,7 +24650,7 @@
                       </a:endParaRPr>
                     </a:p>
                   </a:txBody>
-                  <a:tcPr marL="91440" marR="91440" marT="45720" marB="45720" anchor="ctr">
+                  <a:tcPr anchor="ctr">
                     <a:lnL w="6350" cap="flat" cmpd="sng" algn="ctr">
                       <a:solidFill>
                         <a:srgbClr val="D1D5DB"/>
@@ -24403,7 +24697,7 @@
                     <a:bodyPr/>
                     <a:lstStyle/>
                     <a:p>
-                      <a:pPr algn="ctr" indent="0" marL="0">
+                      <a:pPr marL="0" indent="0" algn="ctr">
                         <a:buNone/>
                       </a:pPr>
                       <a:r>
@@ -24424,7 +24718,7 @@
                       </a:endParaRPr>
                     </a:p>
                   </a:txBody>
-                  <a:tcPr marL="91440" marR="91440" marT="45720" marB="45720" anchor="ctr">
+                  <a:tcPr anchor="ctr">
                     <a:lnL w="6350" cap="flat" cmpd="sng" algn="ctr">
                       <a:solidFill>
                         <a:srgbClr val="D1D5DB"/>
@@ -24471,7 +24765,7 @@
                     <a:bodyPr/>
                     <a:lstStyle/>
                     <a:p>
-                      <a:pPr algn="ctr" indent="0" marL="0">
+                      <a:pPr marL="0" indent="0" algn="ctr">
                         <a:buNone/>
                       </a:pPr>
                       <a:r>
@@ -24492,7 +24786,7 @@
                       </a:endParaRPr>
                     </a:p>
                   </a:txBody>
-                  <a:tcPr marL="91440" marR="91440" marT="45720" marB="45720" anchor="ctr">
+                  <a:tcPr anchor="ctr">
                     <a:lnL w="6350" cap="flat" cmpd="sng" algn="ctr">
                       <a:solidFill>
                         <a:srgbClr val="D1D5DB"/>
@@ -24534,6 +24828,11 @@
                     </a:solidFill>
                   </a:tcPr>
                 </a:tc>
+                <a:extLst>
+                  <a:ext uri="{0D108BD9-81ED-4DB2-BD59-A6C34878D82A}">
+                    <a16:rowId xmlns:a16="http://schemas.microsoft.com/office/drawing/2014/main" val="10001"/>
+                  </a:ext>
+                </a:extLst>
               </a:tr>
               <a:tr h="213360">
                 <a:tc>
@@ -24541,7 +24840,7 @@
                     <a:bodyPr/>
                     <a:lstStyle/>
                     <a:p>
-                      <a:pPr algn="ctr" indent="0" marL="0">
+                      <a:pPr marL="0" indent="0" algn="ctr">
                         <a:buNone/>
                       </a:pPr>
                       <a:r>
@@ -24562,7 +24861,7 @@
                       </a:endParaRPr>
                     </a:p>
                   </a:txBody>
-                  <a:tcPr marL="91440" marR="91440" marT="45720" marB="45720" anchor="ctr">
+                  <a:tcPr anchor="ctr">
                     <a:lnL w="6350" cap="flat" cmpd="sng" algn="ctr">
                       <a:solidFill>
                         <a:srgbClr val="D1D5DB"/>
@@ -24609,7 +24908,7 @@
                     <a:bodyPr/>
                     <a:lstStyle/>
                     <a:p>
-                      <a:pPr algn="ctr" indent="0" marL="0">
+                      <a:pPr marL="0" indent="0" algn="ctr">
                         <a:buNone/>
                       </a:pPr>
                       <a:r>
@@ -24630,7 +24929,7 @@
                       </a:endParaRPr>
                     </a:p>
                   </a:txBody>
-                  <a:tcPr marL="91440" marR="91440" marT="45720" marB="45720" anchor="ctr">
+                  <a:tcPr anchor="ctr">
                     <a:lnL w="6350" cap="flat" cmpd="sng" algn="ctr">
                       <a:solidFill>
                         <a:srgbClr val="D1D5DB"/>
@@ -24677,7 +24976,7 @@
                     <a:bodyPr/>
                     <a:lstStyle/>
                     <a:p>
-                      <a:pPr algn="ctr" indent="0" marL="0">
+                      <a:pPr marL="0" indent="0" algn="ctr">
                         <a:buNone/>
                       </a:pPr>
                       <a:r>
@@ -24698,7 +24997,7 @@
                       </a:endParaRPr>
                     </a:p>
                   </a:txBody>
-                  <a:tcPr marL="91440" marR="91440" marT="45720" marB="45720" anchor="ctr">
+                  <a:tcPr anchor="ctr">
                     <a:lnL w="6350" cap="flat" cmpd="sng" algn="ctr">
                       <a:solidFill>
                         <a:srgbClr val="D1D5DB"/>
@@ -24740,6 +25039,11 @@
                     </a:solidFill>
                   </a:tcPr>
                 </a:tc>
+                <a:extLst>
+                  <a:ext uri="{0D108BD9-81ED-4DB2-BD59-A6C34878D82A}">
+                    <a16:rowId xmlns:a16="http://schemas.microsoft.com/office/drawing/2014/main" val="10002"/>
+                  </a:ext>
+                </a:extLst>
               </a:tr>
             </a:tbl>
           </a:graphicData>
@@ -24766,7 +25070,7 @@
           <a:bodyPr wrap="square" rtlCol="0" anchor="ctr"/>
           <a:lstStyle/>
           <a:p>
-            <a:pPr indent="0" marL="0">
+            <a:pPr marL="0" indent="0">
               <a:buNone/>
             </a:pPr>
             <a:r>
@@ -24780,9 +25084,6 @@
               </a:rPr>
               <a:t>Step 3 violates this: </a:t>
             </a:r>
-            <a:pPr indent="0" marL="0">
-              <a:buNone/>
-            </a:pPr>
             <a:r>
               <a:rPr lang="en-US" sz="1300" dirty="0">
                 <a:solidFill>
@@ -24814,6 +25115,7 @@
         <a:solidFill>
           <a:srgbClr val="F5F5F5"/>
         </a:solidFill>
+        <a:effectLst/>
       </p:bgPr>
     </p:bg>
     <p:spTree>
@@ -24849,6 +25151,13 @@
           </a:solidFill>
           <a:ln/>
         </p:spPr>
+        <p:txBody>
+          <a:bodyPr/>
+          <a:lstStyle/>
+          <a:p>
+            <a:endParaRPr lang="en-US"/>
+          </a:p>
+        </p:txBody>
       </p:sp>
       <p:sp>
         <p:nvSpPr>
@@ -24871,7 +25180,7 @@
           <a:bodyPr wrap="square" rtlCol="0" anchor="ctr"/>
           <a:lstStyle/>
           <a:p>
-            <a:pPr indent="0" marL="0">
+            <a:pPr marL="0" indent="0">
               <a:buNone/>
             </a:pPr>
             <a:r>
@@ -24912,7 +25221,7 @@
           <a:bodyPr wrap="square" rtlCol="0" anchor="ctr"/>
           <a:lstStyle/>
           <a:p>
-            <a:pPr algn="ctr" indent="0" marL="0">
+            <a:pPr marL="0" indent="0" algn="ctr">
               <a:buNone/>
             </a:pPr>
             <a:r>
@@ -24951,7 +25260,7 @@
           <a:bodyPr wrap="square" rtlCol="0" anchor="ctr"/>
           <a:lstStyle/>
           <a:p>
-            <a:pPr indent="0" marL="0">
+            <a:pPr marL="0" indent="0">
               <a:buNone/>
             </a:pPr>
             <a:r>
@@ -24965,9 +25274,6 @@
               </a:rPr>
               <a:t>Late callback corrupts state</a:t>
             </a:r>
-            <a:pPr indent="0" marL="0">
-              <a:buNone/>
-            </a:pPr>
             <a:r>
               <a:rPr lang="en-US" sz="1400" dirty="0">
                 <a:solidFill>
@@ -25006,7 +25312,7 @@
           <a:bodyPr wrap="square" rtlCol="0" anchor="ctr"/>
           <a:lstStyle/>
           <a:p>
-            <a:pPr algn="ctr" indent="0" marL="0">
+            <a:pPr marL="0" indent="0" algn="ctr">
               <a:buNone/>
             </a:pPr>
             <a:r>
@@ -25045,7 +25351,7 @@
           <a:bodyPr wrap="square" rtlCol="0" anchor="ctr"/>
           <a:lstStyle/>
           <a:p>
-            <a:pPr indent="0" marL="0">
+            <a:pPr marL="0" indent="0">
               <a:buNone/>
             </a:pPr>
             <a:r>
@@ -25059,9 +25365,6 @@
               </a:rPr>
               <a:t>on_socket_error doesn't close socket</a:t>
             </a:r>
-            <a:pPr indent="0" marL="0">
-              <a:buNone/>
-            </a:pPr>
             <a:r>
               <a:rPr lang="en-US" sz="1400" dirty="0">
                 <a:solidFill>
@@ -25100,7 +25403,7 @@
           <a:bodyPr wrap="square" rtlCol="0" anchor="ctr"/>
           <a:lstStyle/>
           <a:p>
-            <a:pPr algn="ctr" indent="0" marL="0">
+            <a:pPr marL="0" indent="0" algn="ctr">
               <a:buNone/>
             </a:pPr>
             <a:r>
@@ -25139,7 +25442,7 @@
           <a:bodyPr wrap="square" rtlCol="0" anchor="ctr"/>
           <a:lstStyle/>
           <a:p>
-            <a:pPr indent="0" marL="0">
+            <a:pPr marL="0" indent="0">
               <a:buNone/>
             </a:pPr>
             <a:r>
@@ -25153,9 +25456,6 @@
               </a:rPr>
               <a:t>send() silently drops data</a:t>
             </a:r>
-            <a:pPr indent="0" marL="0">
-              <a:buNone/>
-            </a:pPr>
             <a:r>
               <a:rPr lang="en-US" sz="1400" dirty="0">
                 <a:solidFill>
@@ -25190,6 +25490,13 @@
           </a:solidFill>
           <a:ln/>
         </p:spPr>
+        <p:txBody>
+          <a:bodyPr/>
+          <a:lstStyle/>
+          <a:p>
+            <a:endParaRPr lang="en-US"/>
+          </a:p>
+        </p:txBody>
       </p:sp>
       <p:sp>
         <p:nvSpPr>
@@ -25212,7 +25519,7 @@
           <a:bodyPr wrap="square" rtlCol="0" anchor="ctr"/>
           <a:lstStyle/>
           <a:p>
-            <a:pPr indent="0" marL="0">
+            <a:pPr marL="0" indent="0">
               <a:buNone/>
             </a:pPr>
             <a:r>
@@ -25251,7 +25558,7 @@
           <a:bodyPr wrap="square" rtlCol="0" anchor="ctr"/>
           <a:lstStyle/>
           <a:p>
-            <a:pPr indent="0" marL="0">
+            <a:pPr marL="0" indent="0">
               <a:buNone/>
             </a:pPr>
             <a:r>
@@ -25265,9 +25572,6 @@
               </a:rPr>
               <a:t>4. Transition rules scattered</a:t>
             </a:r>
-            <a:pPr indent="0" marL="0">
-              <a:buNone/>
-            </a:pPr>
             <a:r>
               <a:rPr lang="en-US" sz="1300" dirty="0">
                 <a:solidFill>
@@ -25282,7 +25586,7 @@
             <a:endParaRPr lang="en-US" sz="1300" dirty="0"/>
           </a:p>
           <a:p>
-            <a:pPr indent="0" marL="0">
+            <a:pPr marL="0" indent="0">
               <a:buNone/>
             </a:pPr>
             <a:r>
@@ -25296,9 +25600,6 @@
               </a:rPr>
               <a:t>5. Entry/exit actions inconsistent</a:t>
             </a:r>
-            <a:pPr indent="0" marL="0">
-              <a:buNone/>
-            </a:pPr>
             <a:r>
               <a:rPr lang="en-US" sz="1300" dirty="0">
                 <a:solidFill>
@@ -25313,7 +25614,7 @@
             <a:endParaRPr lang="en-US" sz="1300" dirty="0"/>
           </a:p>
           <a:p>
-            <a:pPr indent="0" marL="0">
+            <a:pPr marL="0" indent="0">
               <a:buNone/>
             </a:pPr>
             <a:r>
@@ -25327,9 +25628,6 @@
               </a:rPr>
               <a:t>6. No enforcement</a:t>
             </a:r>
-            <a:pPr indent="0" marL="0">
-              <a:buNone/>
-            </a:pPr>
             <a:r>
               <a:rPr lang="en-US" sz="1300" dirty="0">
                 <a:solidFill>
@@ -25341,9 +25639,6 @@
               </a:rPr>
               <a:t> — nothing prevents </a:t>
             </a:r>
-            <a:pPr indent="0" marL="0">
-              <a:buNone/>
-            </a:pPr>
             <a:r>
               <a:rPr lang="en-US" sz="1300" dirty="0">
                 <a:solidFill>
@@ -25355,9 +25650,6 @@
               </a:rPr>
               <a:t>state_ = Connected</a:t>
             </a:r>
-            <a:pPr indent="0" marL="0">
-              <a:buNone/>
-            </a:pPr>
             <a:r>
               <a:rPr lang="en-US" sz="1300" dirty="0">
                 <a:solidFill>
@@ -25392,6 +25684,13 @@
           </a:solidFill>
           <a:ln/>
         </p:spPr>
+        <p:txBody>
+          <a:bodyPr/>
+          <a:lstStyle/>
+          <a:p>
+            <a:endParaRPr lang="en-US"/>
+          </a:p>
+        </p:txBody>
       </p:sp>
       <p:sp>
         <p:nvSpPr>
@@ -25414,7 +25713,7 @@
           <a:bodyPr wrap="square" rtlCol="0" anchor="ctr"/>
           <a:lstStyle/>
           <a:p>
-            <a:pPr indent="0" marL="0">
+            <a:pPr marL="0" indent="0">
               <a:buNone/>
             </a:pPr>
             <a:r>
@@ -25453,7 +25752,7 @@
           <a:bodyPr wrap="square" rtlCol="0" anchor="ctr"/>
           <a:lstStyle/>
           <a:p>
-            <a:pPr indent="0" marL="0">
+            <a:pPr marL="0" indent="0">
               <a:buNone/>
             </a:pPr>
             <a:r>
@@ -25467,9 +25766,6 @@
               </a:rPr>
               <a:t>7. Data races on state_</a:t>
             </a:r>
-            <a:pPr indent="0" marL="0">
-              <a:buNone/>
-            </a:pPr>
             <a:r>
               <a:rPr lang="en-US" sz="1300" dirty="0">
                 <a:solidFill>
@@ -25501,6 +25797,7 @@
         <a:solidFill>
           <a:srgbClr val="1E1E1E"/>
         </a:solidFill>
+        <a:effectLst/>
       </p:bgPr>
     </p:bg>
     <p:spTree>
@@ -25538,7 +25835,7 @@
           <a:bodyPr wrap="square" rtlCol="0" anchor="ctr"/>
           <a:lstStyle/>
           <a:p>
-            <a:pPr indent="0" marL="0">
+            <a:pPr marL="0" indent="0">
               <a:buNone/>
             </a:pPr>
             <a:r>
@@ -25577,7 +25874,7 @@
           <a:bodyPr wrap="square" rtlCol="0" anchor="ctr"/>
           <a:lstStyle/>
           <a:p>
-            <a:pPr indent="0" marL="0">
+            <a:pPr marL="0" indent="0">
               <a:buNone/>
             </a:pPr>
             <a:r>
@@ -25616,7 +25913,7 @@
           <a:bodyPr wrap="square" rtlCol="0" anchor="ctr"/>
           <a:lstStyle/>
           <a:p>
-            <a:pPr indent="0" marL="0">
+            <a:pPr marL="0" indent="0">
               <a:buNone/>
             </a:pPr>
             <a:r>
@@ -25655,7 +25952,7 @@
           <a:bodyPr wrap="square" rtlCol="0" anchor="ctr"/>
           <a:lstStyle/>
           <a:p>
-            <a:pPr indent="0" marL="0">
+            <a:pPr marL="0" indent="0">
               <a:buNone/>
             </a:pPr>
             <a:r>
@@ -25694,7 +25991,7 @@
           <a:bodyPr wrap="square" rtlCol="0" anchor="ctr"/>
           <a:lstStyle/>
           <a:p>
-            <a:pPr indent="0" marL="0">
+            <a:pPr marL="0" indent="0">
               <a:buNone/>
             </a:pPr>
             <a:r>
@@ -25711,13 +26008,13 @@
             <a:endParaRPr lang="en-US" sz="2200" dirty="0"/>
           </a:p>
           <a:p>
-            <a:pPr indent="0" marL="0">
+            <a:pPr marL="0" indent="0">
               <a:buNone/>
             </a:pPr>
             <a:endParaRPr lang="en-US" sz="2200" dirty="0"/>
           </a:p>
           <a:p>
-            <a:pPr indent="0" marL="0">
+            <a:pPr marL="0" indent="0">
               <a:buNone/>
             </a:pPr>
             <a:r>
@@ -25734,13 +26031,13 @@
             <a:endParaRPr lang="en-US" sz="2200" dirty="0"/>
           </a:p>
           <a:p>
-            <a:pPr indent="0" marL="0">
+            <a:pPr marL="0" indent="0">
               <a:buNone/>
             </a:pPr>
             <a:endParaRPr lang="en-US" sz="2200" dirty="0"/>
           </a:p>
           <a:p>
-            <a:pPr indent="0" marL="0">
+            <a:pPr marL="0" indent="0">
               <a:buNone/>
             </a:pPr>
             <a:r>
@@ -26059,4 +26356,319 @@
     </a:ext>
   </a:extLst>
 </a:theme>
+</file>
+
+<file path=ppt/theme/theme2.xml><?xml version="1.0" encoding="utf-8"?>
+<a:theme xmlns:a="http://schemas.openxmlformats.org/drawingml/2006/main" name="Office Theme">
+  <a:themeElements>
+    <a:clrScheme name="Office">
+      <a:dk1>
+        <a:sysClr val="windowText" lastClr="000000"/>
+      </a:dk1>
+      <a:lt1>
+        <a:sysClr val="window" lastClr="FFFFFF"/>
+      </a:lt1>
+      <a:dk2>
+        <a:srgbClr val="0E2841"/>
+      </a:dk2>
+      <a:lt2>
+        <a:srgbClr val="E8E8E8"/>
+      </a:lt2>
+      <a:accent1>
+        <a:srgbClr val="156082"/>
+      </a:accent1>
+      <a:accent2>
+        <a:srgbClr val="E97132"/>
+      </a:accent2>
+      <a:accent3>
+        <a:srgbClr val="196B24"/>
+      </a:accent3>
+      <a:accent4>
+        <a:srgbClr val="0F9ED5"/>
+      </a:accent4>
+      <a:accent5>
+        <a:srgbClr val="A02B93"/>
+      </a:accent5>
+      <a:accent6>
+        <a:srgbClr val="4EA72E"/>
+      </a:accent6>
+      <a:hlink>
+        <a:srgbClr val="467886"/>
+      </a:hlink>
+      <a:folHlink>
+        <a:srgbClr val="96607D"/>
+      </a:folHlink>
+    </a:clrScheme>
+    <a:fontScheme name="Office">
+      <a:majorFont>
+        <a:latin typeface="Aptos Display" panose="02110004020202020204"/>
+        <a:ea typeface=""/>
+        <a:cs typeface=""/>
+        <a:font script="Jpan" typeface="游ゴシック Light"/>
+        <a:font script="Hang" typeface="맑은 고딕"/>
+        <a:font script="Hans" typeface="等线 Light"/>
+        <a:font script="Hant" typeface="新細明體"/>
+        <a:font script="Arab" typeface="Times New Roman"/>
+        <a:font script="Hebr" typeface="Times New Roman"/>
+        <a:font script="Thai" typeface="Angsana New"/>
+        <a:font script="Ethi" typeface="Nyala"/>
+        <a:font script="Beng" typeface="Vrinda"/>
+        <a:font script="Gujr" typeface="Shruti"/>
+        <a:font script="Khmr" typeface="MoolBoran"/>
+        <a:font script="Knda" typeface="Tunga"/>
+        <a:font script="Guru" typeface="Raavi"/>
+        <a:font script="Cans" typeface="Euphemia"/>
+        <a:font script="Cher" typeface="Plantagenet Cherokee"/>
+        <a:font script="Yiii" typeface="Microsoft Yi Baiti"/>
+        <a:font script="Tibt" typeface="Microsoft Himalaya"/>
+        <a:font script="Thaa" typeface="MV Boli"/>
+        <a:font script="Deva" typeface="Mangal"/>
+        <a:font script="Telu" typeface="Gautami"/>
+        <a:font script="Taml" typeface="Latha"/>
+        <a:font script="Syrc" typeface="Estrangelo Edessa"/>
+        <a:font script="Orya" typeface="Kalinga"/>
+        <a:font script="Mlym" typeface="Kartika"/>
+        <a:font script="Laoo" typeface="DokChampa"/>
+        <a:font script="Sinh" typeface="Iskoola Pota"/>
+        <a:font script="Mong" typeface="Mongolian Baiti"/>
+        <a:font script="Viet" typeface="Times New Roman"/>
+        <a:font script="Uigh" typeface="Microsoft Uighur"/>
+        <a:font script="Geor" typeface="Sylfaen"/>
+        <a:font script="Armn" typeface="Arial"/>
+        <a:font script="Bugi" typeface="Leelawadee UI"/>
+        <a:font script="Bopo" typeface="Microsoft JhengHei"/>
+        <a:font script="Java" typeface="Javanese Text"/>
+        <a:font script="Lisu" typeface="Segoe UI"/>
+        <a:font script="Mymr" typeface="Myanmar Text"/>
+        <a:font script="Nkoo" typeface="Ebrima"/>
+        <a:font script="Olck" typeface="Nirmala UI"/>
+        <a:font script="Osma" typeface="Ebrima"/>
+        <a:font script="Phag" typeface="Phagspa"/>
+        <a:font script="Syrn" typeface="Estrangelo Edessa"/>
+        <a:font script="Syrj" typeface="Estrangelo Edessa"/>
+        <a:font script="Syre" typeface="Estrangelo Edessa"/>
+        <a:font script="Sora" typeface="Nirmala UI"/>
+        <a:font script="Tale" typeface="Microsoft Tai Le"/>
+        <a:font script="Talu" typeface="Microsoft New Tai Lue"/>
+        <a:font script="Tfng" typeface="Ebrima"/>
+      </a:majorFont>
+      <a:minorFont>
+        <a:latin typeface="Aptos" panose="02110004020202020204"/>
+        <a:ea typeface=""/>
+        <a:cs typeface=""/>
+        <a:font script="Jpan" typeface="游ゴシック"/>
+        <a:font script="Hang" typeface="맑은 고딕"/>
+        <a:font script="Hans" typeface="等线"/>
+        <a:font script="Hant" typeface="新細明體"/>
+        <a:font script="Arab" typeface="Arial"/>
+        <a:font script="Hebr" typeface="Arial"/>
+        <a:font script="Thai" typeface="Cordia New"/>
+        <a:font script="Ethi" typeface="Nyala"/>
+        <a:font script="Beng" typeface="Vrinda"/>
+        <a:font script="Gujr" typeface="Shruti"/>
+        <a:font script="Khmr" typeface="DaunPenh"/>
+        <a:font script="Knda" typeface="Tunga"/>
+        <a:font script="Guru" typeface="Raavi"/>
+        <a:font script="Cans" typeface="Euphemia"/>
+        <a:font script="Cher" typeface="Plantagenet Cherokee"/>
+        <a:font script="Yiii" typeface="Microsoft Yi Baiti"/>
+        <a:font script="Tibt" typeface="Microsoft Himalaya"/>
+        <a:font script="Thaa" typeface="MV Boli"/>
+        <a:font script="Deva" typeface="Mangal"/>
+        <a:font script="Telu" typeface="Gautami"/>
+        <a:font script="Taml" typeface="Latha"/>
+        <a:font script="Syrc" typeface="Estrangelo Edessa"/>
+        <a:font script="Orya" typeface="Kalinga"/>
+        <a:font script="Mlym" typeface="Kartika"/>
+        <a:font script="Laoo" typeface="DokChampa"/>
+        <a:font script="Sinh" typeface="Iskoola Pota"/>
+        <a:font script="Mong" typeface="Mongolian Baiti"/>
+        <a:font script="Viet" typeface="Arial"/>
+        <a:font script="Uigh" typeface="Microsoft Uighur"/>
+        <a:font script="Geor" typeface="Sylfaen"/>
+        <a:font script="Armn" typeface="Arial"/>
+        <a:font script="Bugi" typeface="Leelawadee UI"/>
+        <a:font script="Bopo" typeface="Microsoft JhengHei"/>
+        <a:font script="Java" typeface="Javanese Text"/>
+        <a:font script="Lisu" typeface="Segoe UI"/>
+        <a:font script="Mymr" typeface="Myanmar Text"/>
+        <a:font script="Nkoo" typeface="Ebrima"/>
+        <a:font script="Olck" typeface="Nirmala UI"/>
+        <a:font script="Osma" typeface="Ebrima"/>
+        <a:font script="Phag" typeface="Phagspa"/>
+        <a:font script="Syrn" typeface="Estrangelo Edessa"/>
+        <a:font script="Syrj" typeface="Estrangelo Edessa"/>
+        <a:font script="Syre" typeface="Estrangelo Edessa"/>
+        <a:font script="Sora" typeface="Nirmala UI"/>
+        <a:font script="Tale" typeface="Microsoft Tai Le"/>
+        <a:font script="Talu" typeface="Microsoft New Tai Lue"/>
+        <a:font script="Tfng" typeface="Ebrima"/>
+      </a:minorFont>
+    </a:fontScheme>
+    <a:fmtScheme name="Office">
+      <a:fillStyleLst>
+        <a:solidFill>
+          <a:schemeClr val="phClr"/>
+        </a:solidFill>
+        <a:gradFill rotWithShape="1">
+          <a:gsLst>
+            <a:gs pos="0">
+              <a:schemeClr val="phClr">
+                <a:lumMod val="110000"/>
+                <a:satMod val="105000"/>
+                <a:tint val="67000"/>
+              </a:schemeClr>
+            </a:gs>
+            <a:gs pos="50000">
+              <a:schemeClr val="phClr">
+                <a:lumMod val="105000"/>
+                <a:satMod val="103000"/>
+                <a:tint val="73000"/>
+              </a:schemeClr>
+            </a:gs>
+            <a:gs pos="100000">
+              <a:schemeClr val="phClr">
+                <a:lumMod val="105000"/>
+                <a:satMod val="109000"/>
+                <a:tint val="81000"/>
+              </a:schemeClr>
+            </a:gs>
+          </a:gsLst>
+          <a:lin ang="5400000" scaled="0"/>
+        </a:gradFill>
+        <a:gradFill rotWithShape="1">
+          <a:gsLst>
+            <a:gs pos="0">
+              <a:schemeClr val="phClr">
+                <a:satMod val="103000"/>
+                <a:lumMod val="102000"/>
+                <a:tint val="94000"/>
+              </a:schemeClr>
+            </a:gs>
+            <a:gs pos="50000">
+              <a:schemeClr val="phClr">
+                <a:satMod val="110000"/>
+                <a:lumMod val="100000"/>
+                <a:shade val="100000"/>
+              </a:schemeClr>
+            </a:gs>
+            <a:gs pos="100000">
+              <a:schemeClr val="phClr">
+                <a:lumMod val="99000"/>
+                <a:satMod val="120000"/>
+                <a:shade val="78000"/>
+              </a:schemeClr>
+            </a:gs>
+          </a:gsLst>
+          <a:lin ang="5400000" scaled="0"/>
+        </a:gradFill>
+      </a:fillStyleLst>
+      <a:lnStyleLst>
+        <a:ln w="12700" cap="flat" cmpd="sng" algn="ctr">
+          <a:solidFill>
+            <a:schemeClr val="phClr"/>
+          </a:solidFill>
+          <a:prstDash val="solid"/>
+          <a:miter lim="800000"/>
+        </a:ln>
+        <a:ln w="19050" cap="flat" cmpd="sng" algn="ctr">
+          <a:solidFill>
+            <a:schemeClr val="phClr"/>
+          </a:solidFill>
+          <a:prstDash val="solid"/>
+          <a:miter lim="800000"/>
+        </a:ln>
+        <a:ln w="25400" cap="flat" cmpd="sng" algn="ctr">
+          <a:solidFill>
+            <a:schemeClr val="phClr"/>
+          </a:solidFill>
+          <a:prstDash val="solid"/>
+          <a:miter lim="800000"/>
+        </a:ln>
+      </a:lnStyleLst>
+      <a:effectStyleLst>
+        <a:effectStyle>
+          <a:effectLst/>
+        </a:effectStyle>
+        <a:effectStyle>
+          <a:effectLst/>
+        </a:effectStyle>
+        <a:effectStyle>
+          <a:effectLst>
+            <a:outerShdw blurRad="57150" dist="19050" dir="5400000" algn="ctr" rotWithShape="0">
+              <a:srgbClr val="000000">
+                <a:alpha val="63000"/>
+              </a:srgbClr>
+            </a:outerShdw>
+          </a:effectLst>
+        </a:effectStyle>
+      </a:effectStyleLst>
+      <a:bgFillStyleLst>
+        <a:solidFill>
+          <a:schemeClr val="phClr"/>
+        </a:solidFill>
+        <a:solidFill>
+          <a:schemeClr val="phClr">
+            <a:tint val="95000"/>
+            <a:satMod val="170000"/>
+          </a:schemeClr>
+        </a:solidFill>
+        <a:gradFill rotWithShape="1">
+          <a:gsLst>
+            <a:gs pos="0">
+              <a:schemeClr val="phClr">
+                <a:tint val="93000"/>
+                <a:satMod val="150000"/>
+                <a:shade val="98000"/>
+                <a:lumMod val="102000"/>
+              </a:schemeClr>
+            </a:gs>
+            <a:gs pos="50000">
+              <a:schemeClr val="phClr">
+                <a:tint val="98000"/>
+                <a:satMod val="130000"/>
+                <a:shade val="90000"/>
+                <a:lumMod val="103000"/>
+              </a:schemeClr>
+            </a:gs>
+            <a:gs pos="100000">
+              <a:schemeClr val="phClr">
+                <a:shade val="63000"/>
+                <a:satMod val="120000"/>
+              </a:schemeClr>
+            </a:gs>
+          </a:gsLst>
+          <a:lin ang="5400000" scaled="0"/>
+        </a:gradFill>
+      </a:bgFillStyleLst>
+    </a:fmtScheme>
+  </a:themeElements>
+  <a:objectDefaults>
+    <a:lnDef>
+      <a:spPr/>
+      <a:bodyPr/>
+      <a:lstStyle/>
+      <a:style>
+        <a:lnRef idx="2">
+          <a:schemeClr val="accent1"/>
+        </a:lnRef>
+        <a:fillRef idx="0">
+          <a:schemeClr val="accent1"/>
+        </a:fillRef>
+        <a:effectRef idx="1">
+          <a:schemeClr val="accent1"/>
+        </a:effectRef>
+        <a:fontRef idx="minor">
+          <a:schemeClr val="tx1"/>
+        </a:fontRef>
+      </a:style>
+    </a:lnDef>
+  </a:objectDefaults>
+  <a:extraClrSchemeLst/>
+  <a:extLst>
+    <a:ext uri="{05A4C25C-085E-4340-85A3-A5531E510DB2}">
+      <thm15:themeFamily xmlns:thm15="http://schemas.microsoft.com/office/thememl/2012/main" name="Office Theme" id="{2E142A2C-CD16-42D6-873A-C26D2A0506FA}" vid="{1BDDFF52-6CD6-40A5-AB3C-68EB2F1E4D0A}"/>
+    </a:ext>
+  </a:extLst>
+</a:theme>
 </file>